--- a/deck/ares_board_deck.pptx
+++ b/deck/ares_board_deck.pptx
@@ -509,7 +509,7 @@
           <a:lstStyle/>
           <a:p>
             <a:r>
-              <a:t>These four are read directly from the consumes and produces clauses. Of six possible partner pairs, two are stated. Meridian appears in no exchange with anyone. No interface variable is named anywhere, in any direction, for any partner.</a:t>
+              <a:t>Open here. The value of this slide is that it stops the room treating these as four problems with four owners.</a:t>
             </a:r>
           </a:p>
         </p:txBody>
@@ -579,7 +579,7 @@
           <a:lstStyle/>
           <a:p>
             <a:r>
-              <a:t>This is the slide to slow down on. The point is not that the partners are difficult. It is that none of these is a failure of effort, and all four resolve to the same missing artifact.</a:t>
+              <a:t>If asked how these were found: list what each partner consumes against what each produces. The gaps are in the text.</a:t>
             </a:r>
           </a:p>
         </p:txBody>
@@ -649,7 +649,7 @@
           <a:lstStyle/>
           <a:p>
             <a:r>
-              <a:t>If pressed on the counter-case: loose coupling is defensible for a planning study and indefensible for a resilience claim. The funder is buying a resilience claim.</a:t>
+              <a:t>Counter-case: loose coupling is defensible for a planning study and indefensible for a resilience claim. The funder is buying a resilience claim.</a:t>
             </a:r>
           </a:p>
         </p:txBody>
@@ -719,7 +719,7 @@
           <a:lstStyle/>
           <a:p>
             <a:r>
-              <a:t>The parallelism is a dependency argument and not a preference. Say it that way. Helix is in the room and off the critical path.</a:t>
+              <a:t>This slide answers the real question, which is whether the programme survives contact with reality.</a:t>
             </a:r>
           </a:p>
         </p:txBody>
@@ -789,7 +789,7 @@
           <a:lstStyle/>
           <a:p>
             <a:r>
-              <a:t>The derate is the meeting to schedule first and allow most time for. Everything else on this slide is a decision, not work.</a:t>
+              <a:t>The traceability pass is the deliverable, not the run. Those four questions are exactly what the funder's review asks.</a:t>
             </a:r>
           </a:p>
         </p:txBody>
@@ -859,7 +859,7 @@
           <a:lstStyle/>
           <a:p>
             <a:r>
-              <a:t>Second-year funding depends on this demonstration, so every item in the plan was tested against whether it helps get this slide to be true.</a:t>
+              <a:t>The last bullet is the one to say out loud. It is a governance point dressed as a seating plan. Helix is in the room because it has the only working transport code for the failing exchange, which could get week 2 running in days. The plan benefits from that without depending on it.</a:t>
             </a:r>
           </a:p>
         </p:txBody>
@@ -929,7 +929,7 @@
           <a:lstStyle/>
           <a:p>
             <a:r>
-              <a:t>The checker matters here too: a neutral tool reporting that two partners exchange something neither declares makes the gap a property of the interface rather than an accusation against a partner.</a:t>
+              <a:t>A neutral checker reporting that two partners exchange something neither declares makes the gap a property of the interface rather than an accusation against a partner.</a:t>
             </a:r>
           </a:p>
         </p:txBody>
@@ -999,7 +999,7 @@
           <a:lstStyle/>
           <a:p>
             <a:r>
-              <a:t>Demo in three minutes: run make, show the page, select an orphaned item, show the finding, then open the declaration it came from and show the sentence. Close on the limits.</a:t>
+              <a:t>Demo in three minutes: run it, show the calendar, select an orphaned item, show the finding, open the declaration and read the sentence it came from. Close on the limits.</a:t>
             </a:r>
           </a:p>
         </p:txBody>
@@ -4034,7 +4034,7 @@
                 </a:solidFill>
                 <a:latin typeface="Helvetica"/>
               </a:rPr>
-              <a:t>Four objects nobody owns</a:t>
+              <a:t>This is triage</a:t>
             </a:r>
           </a:p>
         </p:txBody>
@@ -4068,7 +4068,7 @@
                 </a:solidFill>
                 <a:latin typeface="Helvetica"/>
               </a:rPr>
-              <a:t>ARES does not have four problems. It has one missing artifact.</a:t>
+              <a:t>Four things have gone wrong at month 8. They are four views of one missing artifact.</a:t>
             </a:r>
           </a:p>
         </p:txBody>
@@ -4146,7 +4146,7 @@
                 </a:solidFill>
                 <a:latin typeface="Helvetica"/>
               </a:rPr>
-              <a:t>**The aggregation operator.** Solis plans against bounds over multi-year horizons. Tharsis emits hourly traces. The conversion between them requires a judgement about statistic and window, and no partner's interface claims it.</a:t>
+              <a:t>**An exchange is two months late and in the wrong format.** Cadence, latency and encoding were never contract terms. An exchange cannot be late against a deadline nobody set.</a:t>
             </a:r>
           </a:p>
         </p:txBody>
@@ -4159,7 +4159,7 @@
         </p:nvSpPr>
         <p:spPr>
           <a:xfrm>
-            <a:off x="585216" y="3145536"/>
+            <a:off x="585216" y="2779775"/>
             <a:ext cx="50292" cy="182880"/>
           </a:xfrm>
           <a:prstGeom prst="roundRect">
@@ -4203,7 +4203,7 @@
         </p:nvSpPr>
         <p:spPr>
           <a:xfrm>
-            <a:off x="786384" y="3090672"/>
+            <a:off x="786384" y="2724911"/>
             <a:ext cx="10222992" cy="365760"/>
           </a:xfrm>
           <a:prstGeom prst="rect">
@@ -4224,7 +4224,7 @@
                 </a:solidFill>
                 <a:latin typeface="Helvetica"/>
               </a:rPr>
-              <a:t>**The derate function.** Solis publishes installed capacity. Tharsis needs available capacity. Tharsis applies its own derate, fitted to a reliability memo that predates the configuration it is applied to.</a:t>
+              <a:t>**Two partners dispute what variables mean and who owns them.** The variables have no declared owner, so the partner that needed names invented them and built against them.</a:t>
             </a:r>
           </a:p>
         </p:txBody>
@@ -4237,7 +4237,7 @@
         </p:nvSpPr>
         <p:spPr>
           <a:xfrm>
-            <a:off x="585216" y="4389120"/>
+            <a:off x="585216" y="3840479"/>
             <a:ext cx="50292" cy="182880"/>
           </a:xfrm>
           <a:prstGeom prst="roundRect">
@@ -4281,7 +4281,7 @@
         </p:nvSpPr>
         <p:spPr>
           <a:xfrm>
-            <a:off x="786384" y="4334256"/>
+            <a:off x="786384" y="3785615"/>
             <a:ext cx="10222992" cy="365760"/>
           </a:xfrm>
           <a:prstGeom prst="rect">
@@ -4302,7 +4302,7 @@
                 </a:solidFill>
                 <a:latin typeface="Helvetica"/>
               </a:rPr>
-              <a:t>**The service level thresholds.** Meridian defines what counts as acceptable. Tharsis reports shortfalls against limits it took from a human spaceflight standard, because no partner issued a set.</a:t>
+              <a:t>**The risk laboratory says the interface cannot carry its claims.** It has no uncertainty clause. That is a missing clause, not a complaint about quality.</a:t>
             </a:r>
           </a:p>
         </p:txBody>
@@ -4315,7 +4315,7 @@
         </p:nvSpPr>
         <p:spPr>
           <a:xfrm>
-            <a:off x="585216" y="5632703"/>
+            <a:off x="585216" y="4901183"/>
             <a:ext cx="50292" cy="182880"/>
           </a:xfrm>
           <a:prstGeom prst="roundRect">
@@ -4359,7 +4359,7 @@
         </p:nvSpPr>
         <p:spPr>
           <a:xfrm>
-            <a:off x="786384" y="5577840"/>
+            <a:off x="786384" y="4846320"/>
             <a:ext cx="10222992" cy="365760"/>
           </a:xfrm>
           <a:prstGeom prst="rect">
@@ -4380,14 +4380,92 @@
                 </a:solidFill>
                 <a:latin typeface="Helvetica"/>
               </a:rPr>
-              <a:t>**The population schedule.** The largest single driver of hourly demand. Consumed by Tharsis, produced by nobody, versioned by no one.</a:t>
-            </a:r>
-          </a:p>
-        </p:txBody>
-      </p:sp>
-      <p:sp>
-        <p:nvSpPr>
-          <p:cNvPr id="12" name="TextBox 11"/>
+              <a:t>**Nobody has shown the coupling is necessary.** The operators that bridge hourly simulation to multi-year planning are owned by no one.</a:t>
+            </a:r>
+          </a:p>
+        </p:txBody>
+      </p:sp>
+      <p:sp>
+        <p:nvSpPr>
+          <p:cNvPr id="12" name="Rounded Rectangle 11"/>
+          <p:cNvSpPr/>
+          <p:nvPr/>
+        </p:nvSpPr>
+        <p:spPr>
+          <a:xfrm>
+            <a:off x="585216" y="5961888"/>
+            <a:ext cx="50292" cy="182880"/>
+          </a:xfrm>
+          <a:prstGeom prst="roundRect">
+            <a:avLst/>
+          </a:prstGeom>
+          <a:solidFill>
+            <a:srgbClr val="475569"/>
+          </a:solidFill>
+          <a:ln>
+            <a:noFill/>
+          </a:ln>
+          <a:effectLst/>
+        </p:spPr>
+        <p:style>
+          <a:lnRef idx="1">
+            <a:schemeClr val="accent1"/>
+          </a:lnRef>
+          <a:fillRef idx="3">
+            <a:schemeClr val="accent1"/>
+          </a:fillRef>
+          <a:effectRef idx="2">
+            <a:schemeClr val="accent1"/>
+          </a:effectRef>
+          <a:fontRef idx="minor">
+            <a:schemeClr val="lt1"/>
+          </a:fontRef>
+        </p:style>
+        <p:txBody>
+          <a:bodyPr rtlCol="0" anchor="ctr"/>
+          <a:lstStyle/>
+          <a:p>
+            <a:pPr algn="ctr"/>
+          </a:p>
+        </p:txBody>
+      </p:sp>
+      <p:sp>
+        <p:nvSpPr>
+          <p:cNvPr id="13" name="TextBox 12"/>
+          <p:cNvSpPr txBox="1"/>
+          <p:nvPr/>
+        </p:nvSpPr>
+        <p:spPr>
+          <a:xfrm>
+            <a:off x="786384" y="5907024"/>
+            <a:ext cx="10222992" cy="365760"/>
+          </a:xfrm>
+          <a:prstGeom prst="rect">
+            <a:avLst/>
+          </a:prstGeom>
+          <a:noFill/>
+        </p:spPr>
+        <p:txBody>
+          <a:bodyPr wrap="square">
+            <a:spAutoFit/>
+          </a:bodyPr>
+          <a:lstStyle/>
+          <a:p>
+            <a:r>
+              <a:rPr sz="1350" b="1">
+                <a:solidFill>
+                  <a:srgbClr val="1F2937"/>
+                </a:solidFill>
+                <a:latin typeface="Helvetica"/>
+              </a:rPr>
+              <a:t>Second-year funding depends on a demonstration. This is a crisis to be stabilised, not a programme to be improved.</a:t>
+            </a:r>
+          </a:p>
+        </p:txBody>
+      </p:sp>
+      <p:sp>
+        <p:nvSpPr>
+          <p:cNvPr id="14" name="TextBox 13"/>
           <p:cNvSpPr txBox="1"/>
           <p:nvPr/>
         </p:nvSpPr>
@@ -4414,7 +4492,7 @@
                 </a:solidFill>
                 <a:latin typeface="Helvetica"/>
               </a:rPr>
-              <a:t>Read off the partner descriptions in the brief. Nothing inferred.</a:t>
+              <a:t>None of the four is a failure of effort. Four workstreams aimed at them separately would each address a symptom.</a:t>
             </a:r>
           </a:p>
         </p:txBody>
@@ -4466,7 +4544,7 @@
                 </a:solidFill>
                 <a:latin typeface="Helvetica"/>
               </a:rPr>
-              <a:t>Four symptoms, one cause</a:t>
+              <a:t>Four objects nobody owns</a:t>
             </a:r>
           </a:p>
         </p:txBody>
@@ -4500,7 +4578,7 @@
                 </a:solidFill>
                 <a:latin typeface="Helvetica"/>
               </a:rPr>
-              <a:t>Every symptom at month 8 is a clause of a contract that was never written.</a:t>
+              <a:t>Read off the partners' own consumes and produces clauses. Nothing inferred.</a:t>
             </a:r>
           </a:p>
         </p:txBody>
@@ -4578,7 +4656,7 @@
                 </a:solidFill>
                 <a:latin typeface="Helvetica"/>
               </a:rPr>
-              <a:t>**Two months late, wrong format.** Cadence, latency and encoding were never contract terms. An exchange cannot be late against a deadline nobody set.</a:t>
+              <a:t>**The aggregation operator.** Solis plans against bounds over multi-year horizons, Tharsis emits hourly traces, and the conversion needs a judgement about statistic and window that no interface claims.</a:t>
             </a:r>
           </a:p>
         </p:txBody>
@@ -4591,7 +4669,7 @@
         </p:nvSpPr>
         <p:spPr>
           <a:xfrm>
-            <a:off x="585216" y="2779775"/>
+            <a:off x="585216" y="2962656"/>
             <a:ext cx="50292" cy="182880"/>
           </a:xfrm>
           <a:prstGeom prst="roundRect">
@@ -4635,7 +4713,7 @@
         </p:nvSpPr>
         <p:spPr>
           <a:xfrm>
-            <a:off x="786384" y="2724911"/>
+            <a:off x="786384" y="2907791"/>
             <a:ext cx="10222992" cy="365760"/>
           </a:xfrm>
           <a:prstGeom prst="rect">
@@ -4656,7 +4734,7 @@
                 </a:solidFill>
                 <a:latin typeface="Helvetica"/>
               </a:rPr>
-              <a:t>**Tharsis and Helix dispute meaning and ownership.** The variables have no declared owner, so a partner that needed names invented them and built against them.</a:t>
+              <a:t>**The derate function.** Solis publishes installed capacity, Tharsis needs available capacity, and Tharsis applies its own derate fitted to a memo predating the configuration.</a:t>
             </a:r>
           </a:p>
         </p:txBody>
@@ -4669,7 +4747,7 @@
         </p:nvSpPr>
         <p:spPr>
           <a:xfrm>
-            <a:off x="585216" y="3840479"/>
+            <a:off x="585216" y="4023359"/>
             <a:ext cx="50292" cy="182880"/>
           </a:xfrm>
           <a:prstGeom prst="roundRect">
@@ -4713,7 +4791,7 @@
         </p:nvSpPr>
         <p:spPr>
           <a:xfrm>
-            <a:off x="786384" y="3785615"/>
+            <a:off x="786384" y="3968496"/>
             <a:ext cx="10222992" cy="365760"/>
           </a:xfrm>
           <a:prstGeom prst="rect">
@@ -4734,7 +4812,7 @@
                 </a:solidFill>
                 <a:latin typeface="Helvetica"/>
               </a:rPr>
-              <a:t>**Meridian cannot represent uncertainty.** The interface has no uncertainty clause. This is not a complaint about quality, it is a statement that a required clause is missing.</a:t>
+              <a:t>**The service level thresholds.** Meridian defines what counts as acceptable and has no route to the model that applies it. Tharsis uses limits it took from a public standard instead.</a:t>
             </a:r>
           </a:p>
         </p:txBody>
@@ -4747,7 +4825,7 @@
         </p:nvSpPr>
         <p:spPr>
           <a:xfrm>
-            <a:off x="585216" y="4901183"/>
+            <a:off x="585216" y="5266943"/>
             <a:ext cx="50292" cy="182880"/>
           </a:xfrm>
           <a:prstGeom prst="roundRect">
@@ -4791,7 +4869,7 @@
         </p:nvSpPr>
         <p:spPr>
           <a:xfrm>
-            <a:off x="786384" y="4846320"/>
+            <a:off x="786384" y="5212079"/>
             <a:ext cx="10222992" cy="365760"/>
           </a:xfrm>
           <a:prstGeom prst="rect">
@@ -4812,14 +4890,92 @@
                 </a:solidFill>
                 <a:latin typeface="Helvetica"/>
               </a:rPr>
-              <a:t>**The scales are unreconciled.** The operators that bridge hourly to multi-year are the two unowned objects above.</a:t>
-            </a:r>
-          </a:p>
-        </p:txBody>
-      </p:sp>
-      <p:sp>
-        <p:nvSpPr>
-          <p:cNvPr id="12" name="TextBox 11"/>
+              <a:t>**The population schedule.** The largest single driver of hourly demand. Consumed by Tharsis, produced by nobody, versioned by no one.</a:t>
+            </a:r>
+          </a:p>
+        </p:txBody>
+      </p:sp>
+      <p:sp>
+        <p:nvSpPr>
+          <p:cNvPr id="12" name="Rounded Rectangle 11"/>
+          <p:cNvSpPr/>
+          <p:nvPr/>
+        </p:nvSpPr>
+        <p:spPr>
+          <a:xfrm>
+            <a:off x="585216" y="6327647"/>
+            <a:ext cx="50292" cy="182880"/>
+          </a:xfrm>
+          <a:prstGeom prst="roundRect">
+            <a:avLst/>
+          </a:prstGeom>
+          <a:solidFill>
+            <a:srgbClr val="475569"/>
+          </a:solidFill>
+          <a:ln>
+            <a:noFill/>
+          </a:ln>
+          <a:effectLst/>
+        </p:spPr>
+        <p:style>
+          <a:lnRef idx="1">
+            <a:schemeClr val="accent1"/>
+          </a:lnRef>
+          <a:fillRef idx="3">
+            <a:schemeClr val="accent1"/>
+          </a:fillRef>
+          <a:effectRef idx="2">
+            <a:schemeClr val="accent1"/>
+          </a:effectRef>
+          <a:fontRef idx="minor">
+            <a:schemeClr val="lt1"/>
+          </a:fontRef>
+        </p:style>
+        <p:txBody>
+          <a:bodyPr rtlCol="0" anchor="ctr"/>
+          <a:lstStyle/>
+          <a:p>
+            <a:pPr algn="ctr"/>
+          </a:p>
+        </p:txBody>
+      </p:sp>
+      <p:sp>
+        <p:nvSpPr>
+          <p:cNvPr id="13" name="TextBox 12"/>
+          <p:cNvSpPr txBox="1"/>
+          <p:nvPr/>
+        </p:nvSpPr>
+        <p:spPr>
+          <a:xfrm>
+            <a:off x="786384" y="6272783"/>
+            <a:ext cx="10222992" cy="365760"/>
+          </a:xfrm>
+          <a:prstGeom prst="rect">
+            <a:avLst/>
+          </a:prstGeom>
+          <a:noFill/>
+        </p:spPr>
+        <p:txBody>
+          <a:bodyPr wrap="square">
+            <a:spAutoFit/>
+          </a:bodyPr>
+          <a:lstStyle/>
+          <a:p>
+            <a:r>
+              <a:rPr sz="1350" b="1">
+                <a:solidFill>
+                  <a:srgbClr val="1F2937"/>
+                </a:solidFill>
+                <a:latin typeface="Helvetica"/>
+              </a:rPr>
+              <a:t>Of six possible partner pairs, two are stated. No interface variable is named anywhere, in any direction, by any partner.</a:t>
+            </a:r>
+          </a:p>
+        </p:txBody>
+      </p:sp>
+      <p:sp>
+        <p:nvSpPr>
+          <p:cNvPr id="14" name="TextBox 13"/>
           <p:cNvSpPr txBox="1"/>
           <p:nvPr/>
         </p:nvSpPr>
@@ -4846,7 +5002,7 @@
                 </a:solidFill>
                 <a:latin typeface="Helvetica"/>
               </a:rPr>
-              <a:t>Four workstreams aimed at these separately would each address a symptom.</a:t>
+              <a:t>A private assumption is invisible in a status meeting and lethal in an integration.</a:t>
             </a:r>
           </a:p>
         </p:txBody>
@@ -5010,7 +5166,7 @@
                 </a:solidFill>
                 <a:latin typeface="Helvetica"/>
               </a:rPr>
-              <a:t>In the 2018 planet-encircling dust event, one rover's array output fell from 645 Wh to 22 Wh in eleven days, around 3 percent of clear-sky baseline.</a:t>
+              <a:t>In the 2018 planet-encircling dust event, one rover's array output fell from 645 Wh to 22 Wh in eleven days, about 3 percent of clear-sky baseline.</a:t>
             </a:r>
           </a:p>
         </p:txBody>
@@ -5088,7 +5244,7 @@
                 </a:solidFill>
                 <a:latin typeface="Helvetica"/>
               </a:rPr>
-              <a:t>The same storm drives crew indoors, changes activity schedules, raises thermal load and shifts life support duty cycles. Generation falls and demand rises together.</a:t>
+              <a:t>The same storm drives crew indoors, changes activity schedules, raises thermal load and shifts life support duty cycles. Generation falls and demand rises together, because both answer to the same weather.</a:t>
             </a:r>
           </a:p>
         </p:txBody>
@@ -5101,7 +5257,7 @@
         </p:nvSpPr>
         <p:spPr>
           <a:xfrm>
-            <a:off x="585216" y="3840479"/>
+            <a:off x="585216" y="4023359"/>
             <a:ext cx="50292" cy="182880"/>
           </a:xfrm>
           <a:prstGeom prst="roundRect">
@@ -5145,7 +5301,7 @@
         </p:nvSpPr>
         <p:spPr>
           <a:xfrm>
-            <a:off x="786384" y="3785615"/>
+            <a:off x="786384" y="3968496"/>
             <a:ext cx="10222992" cy="365760"/>
           </a:xfrm>
           <a:prstGeom prst="rect">
@@ -5166,7 +5322,7 @@
                 </a:solidFill>
                 <a:latin typeface="Helvetica"/>
               </a:rPr>
-              <a:t>Exchange bounds once and that correlation is gone by construction. What returns is a worst-case supply and a worst-case demand as two separate numbers, when the coincidence is what ends a settlement.</a:t>
+              <a:t>Exchange bounds once and that correlation is gone by construction. What returns is a worst-case supply and a worst-case demand as two numbers, when the coincidence is what ends a settlement.</a:t>
             </a:r>
           </a:p>
         </p:txBody>
@@ -5179,7 +5335,7 @@
         </p:nvSpPr>
         <p:spPr>
           <a:xfrm>
-            <a:off x="585216" y="5084064"/>
+            <a:off x="585216" y="5266943"/>
             <a:ext cx="50292" cy="182880"/>
           </a:xfrm>
           <a:prstGeom prst="roundRect">
@@ -5223,7 +5379,7 @@
         </p:nvSpPr>
         <p:spPr>
           <a:xfrm>
-            <a:off x="786384" y="5029200"/>
+            <a:off x="786384" y="5212079"/>
             <a:ext cx="10222992" cy="365760"/>
           </a:xfrm>
           <a:prstGeom prst="rect">
@@ -5244,7 +5400,7 @@
                 </a:solidFill>
                 <a:latin typeface="Helvetica"/>
               </a:rPr>
-              <a:t>That is what Meridian means by compound events. Its objection and the coupling question are one question, not two.</a:t>
+              <a:t>That is what the risk laboratory means by compound events. Its objection and the coupling question are one question.</a:t>
             </a:r>
           </a:p>
         </p:txBody>
@@ -5257,7 +5413,7 @@
         </p:nvSpPr>
         <p:spPr>
           <a:xfrm>
-            <a:off x="585216" y="5961888"/>
+            <a:off x="585216" y="6144767"/>
             <a:ext cx="50292" cy="182880"/>
           </a:xfrm>
           <a:prstGeom prst="roundRect">
@@ -5301,7 +5457,7 @@
         </p:nvSpPr>
         <p:spPr>
           <a:xfrm>
-            <a:off x="786384" y="5907024"/>
+            <a:off x="786384" y="6089903"/>
             <a:ext cx="10222992" cy="365760"/>
           </a:xfrm>
           <a:prstGeom prst="rect">
@@ -5322,7 +5478,7 @@
                 </a:solidFill>
                 <a:latin typeface="Helvetica"/>
               </a:rPr>
-              <a:t>**And coupling tightly across three vocabularies and two clocks does not fail loudly. It agrees quickly and wrongly, once per timestep.**</a:t>
+              <a:t>**Coupling tightly across three vocabularies and two clocks does not fail loudly. It agrees quickly and wrongly, once per timestep.**</a:t>
             </a:r>
           </a:p>
         </p:txBody>
@@ -5408,7 +5564,7 @@
                 </a:solidFill>
                 <a:latin typeface="Helvetica"/>
               </a:rPr>
-              <a:t>Six weeks: two tracks, one critical path</a:t>
+              <a:t>Six weeks, and never nothing to show</a:t>
             </a:r>
           </a:p>
         </p:txBody>
@@ -5442,7 +5598,7 @@
                 </a:solidFill>
                 <a:latin typeface="Helvetica"/>
               </a:rPr>
-              <a:t>Solis to Tharsis is the critical path. Meridian runs alongside it, not after it.</a:t>
+              <a:t>From week 2 the demonstration runs. Every week after improves it rather than building toward a first one.</a:t>
             </a:r>
           </a:p>
         </p:txBody>
@@ -5520,7 +5676,7 @@
                 </a:solidFill>
                 <a:latin typeface="Helvetica"/>
               </a:rPr>
-              <a:t>**Track A, weeks 1 to 3.** Declare the Solis to Tharsis contract. These are the two models that must exchange anything at all, and nothing runs end to end until this exists.</a:t>
+              <a:t>**Week 2 runs end to end on deliberately crude inputs.** Placeholder numbers, one sol of data, nothing polished. Its only job is to make every format, encoding and calendar mismatch fail while there is time to fix them.</a:t>
             </a:r>
           </a:p>
         </p:txBody>
@@ -5533,7 +5689,7 @@
         </p:nvSpPr>
         <p:spPr>
           <a:xfrm>
-            <a:off x="585216" y="2779775"/>
+            <a:off x="585216" y="2962656"/>
             <a:ext cx="50292" cy="182880"/>
           </a:xfrm>
           <a:prstGeom prst="roundRect">
@@ -5577,7 +5733,7 @@
         </p:nvSpPr>
         <p:spPr>
           <a:xfrm>
-            <a:off x="786384" y="2724911"/>
+            <a:off x="786384" y="2907791"/>
             <a:ext cx="10222992" cy="365760"/>
           </a:xfrm>
           <a:prstGeom prst="rect">
@@ -5598,7 +5754,7 @@
                 </a:solidFill>
                 <a:latin typeface="Helvetica"/>
               </a:rPr>
-              <a:t>**Track B, weeks 1 to 3.** Elicit Meridian's evidence requirement. Run it afterwards and the contract gets agreed twice, because the first version will not carry uncertainty and Meridian will say so.</a:t>
+              <a:t>The consortium is at month 8 and has never run end to end. An exchange arriving late and in an unexpected format is what that produces.</a:t>
             </a:r>
           </a:p>
         </p:txBody>
@@ -5676,7 +5832,7 @@
                 </a:solidFill>
                 <a:latin typeface="Helvetica"/>
               </a:rPr>
-              <a:t>**Weeks 4 to 6.** Normal case, stress case, then the traceability pass.</a:t>
+              <a:t>**Each week's output is a superset of the last.** The worst case in week 6 is showing week 5's version.</a:t>
             </a:r>
           </a:p>
         </p:txBody>
@@ -5689,7 +5845,7 @@
         </p:nvSpPr>
         <p:spPr>
           <a:xfrm>
-            <a:off x="585216" y="4718303"/>
+            <a:off x="585216" y="4901183"/>
             <a:ext cx="50292" cy="182880"/>
           </a:xfrm>
           <a:prstGeom prst="roundRect">
@@ -5733,7 +5889,7 @@
         </p:nvSpPr>
         <p:spPr>
           <a:xfrm>
-            <a:off x="786384" y="4663440"/>
+            <a:off x="786384" y="4846320"/>
             <a:ext cx="10222992" cy="365760"/>
           </a:xfrm>
           <a:prstGeom prst="rect">
@@ -5754,14 +5910,92 @@
                 </a:solidFill>
                 <a:latin typeface="Helvetica"/>
               </a:rPr>
-              <a:t>**Helix.** Re-points its existing adapter to the week-one ruling, a diff rather than a rewrite, and runs it as a continuous conformance check on the one exchange that already failed. It never receives authority over meaning.</a:t>
-            </a:r>
-          </a:p>
-        </p:txBody>
-      </p:sp>
-      <p:sp>
-        <p:nvSpPr>
-          <p:cNvPr id="12" name="TextBox 11"/>
+              <a:t>**Week 5 is buffer**, and nothing is scheduled into it that cannot move out. A plan with no slack assumes nothing goes wrong.</a:t>
+            </a:r>
+          </a:p>
+        </p:txBody>
+      </p:sp>
+      <p:sp>
+        <p:nvSpPr>
+          <p:cNvPr id="12" name="Rounded Rectangle 11"/>
+          <p:cNvSpPr/>
+          <p:nvPr/>
+        </p:nvSpPr>
+        <p:spPr>
+          <a:xfrm>
+            <a:off x="585216" y="5779007"/>
+            <a:ext cx="50292" cy="182880"/>
+          </a:xfrm>
+          <a:prstGeom prst="roundRect">
+            <a:avLst/>
+          </a:prstGeom>
+          <a:solidFill>
+            <a:srgbClr val="475569"/>
+          </a:solidFill>
+          <a:ln>
+            <a:noFill/>
+          </a:ln>
+          <a:effectLst/>
+        </p:spPr>
+        <p:style>
+          <a:lnRef idx="1">
+            <a:schemeClr val="accent1"/>
+          </a:lnRef>
+          <a:fillRef idx="3">
+            <a:schemeClr val="accent1"/>
+          </a:fillRef>
+          <a:effectRef idx="2">
+            <a:schemeClr val="accent1"/>
+          </a:effectRef>
+          <a:fontRef idx="minor">
+            <a:schemeClr val="lt1"/>
+          </a:fontRef>
+        </p:style>
+        <p:txBody>
+          <a:bodyPr rtlCol="0" anchor="ctr"/>
+          <a:lstStyle/>
+          <a:p>
+            <a:pPr algn="ctr"/>
+          </a:p>
+        </p:txBody>
+      </p:sp>
+      <p:sp>
+        <p:nvSpPr>
+          <p:cNvPr id="13" name="TextBox 12"/>
+          <p:cNvSpPr txBox="1"/>
+          <p:nvPr/>
+        </p:nvSpPr>
+        <p:spPr>
+          <a:xfrm>
+            <a:off x="786384" y="5724144"/>
+            <a:ext cx="10222992" cy="365760"/>
+          </a:xfrm>
+          <a:prstGeom prst="rect">
+            <a:avLst/>
+          </a:prstGeom>
+          <a:noFill/>
+        </p:spPr>
+        <p:txBody>
+          <a:bodyPr wrap="square">
+            <a:spAutoFit/>
+          </a:bodyPr>
+          <a:lstStyle/>
+          <a:p>
+            <a:r>
+              <a:rPr sz="1350" b="1">
+                <a:solidFill>
+                  <a:srgbClr val="1F2937"/>
+                </a:solidFill>
+                <a:latin typeface="Helvetica"/>
+              </a:rPr>
+              <a:t>No week in this plan answers the question 'what can you show us' with nothing, because that answer ends the programme.</a:t>
+            </a:r>
+          </a:p>
+        </p:txBody>
+      </p:sp>
+      <p:sp>
+        <p:nvSpPr>
+          <p:cNvPr id="14" name="TextBox 13"/>
           <p:cNvSpPr txBox="1"/>
           <p:nvPr/>
         </p:nvSpPr>
@@ -5788,7 +6022,7 @@
                 </a:solidFill>
                 <a:latin typeface="Helvetica"/>
               </a:rPr>
-              <a:t>Every action closes a named gap. The plan is traceable to the diagnosis.</a:t>
+              <a:t>No big-bang week. No first attempt in front of the funder.</a:t>
             </a:r>
           </a:p>
         </p:txBody>
@@ -5840,7 +6074,7 @@
                 </a:solidFill>
                 <a:latin typeface="Helvetica"/>
               </a:rPr>
-              <a:t>Track A: the exchange that already failed</a:t>
+              <a:t>The six weeks</a:t>
             </a:r>
           </a:p>
         </p:txBody>
@@ -5874,7 +6108,7 @@
                 </a:solidFill>
                 <a:latin typeface="Helvetica"/>
               </a:rPr>
-              <a:t>Five decisions. One is hard and four are afternoons.</a:t>
+              <a:t>Two tracks in parallel, one end-to-end run in week 2, one week of slack, four days of rehearsal.</a:t>
             </a:r>
           </a:p>
         </p:txBody>
@@ -5952,7 +6186,7 @@
                 </a:solidFill>
                 <a:latin typeface="Helvetica"/>
               </a:rPr>
-              <a:t>**Fix the calendar and epoch.** One partner indexes on sols, the other plans in Earth years, and neither says so. Owner: coordinator. Week 1.</a:t>
+              <a:t>**Weeks 1 to 3, track A.** Solis to Tharsis, the exchange that already failed. Calendar and epoch, the aggregation, the derate, the schedule owner, units and encoding. The derate is the expensive one, because it means Solis says publicly how its capacity degrades.</a:t>
             </a:r>
           </a:p>
         </p:txBody>
@@ -5965,7 +6199,7 @@
         </p:nvSpPr>
         <p:spPr>
           <a:xfrm>
-            <a:off x="585216" y="2779775"/>
+            <a:off x="585216" y="3328416"/>
             <a:ext cx="50292" cy="182880"/>
           </a:xfrm>
           <a:prstGeom prst="roundRect">
@@ -6009,7 +6243,7 @@
         </p:nvSpPr>
         <p:spPr>
           <a:xfrm>
-            <a:off x="786384" y="2724911"/>
+            <a:off x="786384" y="3273552"/>
             <a:ext cx="10222992" cy="365760"/>
           </a:xfrm>
           <a:prstGeom prst="rect">
@@ -6030,7 +6264,7 @@
                 </a:solidFill>
                 <a:latin typeface="Helvetica"/>
               </a:rPr>
-              <a:t>**Name the aggregation.** Which statistic, over which window, computed by whom. Owner: Solis and Tharsis jointly. Week 2.</a:t>
+              <a:t>**Weeks 1 to 3, track B.** Meridian's evidence requirement, its thresholds routed to the model that applies them, and the stress event chosen. In parallel, because what it requires changes what track A must carry.</a:t>
             </a:r>
           </a:p>
         </p:txBody>
@@ -6043,7 +6277,7 @@
         </p:nvSpPr>
         <p:spPr>
           <a:xfrm>
-            <a:off x="585216" y="3657599"/>
+            <a:off x="585216" y="4571999"/>
             <a:ext cx="50292" cy="182880"/>
           </a:xfrm>
           <a:prstGeom prst="roundRect">
@@ -6087,7 +6321,7 @@
         </p:nvSpPr>
         <p:spPr>
           <a:xfrm>
-            <a:off x="786384" y="3602735"/>
+            <a:off x="786384" y="4517136"/>
             <a:ext cx="10222992" cy="365760"/>
           </a:xfrm>
           <a:prstGeom prst="rect">
@@ -6108,7 +6342,7 @@
                 </a:solidFill>
                 <a:latin typeface="Helvetica"/>
               </a:rPr>
-              <a:t>**Move the derate into the contract.** The hard one. It means Solis says publicly how its capacity degrades. Owner: Solis, with Meridian's failure definitions. Weeks 2 to 3.</a:t>
+              <a:t>**Week 2.** Contract v0, and the skeleton runs.</a:t>
             </a:r>
           </a:p>
         </p:txBody>
@@ -6121,7 +6355,7 @@
         </p:nvSpPr>
         <p:spPr>
           <a:xfrm>
-            <a:off x="585216" y="4718303"/>
+            <a:off x="585216" y="5266943"/>
             <a:ext cx="50292" cy="182880"/>
           </a:xfrm>
           <a:prstGeom prst="roundRect">
@@ -6165,7 +6399,7 @@
         </p:nvSpPr>
         <p:spPr>
           <a:xfrm>
-            <a:off x="786384" y="4663440"/>
+            <a:off x="786384" y="5212079"/>
             <a:ext cx="10222992" cy="365760"/>
           </a:xfrm>
           <a:prstGeom prst="rect">
@@ -6186,7 +6420,7 @@
                 </a:solidFill>
                 <a:latin typeface="Helvetica"/>
               </a:rPr>
-              <a:t>**Assign the population schedule.** A producer, a revision cadence, a version identifier on every run. Owner: programme. Week 1.</a:t>
+              <a:t>**Weeks 3 and 4.** Normal case, then the stress event run iterated, with the derate taken from shared declared state rather than privately.</a:t>
             </a:r>
           </a:p>
         </p:txBody>
@@ -6199,7 +6433,7 @@
         </p:nvSpPr>
         <p:spPr>
           <a:xfrm>
-            <a:off x="585216" y="5596127"/>
+            <a:off x="585216" y="6327647"/>
             <a:ext cx="50292" cy="182880"/>
           </a:xfrm>
           <a:prstGeom prst="roundRect">
@@ -6243,7 +6477,7 @@
         </p:nvSpPr>
         <p:spPr>
           <a:xfrm>
-            <a:off x="786384" y="5541264"/>
+            <a:off x="786384" y="6272783"/>
             <a:ext cx="10222992" cy="365760"/>
           </a:xfrm>
           <a:prstGeom prst="rect">
@@ -6264,7 +6498,7 @@
                 </a:solidFill>
                 <a:latin typeface="Helvetica"/>
               </a:rPr>
-              <a:t>**Declare units, boundary and encoding on both sides.** A contract table with no empty cells, or with empty cells that are visible.</a:t>
+              <a:t>**Weeks 5 and 6.** Buffer, the traceability pass, then rehearsal. For every number: which model, which contract, which schedule version, which threshold set.</a:t>
             </a:r>
           </a:p>
         </p:txBody>
@@ -6298,7 +6532,7 @@
                 </a:solidFill>
                 <a:latin typeface="Helvetica"/>
               </a:rPr>
-              <a:t>Review point, end of week 1: the calendar is fixed and the thresholds are published, or week 2 carries an unowned assumption.</a:t>
+              <a:t>Review points end weeks 1, 2, 3 and 5. Every action closes a named gap.</a:t>
             </a:r>
           </a:p>
         </p:txBody>
@@ -6350,7 +6584,7 @@
                 </a:solidFill>
                 <a:latin typeface="Helvetica"/>
               </a:rPr>
-              <a:t>What the board sees at week six</a:t>
+              <a:t>Eleven sessions in six weeks</a:t>
             </a:r>
           </a:p>
         </p:txBody>
@@ -6384,7 +6618,7 @@
                 </a:solidFill>
                 <a:latin typeface="Helvetica"/>
               </a:rPr>
-              <a:t>One configuration, two cases, and a line from every number back to what produced it.</a:t>
+              <a:t>Who is in the room is a decision, and one of them carries a rule.</a:t>
             </a:r>
           </a:p>
         </p:txBody>
@@ -6462,7 +6696,7 @@
                 </a:solidFill>
                 <a:latin typeface="Helvetica"/>
               </a:rPr>
-              <a:t>**Week 4.** The normal operating case, end to end, with the contract enforced.</a:t>
+              <a:t>**Week 1.** Kickoff, all four partners. Interface working session with the two modelling teams and Helix. Evidence elicitation with Meridian, bilateral.</a:t>
             </a:r>
           </a:p>
         </p:txBody>
@@ -6475,7 +6709,7 @@
         </p:nvSpPr>
         <p:spPr>
           <a:xfrm>
-            <a:off x="585216" y="2414016"/>
+            <a:off x="585216" y="2779775"/>
             <a:ext cx="50292" cy="182880"/>
           </a:xfrm>
           <a:prstGeom prst="roundRect">
@@ -6519,7 +6753,7 @@
         </p:nvSpPr>
         <p:spPr>
           <a:xfrm>
-            <a:off x="786384" y="2359152"/>
+            <a:off x="786384" y="2724911"/>
             <a:ext cx="10222992" cy="365760"/>
           </a:xfrm>
           <a:prstGeom prst="rect">
@@ -6540,7 +6774,7 @@
                 </a:solidFill>
                 <a:latin typeface="Helvetica"/>
               </a:rPr>
-              <a:t>**Week 5.** One material stress event, run iterated: Solis proposes, Tharsis simulates with the derate taken from the shared declared state, Solis revises at least once.</a:t>
+              <a:t>**Week 2.** The derate session, which needs Solis and Meridian in one room. Contract v1 sign-off. Then all four review what broke when it ran.</a:t>
             </a:r>
           </a:p>
         </p:txBody>
@@ -6553,7 +6787,7 @@
         </p:nvSpPr>
         <p:spPr>
           <a:xfrm>
-            <a:off x="585216" y="3474720"/>
+            <a:off x="585216" y="3840479"/>
             <a:ext cx="50292" cy="182880"/>
           </a:xfrm>
           <a:prstGeom prst="roundRect">
@@ -6597,7 +6831,7 @@
         </p:nvSpPr>
         <p:spPr>
           <a:xfrm>
-            <a:off x="786384" y="3419856"/>
+            <a:off x="786384" y="3785615"/>
             <a:ext cx="10222992" cy="365760"/>
           </a:xfrm>
           <a:prstGeom prst="rect">
@@ -6618,7 +6852,7 @@
                 </a:solidFill>
                 <a:latin typeface="Helvetica"/>
               </a:rPr>
-              <a:t>**Week 6.** The traceability pass. For every number: which model produced it, against which contract, on which version of the population schedule, under which threshold set.</a:t>
+              <a:t>**Weeks 3 to 5.** Stress case selection, a thirty minute integration standup weekly, and all-partner reviews of the normal case and the stress case.</a:t>
             </a:r>
           </a:p>
         </p:txBody>
@@ -6631,7 +6865,7 @@
         </p:nvSpPr>
         <p:spPr>
           <a:xfrm>
-            <a:off x="585216" y="4535424"/>
+            <a:off x="585216" y="4901183"/>
             <a:ext cx="50292" cy="182880"/>
           </a:xfrm>
           <a:prstGeom prst="roundRect">
@@ -6675,7 +6909,7 @@
         </p:nvSpPr>
         <p:spPr>
           <a:xfrm>
-            <a:off x="786384" y="4480560"/>
+            <a:off x="786384" y="4846320"/>
             <a:ext cx="10222992" cy="365760"/>
           </a:xfrm>
           <a:prstGeom prst="rect">
@@ -6696,7 +6930,7 @@
                 </a:solidFill>
                 <a:latin typeface="Helvetica"/>
               </a:rPr>
-              <a:t>**The traceability pass is the deliverable, not the run.** Those four questions are exactly what the review asks, and the contract answers all four by construction.</a:t>
+              <a:t>**Week 6.** Dress rehearsal, four days before the board sees it.</a:t>
             </a:r>
           </a:p>
         </p:txBody>
@@ -6709,7 +6943,7 @@
         </p:nvSpPr>
         <p:spPr>
           <a:xfrm>
-            <a:off x="585216" y="5596128"/>
+            <a:off x="585216" y="5596127"/>
             <a:ext cx="50292" cy="182880"/>
           </a:xfrm>
           <a:prstGeom prst="roundRect">
@@ -6774,7 +7008,7 @@
                 </a:solidFill>
                 <a:latin typeface="Helvetica"/>
               </a:rPr>
-              <a:t>Not built in six weeks: a general co-simulation platform, a second coupling, or uncertainty propagation. Each deferred with a stated reason rather than descoped quietly.</a:t>
+              <a:t>**Helix attends every technical session and no session that settles what a variable means.** A translator converts between vocabularies. It cannot rule on semantics, and nobody could confer that standing on it.</a:t>
             </a:r>
           </a:p>
         </p:txBody>
@@ -6808,7 +7042,7 @@
                 </a:solidFill>
                 <a:latin typeface="Helvetica"/>
               </a:rPr>
-              <a:t>Review point, end of week 5: if the stress case has not run, week 6 reports the normal case and says so.</a:t>
+              <a:t>Two to three touchpoints a week for the coordinator. The schedule is data in the repository, and a test asserts the seating rule.</a:t>
             </a:r>
           </a:p>
         </p:txBody>
@@ -7284,7 +7518,7 @@
                 </a:solidFill>
                 <a:latin typeface="Helvetica"/>
               </a:rPr>
-              <a:t>Convening is the coordinator's job. What cannot be done by fiat is make the ask outrank four organisations' own deliverables, so the ask has to be the thing they already want.</a:t>
+              <a:t>In an acute crisis partners accept direction they would decline in business as usual, and that window closes as soon as the crisis is declared over. Week 1 uses it.</a:t>
             </a:r>
           </a:p>
         </p:txBody>
@@ -7482,7 +7716,7 @@
                 </a:solidFill>
                 <a:latin typeface="Helvetica"/>
               </a:rPr>
-              <a:t>Reads four partner declarations in four incompatible formats, a spec sheet, a README, a clause-numbered requirements document and a JSON schema.</a:t>
+              <a:t>Reads four partner declarations in four incompatible formats: a spec sheet, a README, a clause-numbered requirements document and a JSON schema.</a:t>
             </a:r>
           </a:p>
         </p:txBody>
@@ -7560,7 +7794,7 @@
                 </a:solidFill>
                 <a:latin typeface="Helvetica"/>
               </a:rPr>
-              <a:t>Applies seven general rules. None of them names a partner, an item or a gap. On a boundary where every object has an owner and every clause is stated, all seven return nothing.</a:t>
+              <a:t>Applies seven general rules. None names a partner, an item or a gap. On a boundary where every object has an owner and every clause is stated, all seven return nothing.</a:t>
             </a:r>
           </a:p>
         </p:txBody>
@@ -7573,7 +7807,7 @@
         </p:nvSpPr>
         <p:spPr>
           <a:xfrm>
-            <a:off x="585216" y="4023359"/>
+            <a:off x="585216" y="3840479"/>
             <a:ext cx="50292" cy="182880"/>
           </a:xfrm>
           <a:prstGeom prst="roundRect">
@@ -7617,7 +7851,7 @@
         </p:nvSpPr>
         <p:spPr>
           <a:xfrm>
-            <a:off x="786384" y="3968496"/>
+            <a:off x="786384" y="3785615"/>
             <a:ext cx="10222992" cy="365760"/>
           </a:xfrm>
           <a:prstGeom prst="rect">
@@ -7638,7 +7872,7 @@
                 </a:solidFill>
                 <a:latin typeface="Helvetica"/>
               </a:rPr>
-              <a:t>Returns 105 findings across 43 declarations, 44 of them blocking. The four gaps on slide one fall out unaided, and a test asserts they still do.</a:t>
+              <a:t>Returns 105 findings across 43 declarations, 44 blocking. The four gaps fall out unaided, and a test asserts they still do.</a:t>
             </a:r>
           </a:p>
         </p:txBody>
@@ -7651,7 +7885,7 @@
         </p:nvSpPr>
         <p:spPr>
           <a:xfrm>
-            <a:off x="585216" y="5084064"/>
+            <a:off x="585216" y="4718303"/>
             <a:ext cx="50292" cy="182880"/>
           </a:xfrm>
           <a:prstGeom prst="roundRect">
@@ -7695,7 +7929,7 @@
         </p:nvSpPr>
         <p:spPr>
           <a:xfrm>
-            <a:off x="786384" y="5029200"/>
+            <a:off x="786384" y="4663440"/>
             <a:ext cx="10222992" cy="365760"/>
           </a:xfrm>
           <a:prstGeom prst="rect">
@@ -7716,7 +7950,7 @@
                 </a:solidFill>
                 <a:latin typeface="Helvetica"/>
               </a:rPr>
-              <a:t>**What it does not establish.** It cannot tell you which variables are actually disputed. The declarations are synthetic. It measures what was declared, not what is true.</a:t>
+              <a:t>**No language model runs inside it.** The checker is deterministic rule code, because a finding four disagreeing institutions have to accept must be reproducible byte for byte and legible in a function.</a:t>
             </a:r>
           </a:p>
         </p:txBody>
@@ -7729,7 +7963,7 @@
         </p:nvSpPr>
         <p:spPr>
           <a:xfrm>
-            <a:off x="585216" y="6144768"/>
+            <a:off x="585216" y="5961887"/>
             <a:ext cx="50292" cy="182880"/>
           </a:xfrm>
           <a:prstGeom prst="roundRect">
@@ -7773,7 +8007,7 @@
         </p:nvSpPr>
         <p:spPr>
           <a:xfrm>
-            <a:off x="786384" y="6089904"/>
+            <a:off x="786384" y="5907023"/>
             <a:ext cx="10222992" cy="365760"/>
           </a:xfrm>
           <a:prstGeom prst="rect">
@@ -7794,7 +8028,7 @@
                 </a:solidFill>
                 <a:latin typeface="Helvetica"/>
               </a:rPr>
-              <a:t>**That ARES cannot answer which variables are in dispute, in month 8, is itself the finding.**</a:t>
+              <a:t>**What it does not establish.** It cannot tell you which variables are actually disputed. That ARES cannot answer that in month 8 is itself the finding.</a:t>
             </a:r>
           </a:p>
         </p:txBody>

--- a/deck/ares_board_deck.pptx
+++ b/deck/ares_board_deck.pptx
@@ -7015,7 +7015,85 @@
       </p:sp>
       <p:sp>
         <p:nvSpPr>
-          <p:cNvPr id="14" name="TextBox 13"/>
+          <p:cNvPr id="14" name="Rounded Rectangle 13"/>
+          <p:cNvSpPr/>
+          <p:nvPr/>
+        </p:nvSpPr>
+        <p:spPr>
+          <a:xfrm>
+            <a:off x="585216" y="6839712"/>
+            <a:ext cx="50292" cy="182880"/>
+          </a:xfrm>
+          <a:prstGeom prst="roundRect">
+            <a:avLst/>
+          </a:prstGeom>
+          <a:solidFill>
+            <a:srgbClr val="475569"/>
+          </a:solidFill>
+          <a:ln>
+            <a:noFill/>
+          </a:ln>
+          <a:effectLst/>
+        </p:spPr>
+        <p:style>
+          <a:lnRef idx="1">
+            <a:schemeClr val="accent1"/>
+          </a:lnRef>
+          <a:fillRef idx="3">
+            <a:schemeClr val="accent1"/>
+          </a:fillRef>
+          <a:effectRef idx="2">
+            <a:schemeClr val="accent1"/>
+          </a:effectRef>
+          <a:fontRef idx="minor">
+            <a:schemeClr val="lt1"/>
+          </a:fontRef>
+        </p:style>
+        <p:txBody>
+          <a:bodyPr rtlCol="0" anchor="ctr"/>
+          <a:lstStyle/>
+          <a:p>
+            <a:pPr algn="ctr"/>
+          </a:p>
+        </p:txBody>
+      </p:sp>
+      <p:sp>
+        <p:nvSpPr>
+          <p:cNvPr id="15" name="TextBox 14"/>
+          <p:cNvSpPr txBox="1"/>
+          <p:nvPr/>
+        </p:nvSpPr>
+        <p:spPr>
+          <a:xfrm>
+            <a:off x="786384" y="6784848"/>
+            <a:ext cx="10222992" cy="365760"/>
+          </a:xfrm>
+          <a:prstGeom prst="rect">
+            <a:avLst/>
+          </a:prstGeom>
+          <a:noFill/>
+        </p:spPr>
+        <p:txBody>
+          <a:bodyPr wrap="square">
+            <a:spAutoFit/>
+          </a:bodyPr>
+          <a:lstStyle/>
+          <a:p>
+            <a:r>
+              <a:rPr sz="1350" b="1">
+                <a:solidFill>
+                  <a:srgbClr val="1F2937"/>
+                </a:solidFill>
+                <a:latin typeface="Helvetica"/>
+              </a:rPr>
+              <a:t>**It holds the only working transport code for the exchange that already failed.** We cannot say from the case study material whether that helps, so the plan is built to gain if it can and to lose nothing if it cannot.</a:t>
+            </a:r>
+          </a:p>
+        </p:txBody>
+      </p:sp>
+      <p:sp>
+        <p:nvSpPr>
+          <p:cNvPr id="16" name="TextBox 15"/>
           <p:cNvSpPr txBox="1"/>
           <p:nvPr/>
         </p:nvSpPr>

--- a/deck/ares_board_deck.pptx
+++ b/deck/ares_board_deck.pptx
@@ -649,7 +649,7 @@
           <a:lstStyle/>
           <a:p>
             <a:r>
-              <a:t>Counter-case: loose coupling is defensible for a planning study and indefensible for a resilience claim. The funder is buying a resilience claim.</a:t>
+              <a:t>Counter-case: loose coupling is defensible for a planning study and indefensible for a resilience claim. The funder is buying a resilience claim. Source if asked: the 2018 figures are the Opportunity rover's own telemetry as reported by JPL, 645 Wh on 30 May falling to 22 Wh by 10 June 2018, against a clear-sky baseline of roughly 600 to 900 Wh per sol. That is real published data and it is external to the brief, unlike everything else in this deck, which is read off the partner descriptions. Say so rather than let it pass as though the brief supplied it.</a:t>
             </a:r>
           </a:p>
         </p:txBody>
@@ -4068,7 +4068,7 @@
                 </a:solidFill>
                 <a:latin typeface="Helvetica"/>
               </a:rPr>
-              <a:t>Four things have gone wrong at month 8. They are four views of one missing artifact.</a:t>
+              <a:t>The four things that have gone wrong at month 8 are four views of one missing artifact.</a:t>
             </a:r>
           </a:p>
         </p:txBody>
@@ -5478,7 +5478,7 @@
                 </a:solidFill>
                 <a:latin typeface="Helvetica"/>
               </a:rPr>
-              <a:t>**Coupling tightly across three vocabularies and two clocks does not fail loudly. It agrees quickly and wrongly, once per timestep.**</a:t>
+              <a:t>**Coupling tightly across three vocabularies and two clocks does not fail loudly.** It agrees quickly and wrongly, once per timestep.</a:t>
             </a:r>
           </a:p>
         </p:txBody>

--- a/deck/ares_board_deck.pptx
+++ b/deck/ares_board_deck.pptx
@@ -789,7 +789,7 @@
           <a:lstStyle/>
           <a:p>
             <a:r>
-              <a:t>The traceability pass is the deliverable, not the run. Those four questions are exactly what the funder's review asks.</a:t>
+              <a:t>For every number at week 6: which model, which contract, which schedule version, which threshold set. Those four questions are exactly what the funder's review asks.</a:t>
             </a:r>
           </a:p>
         </p:txBody>
@@ -4591,7 +4591,7 @@
         </p:nvSpPr>
         <p:spPr>
           <a:xfrm>
-            <a:off x="585216" y="1719072"/>
+            <a:off x="585216" y="1399032"/>
             <a:ext cx="50292" cy="182880"/>
           </a:xfrm>
           <a:prstGeom prst="roundRect">
@@ -4635,8 +4635,8 @@
         </p:nvSpPr>
         <p:spPr>
           <a:xfrm>
-            <a:off x="786384" y="1664207"/>
-            <a:ext cx="10222992" cy="365760"/>
+            <a:off x="786384" y="1344168"/>
+            <a:ext cx="3063239" cy="365760"/>
           </a:xfrm>
           <a:prstGeom prst="rect">
             <a:avLst/>
@@ -4656,7 +4656,7 @@
                 </a:solidFill>
                 <a:latin typeface="Helvetica"/>
               </a:rPr>
-              <a:t>**The aggregation operator.** Solis plans against bounds over multi-year horizons, Tharsis emits hourly traces, and the conversion needs a judgement about statistic and window that no interface claims.</a:t>
+              <a:t>**GAP-1** hourly trace to multi-year bound. Nobody owns the conversion.</a:t>
             </a:r>
           </a:p>
         </p:txBody>
@@ -4669,7 +4669,7 @@
         </p:nvSpPr>
         <p:spPr>
           <a:xfrm>
-            <a:off x="585216" y="2962656"/>
+            <a:off x="585216" y="2093976"/>
             <a:ext cx="50292" cy="182880"/>
           </a:xfrm>
           <a:prstGeom prst="roundRect">
@@ -4713,8 +4713,8 @@
         </p:nvSpPr>
         <p:spPr>
           <a:xfrm>
-            <a:off x="786384" y="2907791"/>
-            <a:ext cx="10222992" cy="365760"/>
+            <a:off x="786384" y="2039112"/>
+            <a:ext cx="3063239" cy="365760"/>
           </a:xfrm>
           <a:prstGeom prst="rect">
             <a:avLst/>
@@ -4734,7 +4734,7 @@
                 </a:solidFill>
                 <a:latin typeface="Helvetica"/>
               </a:rPr>
-              <a:t>**The derate function.** Solis publishes installed capacity, Tharsis needs available capacity, and Tharsis applies its own derate fitted to a memo predating the configuration.</a:t>
+              <a:t>**GAP-2** installed capacity to available capacity. Tharsis derates privately.</a:t>
             </a:r>
           </a:p>
         </p:txBody>
@@ -4747,7 +4747,7 @@
         </p:nvSpPr>
         <p:spPr>
           <a:xfrm>
-            <a:off x="585216" y="4023359"/>
+            <a:off x="585216" y="2788920"/>
             <a:ext cx="50292" cy="182880"/>
           </a:xfrm>
           <a:prstGeom prst="roundRect">
@@ -4791,8 +4791,8 @@
         </p:nvSpPr>
         <p:spPr>
           <a:xfrm>
-            <a:off x="786384" y="3968496"/>
-            <a:ext cx="10222992" cy="365760"/>
+            <a:off x="786384" y="2734056"/>
+            <a:ext cx="3063239" cy="365760"/>
           </a:xfrm>
           <a:prstGeom prst="rect">
             <a:avLst/>
@@ -4812,7 +4812,7 @@
                 </a:solidFill>
                 <a:latin typeface="Helvetica"/>
               </a:rPr>
-              <a:t>**The service level thresholds.** Meridian defines what counts as acceptable and has no route to the model that applies it. Tharsis uses limits it took from a public standard instead.</a:t>
+              <a:t>**GAP-3** thresholds produced, routed to nobody.</a:t>
             </a:r>
           </a:p>
         </p:txBody>
@@ -4825,7 +4825,7 @@
         </p:nvSpPr>
         <p:spPr>
           <a:xfrm>
-            <a:off x="585216" y="5266943"/>
+            <a:off x="585216" y="3483864"/>
             <a:ext cx="50292" cy="182880"/>
           </a:xfrm>
           <a:prstGeom prst="roundRect">
@@ -4869,8 +4869,8 @@
         </p:nvSpPr>
         <p:spPr>
           <a:xfrm>
-            <a:off x="786384" y="5212079"/>
-            <a:ext cx="10222992" cy="365760"/>
+            <a:off x="786384" y="3429000"/>
+            <a:ext cx="3063239" cy="365760"/>
           </a:xfrm>
           <a:prstGeom prst="rect">
             <a:avLst/>
@@ -4890,7 +4890,7 @@
                 </a:solidFill>
                 <a:latin typeface="Helvetica"/>
               </a:rPr>
-              <a:t>**The population schedule.** The largest single driver of hourly demand. Consumed by Tharsis, produced by nobody, versioned by no one.</a:t>
+              <a:t>**GAP-4** the largest demand driver, produced by no partner.</a:t>
             </a:r>
           </a:p>
         </p:txBody>
@@ -4903,7 +4903,7 @@
         </p:nvSpPr>
         <p:spPr>
           <a:xfrm>
-            <a:off x="585216" y="6327647"/>
+            <a:off x="585216" y="4178807"/>
             <a:ext cx="50292" cy="182880"/>
           </a:xfrm>
           <a:prstGeom prst="roundRect">
@@ -4947,8 +4947,8 @@
         </p:nvSpPr>
         <p:spPr>
           <a:xfrm>
-            <a:off x="786384" y="6272783"/>
-            <a:ext cx="10222992" cy="365760"/>
+            <a:off x="786384" y="4123944"/>
+            <a:ext cx="3063239" cy="365760"/>
           </a:xfrm>
           <a:prstGeom prst="rect">
             <a:avLst/>
@@ -4968,7 +4968,7 @@
                 </a:solidFill>
                 <a:latin typeface="Helvetica"/>
               </a:rPr>
-              <a:t>Of six possible partner pairs, two are stated. No interface variable is named anywhere, in any direction, by any partner.</a:t>
+              <a:t>Two of six partner pairs have any stated exchange. No interface variable is named anywhere.</a:t>
             </a:r>
           </a:p>
         </p:txBody>
@@ -5007,6 +5007,30 @@
           </a:p>
         </p:txBody>
       </p:sp>
+      <p:pic>
+        <p:nvPicPr>
+          <p:cNvPr id="15" name="Picture 14" descr="boundary.png"/>
+          <p:cNvPicPr>
+            <a:picLocks noChangeAspect="1"/>
+          </p:cNvPicPr>
+          <p:nvPr/>
+        </p:nvPicPr>
+        <p:blipFill>
+          <a:blip r:embed="rId2"/>
+          <a:stretch>
+            <a:fillRect/>
+          </a:stretch>
+        </p:blipFill>
+        <p:spPr>
+          <a:xfrm>
+            <a:off x="4169663" y="1344168"/>
+            <a:ext cx="7436815" cy="4282580"/>
+          </a:xfrm>
+          <a:prstGeom prst="rect">
+            <a:avLst/>
+          </a:prstGeom>
+        </p:spPr>
+      </p:pic>
     </p:spTree>
   </p:cSld>
   <p:clrMapOvr>
@@ -6121,7 +6145,7 @@
         </p:nvSpPr>
         <p:spPr>
           <a:xfrm>
-            <a:off x="585216" y="1719072"/>
+            <a:off x="585216" y="1399032"/>
             <a:ext cx="50292" cy="182880"/>
           </a:xfrm>
           <a:prstGeom prst="roundRect">
@@ -6165,8 +6189,8 @@
         </p:nvSpPr>
         <p:spPr>
           <a:xfrm>
-            <a:off x="786384" y="1664207"/>
-            <a:ext cx="10222992" cy="365760"/>
+            <a:off x="786384" y="1344168"/>
+            <a:ext cx="3063239" cy="365760"/>
           </a:xfrm>
           <a:prstGeom prst="rect">
             <a:avLst/>
@@ -6186,7 +6210,7 @@
                 </a:solidFill>
                 <a:latin typeface="Helvetica"/>
               </a:rPr>
-              <a:t>**Weeks 1 to 3, track A.** Solis to Tharsis, the exchange that already failed. Calendar and epoch, the aggregation, the derate, the schedule owner, units and encoding. The derate is the expensive one, because it means Solis says publicly how its capacity degrades.</a:t>
+              <a:t>**Track A** is the critical path. The exchange that already failed.</a:t>
             </a:r>
           </a:p>
         </p:txBody>
@@ -6199,7 +6223,7 @@
         </p:nvSpPr>
         <p:spPr>
           <a:xfrm>
-            <a:off x="585216" y="3328416"/>
+            <a:off x="585216" y="2093976"/>
             <a:ext cx="50292" cy="182880"/>
           </a:xfrm>
           <a:prstGeom prst="roundRect">
@@ -6243,8 +6267,8 @@
         </p:nvSpPr>
         <p:spPr>
           <a:xfrm>
-            <a:off x="786384" y="3273552"/>
-            <a:ext cx="10222992" cy="365760"/>
+            <a:off x="786384" y="2039112"/>
+            <a:ext cx="3063239" cy="365760"/>
           </a:xfrm>
           <a:prstGeom prst="rect">
             <a:avLst/>
@@ -6264,7 +6288,7 @@
                 </a:solidFill>
                 <a:latin typeface="Helvetica"/>
               </a:rPr>
-              <a:t>**Weeks 1 to 3, track B.** Meridian's evidence requirement, its thresholds routed to the model that applies them, and the stress event chosen. In parallel, because what it requires changes what track A must carry.</a:t>
+              <a:t>**Track B** runs alongside, because what Meridian requires changes what track A must carry.</a:t>
             </a:r>
           </a:p>
         </p:txBody>
@@ -6277,7 +6301,7 @@
         </p:nvSpPr>
         <p:spPr>
           <a:xfrm>
-            <a:off x="585216" y="4571999"/>
+            <a:off x="585216" y="2971799"/>
             <a:ext cx="50292" cy="182880"/>
           </a:xfrm>
           <a:prstGeom prst="roundRect">
@@ -6321,8 +6345,8 @@
         </p:nvSpPr>
         <p:spPr>
           <a:xfrm>
-            <a:off x="786384" y="4517136"/>
-            <a:ext cx="10222992" cy="365760"/>
+            <a:off x="786384" y="2916935"/>
+            <a:ext cx="3063239" cy="365760"/>
           </a:xfrm>
           <a:prstGeom prst="rect">
             <a:avLst/>
@@ -6342,7 +6366,7 @@
                 </a:solidFill>
                 <a:latin typeface="Helvetica"/>
               </a:rPr>
-              <a:t>**Week 2.** Contract v0, and the skeleton runs.</a:t>
+              <a:t>**Week 2** runs end to end on crude inputs, so integration fails early.</a:t>
             </a:r>
           </a:p>
         </p:txBody>
@@ -6355,7 +6379,7 @@
         </p:nvSpPr>
         <p:spPr>
           <a:xfrm>
-            <a:off x="585216" y="5266943"/>
+            <a:off x="585216" y="3666743"/>
             <a:ext cx="50292" cy="182880"/>
           </a:xfrm>
           <a:prstGeom prst="roundRect">
@@ -6399,8 +6423,8 @@
         </p:nvSpPr>
         <p:spPr>
           <a:xfrm>
-            <a:off x="786384" y="5212079"/>
-            <a:ext cx="10222992" cy="365760"/>
+            <a:off x="786384" y="3611879"/>
+            <a:ext cx="3063239" cy="365760"/>
           </a:xfrm>
           <a:prstGeom prst="rect">
             <a:avLst/>
@@ -6420,7 +6444,7 @@
                 </a:solidFill>
                 <a:latin typeface="Helvetica"/>
               </a:rPr>
-              <a:t>**Weeks 3 and 4.** Normal case, then the stress event run iterated, with the derate taken from shared declared state rather than privately.</a:t>
+              <a:t>**Week 5** is buffer and nothing is scheduled into it that cannot move out.</a:t>
             </a:r>
           </a:p>
         </p:txBody>
@@ -6433,7 +6457,7 @@
         </p:nvSpPr>
         <p:spPr>
           <a:xfrm>
-            <a:off x="585216" y="6327647"/>
+            <a:off x="585216" y="4361687"/>
             <a:ext cx="50292" cy="182880"/>
           </a:xfrm>
           <a:prstGeom prst="roundRect">
@@ -6477,8 +6501,8 @@
         </p:nvSpPr>
         <p:spPr>
           <a:xfrm>
-            <a:off x="786384" y="6272783"/>
-            <a:ext cx="10222992" cy="365760"/>
+            <a:off x="786384" y="4306823"/>
+            <a:ext cx="3063239" cy="365760"/>
           </a:xfrm>
           <a:prstGeom prst="rect">
             <a:avLst/>
@@ -6498,7 +6522,7 @@
                 </a:solidFill>
                 <a:latin typeface="Helvetica"/>
               </a:rPr>
-              <a:t>**Weeks 5 and 6.** Buffer, the traceability pass, then rehearsal. For every number: which model, which contract, which schedule version, which threshold set.</a:t>
+              <a:t>Review points end weeks 1, 2, 3 and 5. Every action closes a named gap.</a:t>
             </a:r>
           </a:p>
         </p:txBody>
@@ -6532,11 +6556,35 @@
                 </a:solidFill>
                 <a:latin typeface="Helvetica"/>
               </a:rPr>
-              <a:t>Review points end weeks 1, 2, 3 and 5. Every action closes a named gap.</a:t>
-            </a:r>
-          </a:p>
-        </p:txBody>
-      </p:sp>
+              <a:t>The traceability pass is the deliverable, not the run.</a:t>
+            </a:r>
+          </a:p>
+        </p:txBody>
+      </p:sp>
+      <p:pic>
+        <p:nvPicPr>
+          <p:cNvPr id="15" name="Picture 14" descr="calendar.png"/>
+          <p:cNvPicPr>
+            <a:picLocks noChangeAspect="1"/>
+          </p:cNvPicPr>
+          <p:nvPr/>
+        </p:nvPicPr>
+        <p:blipFill>
+          <a:blip r:embed="rId2"/>
+          <a:stretch>
+            <a:fillRect/>
+          </a:stretch>
+        </p:blipFill>
+        <p:spPr>
+          <a:xfrm>
+            <a:off x="4169663" y="1344168"/>
+            <a:ext cx="7436815" cy="3962871"/>
+          </a:xfrm>
+          <a:prstGeom prst="rect">
+            <a:avLst/>
+          </a:prstGeom>
+        </p:spPr>
+      </p:pic>
     </p:spTree>
   </p:cSld>
   <p:clrMapOvr>

--- a/deck/ares_board_deck.pptx
+++ b/deck/ares_board_deck.pptx
@@ -999,7 +999,7 @@
           <a:lstStyle/>
           <a:p>
             <a:r>
-              <a:t>Demo in three minutes: run it, show the calendar, select an orphaned item, show the finding, open the declaration and read the sentence it came from. Close on the limits.</a:t>
+              <a:t>Demo in three minutes: run it, show the calendar, select an orphaned item, show the finding, open the declaration and read the sentence it came from. Close on the limits. If asked how this position differs from the one that was confidently wrong and overruled mid-session: it does not differ by better reasoning, it differs by naming in advance the result that would overturn it, and putting that result inside week 5.</a:t>
             </a:r>
           </a:p>
         </p:txBody>
@@ -6019,7 +6019,85 @@
       </p:sp>
       <p:sp>
         <p:nvSpPr>
-          <p:cNvPr id="14" name="TextBox 13"/>
+          <p:cNvPr id="14" name="Rounded Rectangle 13"/>
+          <p:cNvSpPr/>
+          <p:nvPr/>
+        </p:nvSpPr>
+        <p:spPr>
+          <a:xfrm>
+            <a:off x="585216" y="6656831"/>
+            <a:ext cx="50292" cy="182880"/>
+          </a:xfrm>
+          <a:prstGeom prst="roundRect">
+            <a:avLst/>
+          </a:prstGeom>
+          <a:solidFill>
+            <a:srgbClr val="475569"/>
+          </a:solidFill>
+          <a:ln>
+            <a:noFill/>
+          </a:ln>
+          <a:effectLst/>
+        </p:spPr>
+        <p:style>
+          <a:lnRef idx="1">
+            <a:schemeClr val="accent1"/>
+          </a:lnRef>
+          <a:fillRef idx="3">
+            <a:schemeClr val="accent1"/>
+          </a:fillRef>
+          <a:effectRef idx="2">
+            <a:schemeClr val="accent1"/>
+          </a:effectRef>
+          <a:fontRef idx="minor">
+            <a:schemeClr val="lt1"/>
+          </a:fontRef>
+        </p:style>
+        <p:txBody>
+          <a:bodyPr rtlCol="0" anchor="ctr"/>
+          <a:lstStyle/>
+          <a:p>
+            <a:pPr algn="ctr"/>
+          </a:p>
+        </p:txBody>
+      </p:sp>
+      <p:sp>
+        <p:nvSpPr>
+          <p:cNvPr id="15" name="TextBox 14"/>
+          <p:cNvSpPr txBox="1"/>
+          <p:nvPr/>
+        </p:nvSpPr>
+        <p:spPr>
+          <a:xfrm>
+            <a:off x="786384" y="6601968"/>
+            <a:ext cx="10222992" cy="365760"/>
+          </a:xfrm>
+          <a:prstGeom prst="rect">
+            <a:avLst/>
+          </a:prstGeom>
+          <a:noFill/>
+        </p:spPr>
+        <p:txBody>
+          <a:bodyPr wrap="square">
+            <a:spAutoFit/>
+          </a:bodyPr>
+          <a:lstStyle/>
+          <a:p>
+            <a:r>
+              <a:rPr sz="1350" b="1">
+                <a:solidFill>
+                  <a:srgbClr val="1F2937"/>
+                </a:solidFill>
+                <a:latin typeface="Helvetica"/>
+              </a:rPr>
+              <a:t>**Week 5 also tests the recommendation.** If Solis's revised configuration comes back within a tolerance set in week 1, the feedback is weak, one pass suffices, and the coupling argument is wrong. Stated in advance so it can fail.</a:t>
+            </a:r>
+          </a:p>
+        </p:txBody>
+      </p:sp>
+      <p:sp>
+        <p:nvSpPr>
+          <p:cNvPr id="16" name="TextBox 15"/>
           <p:cNvSpPr txBox="1"/>
           <p:nvPr/>
         </p:nvSpPr>
@@ -6046,7 +6124,7 @@
                 </a:solidFill>
                 <a:latin typeface="Helvetica"/>
               </a:rPr>
-              <a:t>No big-bang week. No first attempt in front of the funder.</a:t>
+              <a:t>No big-bang week, no first attempt in front of the funder, and a headline claim the demonstration can overturn.</a:t>
             </a:r>
           </a:p>
         </p:txBody>
@@ -8188,7 +8266,7 @@
                 </a:solidFill>
                 <a:latin typeface="Helvetica"/>
               </a:rPr>
-              <a:t>Runs offline from one command. No network, no dependencies, no framework.</a:t>
+              <a:t>Runs offline from one command. No network, no dependencies, no framework. AI use is disclosed in full at docs/ai_use.md.</a:t>
             </a:r>
           </a:p>
         </p:txBody>

--- a/deck/ares_board_deck.pptx
+++ b/deck/ares_board_deck.pptx
@@ -5125,7 +5125,7 @@
         </p:nvSpPr>
         <p:spPr>
           <a:xfrm>
-            <a:off x="585216" y="1719072"/>
+            <a:off x="585216" y="1399032"/>
             <a:ext cx="50292" cy="182880"/>
           </a:xfrm>
           <a:prstGeom prst="roundRect">
@@ -5169,8 +5169,8 @@
         </p:nvSpPr>
         <p:spPr>
           <a:xfrm>
-            <a:off x="786384" y="1664207"/>
-            <a:ext cx="10222992" cy="365760"/>
+            <a:off x="786384" y="1344168"/>
+            <a:ext cx="3063239" cy="365760"/>
           </a:xfrm>
           <a:prstGeom prst="rect">
             <a:avLst/>
@@ -5203,7 +5203,7 @@
         </p:nvSpPr>
         <p:spPr>
           <a:xfrm>
-            <a:off x="585216" y="2779775"/>
+            <a:off x="585216" y="2459736"/>
             <a:ext cx="50292" cy="182880"/>
           </a:xfrm>
           <a:prstGeom prst="roundRect">
@@ -5247,8 +5247,8 @@
         </p:nvSpPr>
         <p:spPr>
           <a:xfrm>
-            <a:off x="786384" y="2724911"/>
-            <a:ext cx="10222992" cy="365760"/>
+            <a:off x="786384" y="2404872"/>
+            <a:ext cx="3063239" cy="365760"/>
           </a:xfrm>
           <a:prstGeom prst="rect">
             <a:avLst/>
@@ -5281,7 +5281,7 @@
         </p:nvSpPr>
         <p:spPr>
           <a:xfrm>
-            <a:off x="585216" y="4023359"/>
+            <a:off x="585216" y="3703320"/>
             <a:ext cx="50292" cy="182880"/>
           </a:xfrm>
           <a:prstGeom prst="roundRect">
@@ -5325,8 +5325,8 @@
         </p:nvSpPr>
         <p:spPr>
           <a:xfrm>
-            <a:off x="786384" y="3968496"/>
-            <a:ext cx="10222992" cy="365760"/>
+            <a:off x="786384" y="3648456"/>
+            <a:ext cx="3063239" cy="365760"/>
           </a:xfrm>
           <a:prstGeom prst="rect">
             <a:avLst/>
@@ -5359,7 +5359,7 @@
         </p:nvSpPr>
         <p:spPr>
           <a:xfrm>
-            <a:off x="585216" y="5266943"/>
+            <a:off x="585216" y="4946903"/>
             <a:ext cx="50292" cy="182880"/>
           </a:xfrm>
           <a:prstGeom prst="roundRect">
@@ -5403,8 +5403,8 @@
         </p:nvSpPr>
         <p:spPr>
           <a:xfrm>
-            <a:off x="786384" y="5212079"/>
-            <a:ext cx="10222992" cy="365760"/>
+            <a:off x="786384" y="4892040"/>
+            <a:ext cx="3063239" cy="365760"/>
           </a:xfrm>
           <a:prstGeom prst="rect">
             <a:avLst/>
@@ -5437,7 +5437,7 @@
         </p:nvSpPr>
         <p:spPr>
           <a:xfrm>
-            <a:off x="585216" y="6144767"/>
+            <a:off x="585216" y="5824727"/>
             <a:ext cx="50292" cy="182880"/>
           </a:xfrm>
           <a:prstGeom prst="roundRect">
@@ -5481,8 +5481,8 @@
         </p:nvSpPr>
         <p:spPr>
           <a:xfrm>
-            <a:off x="786384" y="6089903"/>
-            <a:ext cx="10222992" cy="365760"/>
+            <a:off x="786384" y="5769864"/>
+            <a:ext cx="3063239" cy="365760"/>
           </a:xfrm>
           <a:prstGeom prst="rect">
             <a:avLst/>
@@ -5541,6 +5541,30 @@
           </a:p>
         </p:txBody>
       </p:sp>
+      <p:pic>
+        <p:nvPicPr>
+          <p:cNvPr id="15" name="Picture 14" descr="independence.png"/>
+          <p:cNvPicPr>
+            <a:picLocks noChangeAspect="1"/>
+          </p:cNvPicPr>
+          <p:nvPr/>
+        </p:nvPicPr>
+        <p:blipFill>
+          <a:blip r:embed="rId2"/>
+          <a:stretch>
+            <a:fillRect/>
+          </a:stretch>
+        </p:blipFill>
+        <p:spPr>
+          <a:xfrm>
+            <a:off x="4169663" y="1344168"/>
+            <a:ext cx="7436815" cy="3301166"/>
+          </a:xfrm>
+          <a:prstGeom prst="rect">
+            <a:avLst/>
+          </a:prstGeom>
+        </p:spPr>
+      </p:pic>
     </p:spTree>
   </p:cSld>
   <p:clrMapOvr>
@@ -5635,7 +5659,7 @@
         </p:nvSpPr>
         <p:spPr>
           <a:xfrm>
-            <a:off x="585216" y="1719072"/>
+            <a:off x="585216" y="1399032"/>
             <a:ext cx="50292" cy="182880"/>
           </a:xfrm>
           <a:prstGeom prst="roundRect">
@@ -5679,8 +5703,8 @@
         </p:nvSpPr>
         <p:spPr>
           <a:xfrm>
-            <a:off x="786384" y="1664207"/>
-            <a:ext cx="10222992" cy="365760"/>
+            <a:off x="786384" y="1344168"/>
+            <a:ext cx="3063239" cy="365760"/>
           </a:xfrm>
           <a:prstGeom prst="rect">
             <a:avLst/>
@@ -5713,7 +5737,7 @@
         </p:nvSpPr>
         <p:spPr>
           <a:xfrm>
-            <a:off x="585216" y="2962656"/>
+            <a:off x="585216" y="2642616"/>
             <a:ext cx="50292" cy="182880"/>
           </a:xfrm>
           <a:prstGeom prst="roundRect">
@@ -5757,8 +5781,8 @@
         </p:nvSpPr>
         <p:spPr>
           <a:xfrm>
-            <a:off x="786384" y="2907791"/>
-            <a:ext cx="10222992" cy="365760"/>
+            <a:off x="786384" y="2587752"/>
+            <a:ext cx="3063239" cy="365760"/>
           </a:xfrm>
           <a:prstGeom prst="rect">
             <a:avLst/>
@@ -5791,7 +5815,7 @@
         </p:nvSpPr>
         <p:spPr>
           <a:xfrm>
-            <a:off x="585216" y="4023359"/>
+            <a:off x="585216" y="3703320"/>
             <a:ext cx="50292" cy="182880"/>
           </a:xfrm>
           <a:prstGeom prst="roundRect">
@@ -5835,8 +5859,8 @@
         </p:nvSpPr>
         <p:spPr>
           <a:xfrm>
-            <a:off x="786384" y="3968496"/>
-            <a:ext cx="10222992" cy="365760"/>
+            <a:off x="786384" y="3648456"/>
+            <a:ext cx="3063239" cy="365760"/>
           </a:xfrm>
           <a:prstGeom prst="rect">
             <a:avLst/>
@@ -5869,7 +5893,7 @@
         </p:nvSpPr>
         <p:spPr>
           <a:xfrm>
-            <a:off x="585216" y="4901183"/>
+            <a:off x="585216" y="4581144"/>
             <a:ext cx="50292" cy="182880"/>
           </a:xfrm>
           <a:prstGeom prst="roundRect">
@@ -5913,8 +5937,8 @@
         </p:nvSpPr>
         <p:spPr>
           <a:xfrm>
-            <a:off x="786384" y="4846320"/>
-            <a:ext cx="10222992" cy="365760"/>
+            <a:off x="786384" y="4526280"/>
+            <a:ext cx="3063239" cy="365760"/>
           </a:xfrm>
           <a:prstGeom prst="rect">
             <a:avLst/>
@@ -5947,7 +5971,7 @@
         </p:nvSpPr>
         <p:spPr>
           <a:xfrm>
-            <a:off x="585216" y="5779007"/>
+            <a:off x="585216" y="5458968"/>
             <a:ext cx="50292" cy="182880"/>
           </a:xfrm>
           <a:prstGeom prst="roundRect">
@@ -5991,8 +6015,8 @@
         </p:nvSpPr>
         <p:spPr>
           <a:xfrm>
-            <a:off x="786384" y="5724144"/>
-            <a:ext cx="10222992" cy="365760"/>
+            <a:off x="786384" y="5404104"/>
+            <a:ext cx="3063239" cy="365760"/>
           </a:xfrm>
           <a:prstGeom prst="rect">
             <a:avLst/>
@@ -6025,7 +6049,7 @@
         </p:nvSpPr>
         <p:spPr>
           <a:xfrm>
-            <a:off x="585216" y="6656831"/>
+            <a:off x="585216" y="6336792"/>
             <a:ext cx="50292" cy="182880"/>
           </a:xfrm>
           <a:prstGeom prst="roundRect">
@@ -6069,8 +6093,8 @@
         </p:nvSpPr>
         <p:spPr>
           <a:xfrm>
-            <a:off x="786384" y="6601968"/>
-            <a:ext cx="10222992" cy="365760"/>
+            <a:off x="786384" y="6281928"/>
+            <a:ext cx="3063239" cy="365760"/>
           </a:xfrm>
           <a:prstGeom prst="rect">
             <a:avLst/>
@@ -6129,6 +6153,30 @@
           </a:p>
         </p:txBody>
       </p:sp>
+      <p:pic>
+        <p:nvPicPr>
+          <p:cNvPr id="17" name="Picture 16" descr="ratchet.png"/>
+          <p:cNvPicPr>
+            <a:picLocks noChangeAspect="1"/>
+          </p:cNvPicPr>
+          <p:nvPr/>
+        </p:nvPicPr>
+        <p:blipFill>
+          <a:blip r:embed="rId2"/>
+          <a:stretch>
+            <a:fillRect/>
+          </a:stretch>
+        </p:blipFill>
+        <p:spPr>
+          <a:xfrm>
+            <a:off x="4169663" y="1344168"/>
+            <a:ext cx="7436815" cy="3445873"/>
+          </a:xfrm>
+          <a:prstGeom prst="rect">
+            <a:avLst/>
+          </a:prstGeom>
+        </p:spPr>
+      </p:pic>
     </p:spTree>
   </p:cSld>
   <p:clrMapOvr>
@@ -6744,7 +6792,7 @@
                 </a:solidFill>
                 <a:latin typeface="Helvetica"/>
               </a:rPr>
-              <a:t>Who is in the room is a decision, and one of them carries a rule.</a:t>
+              <a:t>Being in the room and holding the ruling are different things, and the difference is the governance.</a:t>
             </a:r>
           </a:p>
         </p:txBody>
@@ -6757,7 +6805,7 @@
         </p:nvSpPr>
         <p:spPr>
           <a:xfrm>
-            <a:off x="585216" y="1719072"/>
+            <a:off x="585216" y="1399032"/>
             <a:ext cx="50292" cy="182880"/>
           </a:xfrm>
           <a:prstGeom prst="roundRect">
@@ -6801,8 +6849,8 @@
         </p:nvSpPr>
         <p:spPr>
           <a:xfrm>
-            <a:off x="786384" y="1664207"/>
-            <a:ext cx="10222992" cy="365760"/>
+            <a:off x="786384" y="1344168"/>
+            <a:ext cx="3063239" cy="365760"/>
           </a:xfrm>
           <a:prstGeom prst="rect">
             <a:avLst/>
@@ -6835,7 +6883,7 @@
         </p:nvSpPr>
         <p:spPr>
           <a:xfrm>
-            <a:off x="585216" y="2779775"/>
+            <a:off x="585216" y="2459736"/>
             <a:ext cx="50292" cy="182880"/>
           </a:xfrm>
           <a:prstGeom prst="roundRect">
@@ -6879,8 +6927,8 @@
         </p:nvSpPr>
         <p:spPr>
           <a:xfrm>
-            <a:off x="786384" y="2724911"/>
-            <a:ext cx="10222992" cy="365760"/>
+            <a:off x="786384" y="2404872"/>
+            <a:ext cx="3063239" cy="365760"/>
           </a:xfrm>
           <a:prstGeom prst="rect">
             <a:avLst/>
@@ -6913,7 +6961,7 @@
         </p:nvSpPr>
         <p:spPr>
           <a:xfrm>
-            <a:off x="585216" y="3840479"/>
+            <a:off x="585216" y="3520440"/>
             <a:ext cx="50292" cy="182880"/>
           </a:xfrm>
           <a:prstGeom prst="roundRect">
@@ -6957,8 +7005,8 @@
         </p:nvSpPr>
         <p:spPr>
           <a:xfrm>
-            <a:off x="786384" y="3785615"/>
-            <a:ext cx="10222992" cy="365760"/>
+            <a:off x="786384" y="3465576"/>
+            <a:ext cx="3063239" cy="365760"/>
           </a:xfrm>
           <a:prstGeom prst="rect">
             <a:avLst/>
@@ -6991,7 +7039,7 @@
         </p:nvSpPr>
         <p:spPr>
           <a:xfrm>
-            <a:off x="585216" y="4901183"/>
+            <a:off x="585216" y="4581144"/>
             <a:ext cx="50292" cy="182880"/>
           </a:xfrm>
           <a:prstGeom prst="roundRect">
@@ -7035,8 +7083,8 @@
         </p:nvSpPr>
         <p:spPr>
           <a:xfrm>
-            <a:off x="786384" y="4846320"/>
-            <a:ext cx="10222992" cy="365760"/>
+            <a:off x="786384" y="4526280"/>
+            <a:ext cx="3063239" cy="365760"/>
           </a:xfrm>
           <a:prstGeom prst="rect">
             <a:avLst/>
@@ -7069,7 +7117,7 @@
         </p:nvSpPr>
         <p:spPr>
           <a:xfrm>
-            <a:off x="585216" y="5596127"/>
+            <a:off x="585216" y="5276088"/>
             <a:ext cx="50292" cy="182880"/>
           </a:xfrm>
           <a:prstGeom prst="roundRect">
@@ -7113,8 +7161,8 @@
         </p:nvSpPr>
         <p:spPr>
           <a:xfrm>
-            <a:off x="786384" y="5541264"/>
-            <a:ext cx="10222992" cy="365760"/>
+            <a:off x="786384" y="5221224"/>
+            <a:ext cx="3063239" cy="365760"/>
           </a:xfrm>
           <a:prstGeom prst="rect">
             <a:avLst/>
@@ -7134,7 +7182,7 @@
                 </a:solidFill>
                 <a:latin typeface="Helvetica"/>
               </a:rPr>
-              <a:t>**Helix attends every technical session and no session that settles what a variable means.** A translator converts between vocabularies. It cannot rule on semantics, and nobody could confer that standing on it.</a:t>
+              <a:t>**Helix is in seven of eleven rooms and holds none of the rulings.** It has to be present when the contract it already built against is settled. It cannot hold the decision, because converting between vocabularies confers no standing to rule on meaning.</a:t>
             </a:r>
           </a:p>
         </p:txBody>
@@ -7147,7 +7195,7 @@
         </p:nvSpPr>
         <p:spPr>
           <a:xfrm>
-            <a:off x="585216" y="6839712"/>
+            <a:off x="585216" y="6702551"/>
             <a:ext cx="50292" cy="182880"/>
           </a:xfrm>
           <a:prstGeom prst="roundRect">
@@ -7191,8 +7239,8 @@
         </p:nvSpPr>
         <p:spPr>
           <a:xfrm>
-            <a:off x="786384" y="6784848"/>
-            <a:ext cx="10222992" cy="365760"/>
+            <a:off x="786384" y="6647688"/>
+            <a:ext cx="3063239" cy="365760"/>
           </a:xfrm>
           <a:prstGeom prst="rect">
             <a:avLst/>
@@ -7212,7 +7260,7 @@
                 </a:solidFill>
                 <a:latin typeface="Helvetica"/>
               </a:rPr>
-              <a:t>**It holds the only working transport code for the exchange that already failed.** We cannot say from the case study material whether that helps, so the plan is built to gain if it can and to lose nothing if it cannot.</a:t>
+              <a:t>**It holds the only working transport code for the exchange that already failed.** We cannot say from the case study material whether that helps, so the plan gains if it can and loses nothing if it cannot.</a:t>
             </a:r>
           </a:p>
         </p:txBody>
@@ -7251,6 +7299,30 @@
           </a:p>
         </p:txBody>
       </p:sp>
+      <p:pic>
+        <p:nvPicPr>
+          <p:cNvPr id="17" name="Picture 16" descr="roommap.png"/>
+          <p:cNvPicPr>
+            <a:picLocks noChangeAspect="1"/>
+          </p:cNvPicPr>
+          <p:nvPr/>
+        </p:nvPicPr>
+        <p:blipFill>
+          <a:blip r:embed="rId2"/>
+          <a:stretch>
+            <a:fillRect/>
+          </a:stretch>
+        </p:blipFill>
+        <p:spPr>
+          <a:xfrm>
+            <a:off x="4169663" y="1344168"/>
+            <a:ext cx="7436815" cy="2741062"/>
+          </a:xfrm>
+          <a:prstGeom prst="rect">
+            <a:avLst/>
+          </a:prstGeom>
+        </p:spPr>
+      </p:pic>
     </p:spTree>
   </p:cSld>
   <p:clrMapOvr>
@@ -7842,7 +7914,7 @@
                 </a:solidFill>
                 <a:latin typeface="Helvetica"/>
               </a:rPr>
-              <a:t>It finds the gaps from the declarations alone. It was never told what to look for.</a:t>
+              <a:t>430 clause cells across 43 declarations. 35 are stated.</a:t>
             </a:r>
           </a:p>
         </p:txBody>
@@ -7855,7 +7927,7 @@
         </p:nvSpPr>
         <p:spPr>
           <a:xfrm>
-            <a:off x="585216" y="1719072"/>
+            <a:off x="585216" y="1399032"/>
             <a:ext cx="50292" cy="182880"/>
           </a:xfrm>
           <a:prstGeom prst="roundRect">
@@ -7899,8 +7971,8 @@
         </p:nvSpPr>
         <p:spPr>
           <a:xfrm>
-            <a:off x="786384" y="1664207"/>
-            <a:ext cx="10222992" cy="365760"/>
+            <a:off x="786384" y="1344168"/>
+            <a:ext cx="3063239" cy="365760"/>
           </a:xfrm>
           <a:prstGeom prst="rect">
             <a:avLst/>
@@ -7920,7 +7992,7 @@
                 </a:solidFill>
                 <a:latin typeface="Helvetica"/>
               </a:rPr>
-              <a:t>Reads four partner declarations in four incompatible formats: a spec sheet, a README, a clause-numbered requirements document and a JSON schema.</a:t>
+              <a:t>Reads four declarations in four incompatible formats and applies seven general rules. None names a partner, an item or a gap.</a:t>
             </a:r>
           </a:p>
         </p:txBody>
@@ -7933,7 +8005,7 @@
         </p:nvSpPr>
         <p:spPr>
           <a:xfrm>
-            <a:off x="585216" y="2779775"/>
+            <a:off x="585216" y="2276856"/>
             <a:ext cx="50292" cy="182880"/>
           </a:xfrm>
           <a:prstGeom prst="roundRect">
@@ -7977,8 +8049,8 @@
         </p:nvSpPr>
         <p:spPr>
           <a:xfrm>
-            <a:off x="786384" y="2724911"/>
-            <a:ext cx="10222992" cy="365760"/>
+            <a:off x="786384" y="2221991"/>
+            <a:ext cx="3063239" cy="365760"/>
           </a:xfrm>
           <a:prstGeom prst="rect">
             <a:avLst/>
@@ -7998,7 +8070,7 @@
                 </a:solidFill>
                 <a:latin typeface="Helvetica"/>
               </a:rPr>
-              <a:t>Applies seven general rules. None names a partner, an item or a gap. On a boundary where every object has an owner and every clause is stated, all seven return nothing.</a:t>
+              <a:t>**Five clauses are absent in all 43 declarations**: uncertainty, spatial resolution, scenario identity, cadence, encoding. Never stated, never even inferable.</a:t>
             </a:r>
           </a:p>
         </p:txBody>
@@ -8011,7 +8083,7 @@
         </p:nvSpPr>
         <p:spPr>
           <a:xfrm>
-            <a:off x="585216" y="3840479"/>
+            <a:off x="585216" y="3337560"/>
             <a:ext cx="50292" cy="182880"/>
           </a:xfrm>
           <a:prstGeom prst="roundRect">
@@ -8055,8 +8127,8 @@
         </p:nvSpPr>
         <p:spPr>
           <a:xfrm>
-            <a:off x="786384" y="3785615"/>
-            <a:ext cx="10222992" cy="365760"/>
+            <a:off x="786384" y="3282696"/>
+            <a:ext cx="3063239" cy="365760"/>
           </a:xfrm>
           <a:prstGeom prst="rect">
             <a:avLst/>
@@ -8076,7 +8148,7 @@
                 </a:solidFill>
                 <a:latin typeface="Helvetica"/>
               </a:rPr>
-              <a:t>Returns 105 findings across 43 declarations, 44 blocking. The four gaps fall out unaided, and a test asserts they still do.</a:t>
+              <a:t>The whole consortium yields **one** identifiable exchange, and that one is broken three ways at once.</a:t>
             </a:r>
           </a:p>
         </p:txBody>
@@ -8089,7 +8161,7 @@
         </p:nvSpPr>
         <p:spPr>
           <a:xfrm>
-            <a:off x="585216" y="4718303"/>
+            <a:off x="585216" y="4215383"/>
             <a:ext cx="50292" cy="182880"/>
           </a:xfrm>
           <a:prstGeom prst="roundRect">
@@ -8133,8 +8205,8 @@
         </p:nvSpPr>
         <p:spPr>
           <a:xfrm>
-            <a:off x="786384" y="4663440"/>
-            <a:ext cx="10222992" cy="365760"/>
+            <a:off x="786384" y="4160520"/>
+            <a:ext cx="3063239" cy="365760"/>
           </a:xfrm>
           <a:prstGeom prst="rect">
             <a:avLst/>
@@ -8167,7 +8239,7 @@
         </p:nvSpPr>
         <p:spPr>
           <a:xfrm>
-            <a:off x="585216" y="5961887"/>
+            <a:off x="585216" y="5458968"/>
             <a:ext cx="50292" cy="182880"/>
           </a:xfrm>
           <a:prstGeom prst="roundRect">
@@ -8211,8 +8283,8 @@
         </p:nvSpPr>
         <p:spPr>
           <a:xfrm>
-            <a:off x="786384" y="5907023"/>
-            <a:ext cx="10222992" cy="365760"/>
+            <a:off x="786384" y="5404104"/>
+            <a:ext cx="3063239" cy="365760"/>
           </a:xfrm>
           <a:prstGeom prst="rect">
             <a:avLst/>
@@ -8271,6 +8343,30 @@
           </a:p>
         </p:txBody>
       </p:sp>
+      <p:pic>
+        <p:nvPicPr>
+          <p:cNvPr id="15" name="Picture 14" descr="clause_matrix.png"/>
+          <p:cNvPicPr>
+            <a:picLocks noChangeAspect="1"/>
+          </p:cNvPicPr>
+          <p:nvPr/>
+        </p:nvPicPr>
+        <p:blipFill>
+          <a:blip r:embed="rId2"/>
+          <a:stretch>
+            <a:fillRect/>
+          </a:stretch>
+        </p:blipFill>
+        <p:spPr>
+          <a:xfrm>
+            <a:off x="4169663" y="1344168"/>
+            <a:ext cx="7436815" cy="4779734"/>
+          </a:xfrm>
+          <a:prstGeom prst="rect">
+            <a:avLst/>
+          </a:prstGeom>
+        </p:spPr>
+      </p:pic>
     </p:spTree>
   </p:cSld>
   <p:clrMapOvr>

--- a/deck/ares_board_deck.pptx
+++ b/deck/ares_board_deck.pptx
@@ -649,7 +649,7 @@
           <a:lstStyle/>
           <a:p>
             <a:r>
-              <a:t>Counter-case: loose coupling is defensible for a planning study and indefensible for a resilience claim. The funder is buying a resilience claim. Source if asked: the 2018 figures are the Opportunity rover's own telemetry as reported by JPL, 645 Wh on 30 May falling to 22 Wh by 10 June 2018, against a clear-sky baseline of roughly 600 to 900 Wh per sol. That is real published data and it is external to the brief, unlike everything else in this deck, which is read off the partner descriptions. Say so rather than let it pass as though the brief supplied it.</a:t>
+              <a:t>This is the slide to slow down on and the language is deliberate. The counter-case: loose coupling is defensible for a planning study and indefensible for a resilience claim, and the funder is buying a resilience claim. Where the floor sits is Meridian's to state, which is why track B elicits it in weeks 1 to 3. Source if asked: the 2018 figures are the Opportunity rover's own telemetry as reported by JPL, 645 Wh on 30 May falling to 22 Wh by 10 June 2018 against a clear-sky baseline of roughly 600 to 900 Wh per sol. Real published data, external to the brief, unlike everything else here which is read off the partner descriptions.</a:t>
             </a:r>
           </a:p>
         </p:txBody>
@@ -5078,7 +5078,7 @@
                 </a:solidFill>
                 <a:latin typeface="Helvetica"/>
               </a:rPr>
-              <a:t>Tight coupling is necessary, which is why the contract comes first</a:t>
+              <a:t>At what fidelity does this become admissible evidence?</a:t>
             </a:r>
           </a:p>
         </p:txBody>
@@ -5112,7 +5112,7 @@
                 </a:solidFill>
                 <a:latin typeface="Helvetica"/>
               </a:rPr>
-              <a:t>Supply and demand share a driver, so exchanging bounds once destroys the thing being tested.</a:t>
+              <a:t>The question is not whether tight coupling is scientifically interesting. It is where the line sits between a model that can carry a design decision that kills people if it is wrong, and one that cannot.</a:t>
             </a:r>
           </a:p>
         </p:txBody>
@@ -5190,7 +5190,7 @@
                 </a:solidFill>
                 <a:latin typeface="Helvetica"/>
               </a:rPr>
-              <a:t>In the 2018 planet-encircling dust event, one rover's array output fell from 645 Wh to 22 Wh in eleven days, about 3 percent of clear-sky baseline.</a:t>
+              <a:t>**A settlement model exists so somebody can sign a habitat design.** Below some level of resolution and coupling it is not a coarser version of the same instrument. It is inadmissible as evidence for the decision it was built to inform.</a:t>
             </a:r>
           </a:p>
         </p:txBody>
@@ -5203,7 +5203,7 @@
         </p:nvSpPr>
         <p:spPr>
           <a:xfrm>
-            <a:off x="585216" y="2459736"/>
+            <a:off x="585216" y="2825496"/>
             <a:ext cx="50292" cy="182880"/>
           </a:xfrm>
           <a:prstGeom prst="roundRect">
@@ -5247,7 +5247,7 @@
         </p:nvSpPr>
         <p:spPr>
           <a:xfrm>
-            <a:off x="786384" y="2404872"/>
+            <a:off x="786384" y="2770632"/>
             <a:ext cx="3063239" cy="365760"/>
           </a:xfrm>
           <a:prstGeom prst="rect">
@@ -5268,7 +5268,7 @@
                 </a:solidFill>
                 <a:latin typeface="Helvetica"/>
               </a:rPr>
-              <a:t>The same storm drives crew indoors, changes activity schedules, raises thermal load and shifts life support duty cycles. Generation falls and demand rises together, because both answer to the same weather.</a:t>
+              <a:t>**No engineer signs a life-safety design on a tool whose own authors would not trust it to design one.** That sets a floor, and this consortium is below it.</a:t>
             </a:r>
           </a:p>
         </p:txBody>
@@ -5281,7 +5281,7 @@
         </p:nvSpPr>
         <p:spPr>
           <a:xfrm>
-            <a:off x="585216" y="3703320"/>
+            <a:off x="585216" y="3886200"/>
             <a:ext cx="50292" cy="182880"/>
           </a:xfrm>
           <a:prstGeom prst="roundRect">
@@ -5325,7 +5325,7 @@
         </p:nvSpPr>
         <p:spPr>
           <a:xfrm>
-            <a:off x="786384" y="3648456"/>
+            <a:off x="786384" y="3831336"/>
             <a:ext cx="3063239" cy="365760"/>
           </a:xfrm>
           <a:prstGeom prst="rect">
@@ -5346,7 +5346,7 @@
                 </a:solidFill>
                 <a:latin typeface="Helvetica"/>
               </a:rPr>
-              <a:t>Exchange bounds once and that correlation is gone by construction. What returns is a worst-case supply and a worst-case demand as two numbers, when the coincidence is what ends a settlement.</a:t>
+              <a:t>**The physics forces the same answer.** A dust event cuts generation and simultaneously drives crew indoors, changing thermal and life support load. Supply and demand answer to the same cause.</a:t>
             </a:r>
           </a:p>
         </p:txBody>
@@ -5359,7 +5359,7 @@
         </p:nvSpPr>
         <p:spPr>
           <a:xfrm>
-            <a:off x="585216" y="4946903"/>
+            <a:off x="585216" y="5129784"/>
             <a:ext cx="50292" cy="182880"/>
           </a:xfrm>
           <a:prstGeom prst="roundRect">
@@ -5403,7 +5403,7 @@
         </p:nvSpPr>
         <p:spPr>
           <a:xfrm>
-            <a:off x="786384" y="4892040"/>
+            <a:off x="786384" y="5074920"/>
             <a:ext cx="3063239" cy="365760"/>
           </a:xfrm>
           <a:prstGeom prst="rect">
@@ -5424,7 +5424,7 @@
                 </a:solidFill>
                 <a:latin typeface="Helvetica"/>
               </a:rPr>
-              <a:t>That is what the risk laboratory means by compound events. Its objection and the coupling question are one question.</a:t>
+              <a:t>Exchange bounds once and that dependence is severed by construction. What returns is a worst case for each side separately, when the coincidence is what ends a settlement.</a:t>
             </a:r>
           </a:p>
         </p:txBody>
@@ -5437,7 +5437,7 @@
         </p:nvSpPr>
         <p:spPr>
           <a:xfrm>
-            <a:off x="585216" y="5824727"/>
+            <a:off x="585216" y="6190488"/>
             <a:ext cx="50292" cy="182880"/>
           </a:xfrm>
           <a:prstGeom prst="roundRect">
@@ -5481,7 +5481,7 @@
         </p:nvSpPr>
         <p:spPr>
           <a:xfrm>
-            <a:off x="786384" y="5769864"/>
+            <a:off x="786384" y="6135624"/>
             <a:ext cx="3063239" cy="365760"/>
           </a:xfrm>
           <a:prstGeom prst="rect">
@@ -5502,7 +5502,7 @@
                 </a:solidFill>
                 <a:latin typeface="Helvetica"/>
               </a:rPr>
-              <a:t>**Coupling tightly across three vocabularies and two clocks does not fail loudly.** It agrees quickly and wrongly, once per timestep.</a:t>
+              <a:t>Meridian's clause 4.2 already forbids exactly this: where two stressors share a physical cause, the model shall not treat them as independent.</a:t>
             </a:r>
           </a:p>
         </p:txBody>
@@ -5536,7 +5536,7 @@
                 </a:solidFill>
                 <a:latin typeface="Helvetica"/>
               </a:rPr>
-              <a:t>The brief invites the opposite case. This is why it was rejected rather than not chosen.</a:t>
+              <a:t>Three quarters of one instrument, not four models that would be nice to connect.</a:t>
             </a:r>
           </a:p>
         </p:txBody>
@@ -8148,7 +8148,7 @@
                 </a:solidFill>
                 <a:latin typeface="Helvetica"/>
               </a:rPr>
-              <a:t>The whole consortium yields **one** identifiable exchange, and that one is broken three ways at once.</a:t>
+              <a:t>The whole consortium yields one identifiable exchange, and that one is broken three ways at once.</a:t>
             </a:r>
           </a:p>
         </p:txBody>
@@ -8226,7 +8226,7 @@
                 </a:solidFill>
                 <a:latin typeface="Helvetica"/>
               </a:rPr>
-              <a:t>**No language model runs inside it.** The checker is deterministic rule code, because a finding four disagreeing institutions have to accept must be reproducible byte for byte and legible in a function.</a:t>
+              <a:t>**Deterministic rule code, with no model inside it.** A finding that four disagreeing institutions have to accept must be reproducible byte for byte and legible in a function.</a:t>
             </a:r>
           </a:p>
         </p:txBody>
@@ -8239,7 +8239,7 @@
         </p:nvSpPr>
         <p:spPr>
           <a:xfrm>
-            <a:off x="585216" y="5458968"/>
+            <a:off x="585216" y="5276088"/>
             <a:ext cx="50292" cy="182880"/>
           </a:xfrm>
           <a:prstGeom prst="roundRect">
@@ -8283,7 +8283,7 @@
         </p:nvSpPr>
         <p:spPr>
           <a:xfrm>
-            <a:off x="786384" y="5404104"/>
+            <a:off x="786384" y="5221224"/>
             <a:ext cx="3063239" cy="365760"/>
           </a:xfrm>
           <a:prstGeom prst="rect">

--- a/deck/ares_board_deck.pptx
+++ b/deck/ares_board_deck.pptx
@@ -6870,7 +6870,7 @@
                 </a:solidFill>
                 <a:latin typeface="Helvetica"/>
               </a:rPr>
-              <a:t>**Week 1.** Kickoff, all four partners. Interface working session with the two modelling teams and Helix. Evidence elicitation with Meridian, bilateral.</a:t>
+              <a:t>**Weeks 1 and 2 carry five of the eleven**, including the derate session, which needs Solis and Meridian in one room and is the expensive decision in the plan.</a:t>
             </a:r>
           </a:p>
         </p:txBody>
@@ -6948,7 +6948,7 @@
                 </a:solidFill>
                 <a:latin typeface="Helvetica"/>
               </a:rPr>
-              <a:t>**Week 2.** The derate session, which needs Solis and Meridian in one room. Contract v1 sign-off. Then all four review what broke when it ran.</a:t>
+              <a:t>**Two to three touchpoints a week** for the coordinator, then a weekly thirty minute standup through week 5.</a:t>
             </a:r>
           </a:p>
         </p:txBody>
@@ -6961,7 +6961,7 @@
         </p:nvSpPr>
         <p:spPr>
           <a:xfrm>
-            <a:off x="585216" y="3520440"/>
+            <a:off x="585216" y="3337560"/>
             <a:ext cx="50292" cy="182880"/>
           </a:xfrm>
           <a:prstGeom prst="roundRect">
@@ -7005,7 +7005,7 @@
         </p:nvSpPr>
         <p:spPr>
           <a:xfrm>
-            <a:off x="786384" y="3465576"/>
+            <a:off x="786384" y="3282696"/>
             <a:ext cx="3063239" cy="365760"/>
           </a:xfrm>
           <a:prstGeom prst="rect">
@@ -7026,7 +7026,7 @@
                 </a:solidFill>
                 <a:latin typeface="Helvetica"/>
               </a:rPr>
-              <a:t>**Weeks 3 to 5.** Stress case selection, a thirty minute integration standup weekly, and all-partner reviews of the normal case and the stress case.</a:t>
+              <a:t>**Helix is in seven of eleven rooms and holds none of the rulings.** It must be present when the contract it already built against is settled. It cannot hold the decision, because converting between vocabularies confers no standing to rule on meaning.</a:t>
             </a:r>
           </a:p>
         </p:txBody>
@@ -7039,7 +7039,7 @@
         </p:nvSpPr>
         <p:spPr>
           <a:xfrm>
-            <a:off x="585216" y="4581144"/>
+            <a:off x="585216" y="4764023"/>
             <a:ext cx="50292" cy="182880"/>
           </a:xfrm>
           <a:prstGeom prst="roundRect">
@@ -7083,7 +7083,7 @@
         </p:nvSpPr>
         <p:spPr>
           <a:xfrm>
-            <a:off x="786384" y="4526280"/>
+            <a:off x="786384" y="4709159"/>
             <a:ext cx="3063239" cy="365760"/>
           </a:xfrm>
           <a:prstGeom prst="rect">
@@ -7104,170 +7104,14 @@
                 </a:solidFill>
                 <a:latin typeface="Helvetica"/>
               </a:rPr>
-              <a:t>**Week 6.** Dress rehearsal, four days before the board sees it.</a:t>
-            </a:r>
-          </a:p>
-        </p:txBody>
-      </p:sp>
-      <p:sp>
-        <p:nvSpPr>
-          <p:cNvPr id="12" name="Rounded Rectangle 11"/>
-          <p:cNvSpPr/>
-          <p:nvPr/>
-        </p:nvSpPr>
-        <p:spPr>
-          <a:xfrm>
-            <a:off x="585216" y="5276088"/>
-            <a:ext cx="50292" cy="182880"/>
-          </a:xfrm>
-          <a:prstGeom prst="roundRect">
-            <a:avLst/>
-          </a:prstGeom>
-          <a:solidFill>
-            <a:srgbClr val="475569"/>
-          </a:solidFill>
-          <a:ln>
-            <a:noFill/>
-          </a:ln>
-          <a:effectLst/>
-        </p:spPr>
-        <p:style>
-          <a:lnRef idx="1">
-            <a:schemeClr val="accent1"/>
-          </a:lnRef>
-          <a:fillRef idx="3">
-            <a:schemeClr val="accent1"/>
-          </a:fillRef>
-          <a:effectRef idx="2">
-            <a:schemeClr val="accent1"/>
-          </a:effectRef>
-          <a:fontRef idx="minor">
-            <a:schemeClr val="lt1"/>
-          </a:fontRef>
-        </p:style>
-        <p:txBody>
-          <a:bodyPr rtlCol="0" anchor="ctr"/>
-          <a:lstStyle/>
-          <a:p>
-            <a:pPr algn="ctr"/>
-          </a:p>
-        </p:txBody>
-      </p:sp>
-      <p:sp>
-        <p:nvSpPr>
-          <p:cNvPr id="13" name="TextBox 12"/>
-          <p:cNvSpPr txBox="1"/>
-          <p:nvPr/>
-        </p:nvSpPr>
-        <p:spPr>
-          <a:xfrm>
-            <a:off x="786384" y="5221224"/>
-            <a:ext cx="3063239" cy="365760"/>
-          </a:xfrm>
-          <a:prstGeom prst="rect">
-            <a:avLst/>
-          </a:prstGeom>
-          <a:noFill/>
-        </p:spPr>
-        <p:txBody>
-          <a:bodyPr wrap="square">
-            <a:spAutoFit/>
-          </a:bodyPr>
-          <a:lstStyle/>
-          <a:p>
-            <a:r>
-              <a:rPr sz="1350" b="1">
-                <a:solidFill>
-                  <a:srgbClr val="1F2937"/>
-                </a:solidFill>
-                <a:latin typeface="Helvetica"/>
-              </a:rPr>
-              <a:t>**Helix is in seven of eleven rooms and holds none of the rulings.** It has to be present when the contract it already built against is settled. It cannot hold the decision, because converting between vocabularies confers no standing to rule on meaning.</a:t>
-            </a:r>
-          </a:p>
-        </p:txBody>
-      </p:sp>
-      <p:sp>
-        <p:nvSpPr>
-          <p:cNvPr id="14" name="Rounded Rectangle 13"/>
-          <p:cNvSpPr/>
-          <p:nvPr/>
-        </p:nvSpPr>
-        <p:spPr>
-          <a:xfrm>
-            <a:off x="585216" y="6702551"/>
-            <a:ext cx="50292" cy="182880"/>
-          </a:xfrm>
-          <a:prstGeom prst="roundRect">
-            <a:avLst/>
-          </a:prstGeom>
-          <a:solidFill>
-            <a:srgbClr val="475569"/>
-          </a:solidFill>
-          <a:ln>
-            <a:noFill/>
-          </a:ln>
-          <a:effectLst/>
-        </p:spPr>
-        <p:style>
-          <a:lnRef idx="1">
-            <a:schemeClr val="accent1"/>
-          </a:lnRef>
-          <a:fillRef idx="3">
-            <a:schemeClr val="accent1"/>
-          </a:fillRef>
-          <a:effectRef idx="2">
-            <a:schemeClr val="accent1"/>
-          </a:effectRef>
-          <a:fontRef idx="minor">
-            <a:schemeClr val="lt1"/>
-          </a:fontRef>
-        </p:style>
-        <p:txBody>
-          <a:bodyPr rtlCol="0" anchor="ctr"/>
-          <a:lstStyle/>
-          <a:p>
-            <a:pPr algn="ctr"/>
-          </a:p>
-        </p:txBody>
-      </p:sp>
-      <p:sp>
-        <p:nvSpPr>
-          <p:cNvPr id="15" name="TextBox 14"/>
-          <p:cNvSpPr txBox="1"/>
-          <p:nvPr/>
-        </p:nvSpPr>
-        <p:spPr>
-          <a:xfrm>
-            <a:off x="786384" y="6647688"/>
-            <a:ext cx="3063239" cy="365760"/>
-          </a:xfrm>
-          <a:prstGeom prst="rect">
-            <a:avLst/>
-          </a:prstGeom>
-          <a:noFill/>
-        </p:spPr>
-        <p:txBody>
-          <a:bodyPr wrap="square">
-            <a:spAutoFit/>
-          </a:bodyPr>
-          <a:lstStyle/>
-          <a:p>
-            <a:r>
-              <a:rPr sz="1350" b="1">
-                <a:solidFill>
-                  <a:srgbClr val="1F2937"/>
-                </a:solidFill>
-                <a:latin typeface="Helvetica"/>
-              </a:rPr>
-              <a:t>**It holds the only working transport code for the exchange that already failed.** We cannot say from the case study material whether that helps, so the plan gains if it can and loses nothing if it cannot.</a:t>
-            </a:r>
-          </a:p>
-        </p:txBody>
-      </p:sp>
-      <p:sp>
-        <p:nvSpPr>
-          <p:cNvPr id="16" name="TextBox 15"/>
+              <a:t>It also holds the only working transport code for the exchange that already failed. We cannot tell from the case study material whether that helps, so the plan gains if it does and loses nothing if it does not.</a:t>
+            </a:r>
+          </a:p>
+        </p:txBody>
+      </p:sp>
+      <p:sp>
+        <p:nvSpPr>
+          <p:cNvPr id="12" name="TextBox 11"/>
           <p:cNvSpPr txBox="1"/>
           <p:nvPr/>
         </p:nvSpPr>
@@ -7301,7 +7145,7 @@
       </p:sp>
       <p:pic>
         <p:nvPicPr>
-          <p:cNvPr id="17" name="Picture 16" descr="roommap.png"/>
+          <p:cNvPr id="13" name="Picture 12" descr="roommap.png"/>
           <p:cNvPicPr>
             <a:picLocks noChangeAspect="1"/>
           </p:cNvPicPr>

--- a/deck/ares_board_deck.pptx
+++ b/deck/ares_board_deck.pptx
@@ -6,13 +6,14 @@
   </p:sldMasterIdLst>
   <p:sldIdLst>
     <p:sldId id="256" r:id="rId7"/>
-    <p:sldId id="257" r:id="rId9"/>
+    <p:sldId id="257" r:id="rId8"/>
     <p:sldId id="258" r:id="rId10"/>
     <p:sldId id="259" r:id="rId11"/>
     <p:sldId id="260" r:id="rId12"/>
     <p:sldId id="261" r:id="rId13"/>
     <p:sldId id="262" r:id="rId14"/>
     <p:sldId id="263" r:id="rId15"/>
+    <p:sldId id="264" r:id="rId16"/>
   </p:sldIdLst>
   <p:sldSz cx="12191695" cy="6858000" type="screen4x3"/>
   <p:notesSz cx="6858000" cy="9144000"/>
@@ -509,7 +510,8 @@
           <a:lstStyle/>
           <a:p>
             <a:r>
-              <a:t>Open here. The value of this slide is that it stops the room treating these as four problems with four owners.</a:t>
+              <a:rPr sz="1100"/>
+              <a:t>Open here. This slide stops the room treating these as four problems with four owners.</a:t>
             </a:r>
           </a:p>
         </p:txBody>
@@ -579,6 +581,7 @@
           <a:lstStyle/>
           <a:p>
             <a:r>
+              <a:rPr sz="1100"/>
               <a:t>If asked how these were found: list what each partner consumes against what each produces. The gaps are in the text.</a:t>
             </a:r>
           </a:p>
@@ -649,7 +652,8 @@
           <a:lstStyle/>
           <a:p>
             <a:r>
-              <a:t>This is the slide to slow down on and the language is deliberate. The counter-case: loose coupling is defensible for a planning study and indefensible for a resilience claim, and the funder is buying a resilience claim. Where the floor sits is Meridian's to state, which is why track B elicits it in weeks 1 to 3. Source if asked: the 2018 figures are the Opportunity rover's own telemetry as reported by JPL, 645 Wh on 30 May falling to 22 Wh by 10 June 2018 against a clear-sky baseline of roughly 600 to 900 Wh per sol. Real published data, external to the brief, unlike everything else here which is read off the partner descriptions.</a:t>
+              <a:rPr sz="1100"/>
+              <a:t>Slow down here, the language is deliberate. Counter-case: loose coupling is defensible for a planning study and indefensible for a resilience claim, and the funder is buying a resilience claim. Where the floor sits is Meridian's to state, which is why track B elicits it in weeks 1 to 3. The credibility threshold is Li et al. 2019, Applied Energy 239. Source if asked: the 2018 dust figures are Opportunity's own telemetry as reported by JPL, 645 Wh on 30 May falling to 22 Wh by 10 June, against a clear-sky baseline near 600 to 900 Wh per sol. Real published data, external to the brief, unlike everything else here.</a:t>
             </a:r>
           </a:p>
         </p:txBody>
@@ -719,7 +723,8 @@
           <a:lstStyle/>
           <a:p>
             <a:r>
-              <a:t>This slide answers the real question, which is whether the programme survives contact with reality.</a:t>
+              <a:rPr sz="1100"/>
+              <a:t>This answers the real question, which is whether the programme survives contact with reality.</a:t>
             </a:r>
           </a:p>
         </p:txBody>
@@ -789,7 +794,8 @@
           <a:lstStyle/>
           <a:p>
             <a:r>
-              <a:t>For every number at week 6: which model, which contract, which schedule version, which threshold set. Those four questions are exactly what the funder's review asks.</a:t>
+              <a:rPr sz="1100"/>
+              <a:t>Review points at the end of weeks 1, 2, 3 and 5. Those four traceability questions are exactly what the funder's review asks.</a:t>
             </a:r>
           </a:p>
         </p:txBody>
@@ -859,7 +865,8 @@
           <a:lstStyle/>
           <a:p>
             <a:r>
-              <a:t>The last bullet is the one to say out loud. It is a governance point dressed as a seating plan. Helix is in the room because it has the only working transport code for the failing exchange, which could get week 2 running in days. The plan benefits from that without depending on it.</a:t>
+              <a:rPr sz="1100"/>
+              <a:t>The Helix line is the one to say out loud. It is a governance point dressed as a seating plan.</a:t>
             </a:r>
           </a:p>
         </p:txBody>
@@ -929,7 +936,8 @@
           <a:lstStyle/>
           <a:p>
             <a:r>
-              <a:t>A neutral checker reporting that two partners exchange something neither declares makes the gap a property of the interface rather than an accusation against a partner.</a:t>
+              <a:rPr sz="1100"/>
+              <a:t>A neutral checker reporting that two partners exchange something neither declares makes the gap a property of the interface rather than an accusation.</a:t>
             </a:r>
           </a:p>
         </p:txBody>
@@ -999,7 +1007,8 @@
           <a:lstStyle/>
           <a:p>
             <a:r>
-              <a:t>Demo in three minutes: run it, show the calendar, select an orphaned item, show the finding, open the declaration and read the sentence it came from. Close on the limits. If asked how this position differs from the one that was confidently wrong and overruled mid-session: it does not differ by better reasoning, it differs by naming in advance the result that would overturn it, and putting that result inside week 5.</a:t>
+              <a:rPr sz="1100"/>
+              <a:t>Demo in three minutes: run it, show the calendar, select an orphaned item, show the finding, open the declaration and read the sentence it came from. Close on the limits. If asked how this position differs from the one that was confidently wrong and overruled mid-session: not by better reasoning, but by naming in advance the result that would overturn it and putting it in week 5.</a:t>
             </a:r>
           </a:p>
         </p:txBody>
@@ -4005,498 +4014,30 @@
         <p:nvPr/>
       </p:nvGrpSpPr>
       <p:grpSpPr/>
-      <p:sp>
-        <p:nvSpPr>
-          <p:cNvPr id="2" name="TextBox 1"/>
-          <p:cNvSpPr txBox="1"/>
+      <p:pic>
+        <p:nvPicPr>
+          <p:cNvPr id="2" name="Picture 1" descr="00.png"/>
+          <p:cNvPicPr>
+            <a:picLocks noChangeAspect="1"/>
+          </p:cNvPicPr>
           <p:nvPr/>
-        </p:nvSpPr>
+        </p:nvPicPr>
+        <p:blipFill>
+          <a:blip r:embed="rId2"/>
+          <a:stretch>
+            <a:fillRect/>
+          </a:stretch>
+        </p:blipFill>
         <p:spPr>
           <a:xfrm>
-            <a:off x="585216" y="475488"/>
-            <a:ext cx="10789920" cy="640080"/>
+            <a:off x="0" y="0"/>
+            <a:ext cx="12191695" cy="6858000"/>
           </a:xfrm>
           <a:prstGeom prst="rect">
             <a:avLst/>
           </a:prstGeom>
-          <a:noFill/>
         </p:spPr>
-        <p:txBody>
-          <a:bodyPr wrap="square">
-            <a:spAutoFit/>
-          </a:bodyPr>
-          <a:lstStyle/>
-          <a:p>
-            <a:r>
-              <a:rPr sz="3000" b="1">
-                <a:solidFill>
-                  <a:srgbClr val="1F2937"/>
-                </a:solidFill>
-                <a:latin typeface="Helvetica"/>
-              </a:rPr>
-              <a:t>This is triage</a:t>
-            </a:r>
-          </a:p>
-        </p:txBody>
-      </p:sp>
-      <p:sp>
-        <p:nvSpPr>
-          <p:cNvPr id="3" name="TextBox 2"/>
-          <p:cNvSpPr txBox="1"/>
-          <p:nvPr/>
-        </p:nvSpPr>
-        <p:spPr>
-          <a:xfrm>
-            <a:off x="585216" y="960120"/>
-            <a:ext cx="10424160" cy="731520"/>
-          </a:xfrm>
-          <a:prstGeom prst="rect">
-            <a:avLst/>
-          </a:prstGeom>
-          <a:noFill/>
-        </p:spPr>
-        <p:txBody>
-          <a:bodyPr wrap="square">
-            <a:spAutoFit/>
-          </a:bodyPr>
-          <a:lstStyle/>
-          <a:p>
-            <a:r>
-              <a:rPr sz="1700" b="0">
-                <a:solidFill>
-                  <a:srgbClr val="475569"/>
-                </a:solidFill>
-                <a:latin typeface="Helvetica"/>
-              </a:rPr>
-              <a:t>The four things that have gone wrong at month 8 are four views of one missing artifact.</a:t>
-            </a:r>
-          </a:p>
-        </p:txBody>
-      </p:sp>
-      <p:sp>
-        <p:nvSpPr>
-          <p:cNvPr id="4" name="Rounded Rectangle 3"/>
-          <p:cNvSpPr/>
-          <p:nvPr/>
-        </p:nvSpPr>
-        <p:spPr>
-          <a:xfrm>
-            <a:off x="585216" y="1719072"/>
-            <a:ext cx="50292" cy="182880"/>
-          </a:xfrm>
-          <a:prstGeom prst="roundRect">
-            <a:avLst/>
-          </a:prstGeom>
-          <a:solidFill>
-            <a:srgbClr val="475569"/>
-          </a:solidFill>
-          <a:ln>
-            <a:noFill/>
-          </a:ln>
-          <a:effectLst/>
-        </p:spPr>
-        <p:style>
-          <a:lnRef idx="1">
-            <a:schemeClr val="accent1"/>
-          </a:lnRef>
-          <a:fillRef idx="3">
-            <a:schemeClr val="accent1"/>
-          </a:fillRef>
-          <a:effectRef idx="2">
-            <a:schemeClr val="accent1"/>
-          </a:effectRef>
-          <a:fontRef idx="minor">
-            <a:schemeClr val="lt1"/>
-          </a:fontRef>
-        </p:style>
-        <p:txBody>
-          <a:bodyPr rtlCol="0" anchor="ctr"/>
-          <a:lstStyle/>
-          <a:p>
-            <a:pPr algn="ctr"/>
-          </a:p>
-        </p:txBody>
-      </p:sp>
-      <p:sp>
-        <p:nvSpPr>
-          <p:cNvPr id="5" name="TextBox 4"/>
-          <p:cNvSpPr txBox="1"/>
-          <p:nvPr/>
-        </p:nvSpPr>
-        <p:spPr>
-          <a:xfrm>
-            <a:off x="786384" y="1664207"/>
-            <a:ext cx="10222992" cy="365760"/>
-          </a:xfrm>
-          <a:prstGeom prst="rect">
-            <a:avLst/>
-          </a:prstGeom>
-          <a:noFill/>
-        </p:spPr>
-        <p:txBody>
-          <a:bodyPr wrap="square">
-            <a:spAutoFit/>
-          </a:bodyPr>
-          <a:lstStyle/>
-          <a:p>
-            <a:r>
-              <a:rPr sz="1350" b="1">
-                <a:solidFill>
-                  <a:srgbClr val="1F2937"/>
-                </a:solidFill>
-                <a:latin typeface="Helvetica"/>
-              </a:rPr>
-              <a:t>**An exchange is two months late and in the wrong format.** Cadence, latency and encoding were never contract terms. An exchange cannot be late against a deadline nobody set.</a:t>
-            </a:r>
-          </a:p>
-        </p:txBody>
-      </p:sp>
-      <p:sp>
-        <p:nvSpPr>
-          <p:cNvPr id="6" name="Rounded Rectangle 5"/>
-          <p:cNvSpPr/>
-          <p:nvPr/>
-        </p:nvSpPr>
-        <p:spPr>
-          <a:xfrm>
-            <a:off x="585216" y="2779775"/>
-            <a:ext cx="50292" cy="182880"/>
-          </a:xfrm>
-          <a:prstGeom prst="roundRect">
-            <a:avLst/>
-          </a:prstGeom>
-          <a:solidFill>
-            <a:srgbClr val="475569"/>
-          </a:solidFill>
-          <a:ln>
-            <a:noFill/>
-          </a:ln>
-          <a:effectLst/>
-        </p:spPr>
-        <p:style>
-          <a:lnRef idx="1">
-            <a:schemeClr val="accent1"/>
-          </a:lnRef>
-          <a:fillRef idx="3">
-            <a:schemeClr val="accent1"/>
-          </a:fillRef>
-          <a:effectRef idx="2">
-            <a:schemeClr val="accent1"/>
-          </a:effectRef>
-          <a:fontRef idx="minor">
-            <a:schemeClr val="lt1"/>
-          </a:fontRef>
-        </p:style>
-        <p:txBody>
-          <a:bodyPr rtlCol="0" anchor="ctr"/>
-          <a:lstStyle/>
-          <a:p>
-            <a:pPr algn="ctr"/>
-          </a:p>
-        </p:txBody>
-      </p:sp>
-      <p:sp>
-        <p:nvSpPr>
-          <p:cNvPr id="7" name="TextBox 6"/>
-          <p:cNvSpPr txBox="1"/>
-          <p:nvPr/>
-        </p:nvSpPr>
-        <p:spPr>
-          <a:xfrm>
-            <a:off x="786384" y="2724911"/>
-            <a:ext cx="10222992" cy="365760"/>
-          </a:xfrm>
-          <a:prstGeom prst="rect">
-            <a:avLst/>
-          </a:prstGeom>
-          <a:noFill/>
-        </p:spPr>
-        <p:txBody>
-          <a:bodyPr wrap="square">
-            <a:spAutoFit/>
-          </a:bodyPr>
-          <a:lstStyle/>
-          <a:p>
-            <a:r>
-              <a:rPr sz="1350" b="1">
-                <a:solidFill>
-                  <a:srgbClr val="1F2937"/>
-                </a:solidFill>
-                <a:latin typeface="Helvetica"/>
-              </a:rPr>
-              <a:t>**Two partners dispute what variables mean and who owns them.** The variables have no declared owner, so the partner that needed names invented them and built against them.</a:t>
-            </a:r>
-          </a:p>
-        </p:txBody>
-      </p:sp>
-      <p:sp>
-        <p:nvSpPr>
-          <p:cNvPr id="8" name="Rounded Rectangle 7"/>
-          <p:cNvSpPr/>
-          <p:nvPr/>
-        </p:nvSpPr>
-        <p:spPr>
-          <a:xfrm>
-            <a:off x="585216" y="3840479"/>
-            <a:ext cx="50292" cy="182880"/>
-          </a:xfrm>
-          <a:prstGeom prst="roundRect">
-            <a:avLst/>
-          </a:prstGeom>
-          <a:solidFill>
-            <a:srgbClr val="475569"/>
-          </a:solidFill>
-          <a:ln>
-            <a:noFill/>
-          </a:ln>
-          <a:effectLst/>
-        </p:spPr>
-        <p:style>
-          <a:lnRef idx="1">
-            <a:schemeClr val="accent1"/>
-          </a:lnRef>
-          <a:fillRef idx="3">
-            <a:schemeClr val="accent1"/>
-          </a:fillRef>
-          <a:effectRef idx="2">
-            <a:schemeClr val="accent1"/>
-          </a:effectRef>
-          <a:fontRef idx="minor">
-            <a:schemeClr val="lt1"/>
-          </a:fontRef>
-        </p:style>
-        <p:txBody>
-          <a:bodyPr rtlCol="0" anchor="ctr"/>
-          <a:lstStyle/>
-          <a:p>
-            <a:pPr algn="ctr"/>
-          </a:p>
-        </p:txBody>
-      </p:sp>
-      <p:sp>
-        <p:nvSpPr>
-          <p:cNvPr id="9" name="TextBox 8"/>
-          <p:cNvSpPr txBox="1"/>
-          <p:nvPr/>
-        </p:nvSpPr>
-        <p:spPr>
-          <a:xfrm>
-            <a:off x="786384" y="3785615"/>
-            <a:ext cx="10222992" cy="365760"/>
-          </a:xfrm>
-          <a:prstGeom prst="rect">
-            <a:avLst/>
-          </a:prstGeom>
-          <a:noFill/>
-        </p:spPr>
-        <p:txBody>
-          <a:bodyPr wrap="square">
-            <a:spAutoFit/>
-          </a:bodyPr>
-          <a:lstStyle/>
-          <a:p>
-            <a:r>
-              <a:rPr sz="1350" b="1">
-                <a:solidFill>
-                  <a:srgbClr val="1F2937"/>
-                </a:solidFill>
-                <a:latin typeface="Helvetica"/>
-              </a:rPr>
-              <a:t>**The risk laboratory says the interface cannot carry its claims.** It has no uncertainty clause. That is a missing clause, not a complaint about quality.</a:t>
-            </a:r>
-          </a:p>
-        </p:txBody>
-      </p:sp>
-      <p:sp>
-        <p:nvSpPr>
-          <p:cNvPr id="10" name="Rounded Rectangle 9"/>
-          <p:cNvSpPr/>
-          <p:nvPr/>
-        </p:nvSpPr>
-        <p:spPr>
-          <a:xfrm>
-            <a:off x="585216" y="4901183"/>
-            <a:ext cx="50292" cy="182880"/>
-          </a:xfrm>
-          <a:prstGeom prst="roundRect">
-            <a:avLst/>
-          </a:prstGeom>
-          <a:solidFill>
-            <a:srgbClr val="475569"/>
-          </a:solidFill>
-          <a:ln>
-            <a:noFill/>
-          </a:ln>
-          <a:effectLst/>
-        </p:spPr>
-        <p:style>
-          <a:lnRef idx="1">
-            <a:schemeClr val="accent1"/>
-          </a:lnRef>
-          <a:fillRef idx="3">
-            <a:schemeClr val="accent1"/>
-          </a:fillRef>
-          <a:effectRef idx="2">
-            <a:schemeClr val="accent1"/>
-          </a:effectRef>
-          <a:fontRef idx="minor">
-            <a:schemeClr val="lt1"/>
-          </a:fontRef>
-        </p:style>
-        <p:txBody>
-          <a:bodyPr rtlCol="0" anchor="ctr"/>
-          <a:lstStyle/>
-          <a:p>
-            <a:pPr algn="ctr"/>
-          </a:p>
-        </p:txBody>
-      </p:sp>
-      <p:sp>
-        <p:nvSpPr>
-          <p:cNvPr id="11" name="TextBox 10"/>
-          <p:cNvSpPr txBox="1"/>
-          <p:nvPr/>
-        </p:nvSpPr>
-        <p:spPr>
-          <a:xfrm>
-            <a:off x="786384" y="4846320"/>
-            <a:ext cx="10222992" cy="365760"/>
-          </a:xfrm>
-          <a:prstGeom prst="rect">
-            <a:avLst/>
-          </a:prstGeom>
-          <a:noFill/>
-        </p:spPr>
-        <p:txBody>
-          <a:bodyPr wrap="square">
-            <a:spAutoFit/>
-          </a:bodyPr>
-          <a:lstStyle/>
-          <a:p>
-            <a:r>
-              <a:rPr sz="1350" b="1">
-                <a:solidFill>
-                  <a:srgbClr val="1F2937"/>
-                </a:solidFill>
-                <a:latin typeface="Helvetica"/>
-              </a:rPr>
-              <a:t>**Nobody has shown the coupling is necessary.** The operators that bridge hourly simulation to multi-year planning are owned by no one.</a:t>
-            </a:r>
-          </a:p>
-        </p:txBody>
-      </p:sp>
-      <p:sp>
-        <p:nvSpPr>
-          <p:cNvPr id="12" name="Rounded Rectangle 11"/>
-          <p:cNvSpPr/>
-          <p:nvPr/>
-        </p:nvSpPr>
-        <p:spPr>
-          <a:xfrm>
-            <a:off x="585216" y="5961888"/>
-            <a:ext cx="50292" cy="182880"/>
-          </a:xfrm>
-          <a:prstGeom prst="roundRect">
-            <a:avLst/>
-          </a:prstGeom>
-          <a:solidFill>
-            <a:srgbClr val="475569"/>
-          </a:solidFill>
-          <a:ln>
-            <a:noFill/>
-          </a:ln>
-          <a:effectLst/>
-        </p:spPr>
-        <p:style>
-          <a:lnRef idx="1">
-            <a:schemeClr val="accent1"/>
-          </a:lnRef>
-          <a:fillRef idx="3">
-            <a:schemeClr val="accent1"/>
-          </a:fillRef>
-          <a:effectRef idx="2">
-            <a:schemeClr val="accent1"/>
-          </a:effectRef>
-          <a:fontRef idx="minor">
-            <a:schemeClr val="lt1"/>
-          </a:fontRef>
-        </p:style>
-        <p:txBody>
-          <a:bodyPr rtlCol="0" anchor="ctr"/>
-          <a:lstStyle/>
-          <a:p>
-            <a:pPr algn="ctr"/>
-          </a:p>
-        </p:txBody>
-      </p:sp>
-      <p:sp>
-        <p:nvSpPr>
-          <p:cNvPr id="13" name="TextBox 12"/>
-          <p:cNvSpPr txBox="1"/>
-          <p:nvPr/>
-        </p:nvSpPr>
-        <p:spPr>
-          <a:xfrm>
-            <a:off x="786384" y="5907024"/>
-            <a:ext cx="10222992" cy="365760"/>
-          </a:xfrm>
-          <a:prstGeom prst="rect">
-            <a:avLst/>
-          </a:prstGeom>
-          <a:noFill/>
-        </p:spPr>
-        <p:txBody>
-          <a:bodyPr wrap="square">
-            <a:spAutoFit/>
-          </a:bodyPr>
-          <a:lstStyle/>
-          <a:p>
-            <a:r>
-              <a:rPr sz="1350" b="1">
-                <a:solidFill>
-                  <a:srgbClr val="1F2937"/>
-                </a:solidFill>
-                <a:latin typeface="Helvetica"/>
-              </a:rPr>
-              <a:t>Second-year funding depends on a demonstration. This is a crisis to be stabilised, not a programme to be improved.</a:t>
-            </a:r>
-          </a:p>
-        </p:txBody>
-      </p:sp>
-      <p:sp>
-        <p:nvSpPr>
-          <p:cNvPr id="14" name="TextBox 13"/>
-          <p:cNvSpPr txBox="1"/>
-          <p:nvPr/>
-        </p:nvSpPr>
-        <p:spPr>
-          <a:xfrm>
-            <a:off x="585216" y="6263640"/>
-            <a:ext cx="7315200" cy="274320"/>
-          </a:xfrm>
-          <a:prstGeom prst="rect">
-            <a:avLst/>
-          </a:prstGeom>
-          <a:noFill/>
-        </p:spPr>
-        <p:txBody>
-          <a:bodyPr wrap="square">
-            <a:spAutoFit/>
-          </a:bodyPr>
-          <a:lstStyle/>
-          <a:p>
-            <a:r>
-              <a:rPr sz="900" b="0">
-                <a:solidFill>
-                  <a:srgbClr val="64748B"/>
-                </a:solidFill>
-                <a:latin typeface="Helvetica"/>
-              </a:rPr>
-              <a:t>None of the four is a failure of effort. Four workstreams aimed at them separately would each address a symptom.</a:t>
-            </a:r>
-          </a:p>
-        </p:txBody>
-      </p:sp>
+      </p:pic>
     </p:spTree>
   </p:cSld>
   <p:clrMapOvr>
@@ -4515,501 +4056,9 @@
         <p:nvPr/>
       </p:nvGrpSpPr>
       <p:grpSpPr/>
-      <p:sp>
-        <p:nvSpPr>
-          <p:cNvPr id="2" name="TextBox 1"/>
-          <p:cNvSpPr txBox="1"/>
-          <p:nvPr/>
-        </p:nvSpPr>
-        <p:spPr>
-          <a:xfrm>
-            <a:off x="585216" y="475488"/>
-            <a:ext cx="10789920" cy="640080"/>
-          </a:xfrm>
-          <a:prstGeom prst="rect">
-            <a:avLst/>
-          </a:prstGeom>
-          <a:noFill/>
-        </p:spPr>
-        <p:txBody>
-          <a:bodyPr wrap="square">
-            <a:spAutoFit/>
-          </a:bodyPr>
-          <a:lstStyle/>
-          <a:p>
-            <a:r>
-              <a:rPr sz="3000" b="1">
-                <a:solidFill>
-                  <a:srgbClr val="1F2937"/>
-                </a:solidFill>
-                <a:latin typeface="Helvetica"/>
-              </a:rPr>
-              <a:t>Four objects nobody owns</a:t>
-            </a:r>
-          </a:p>
-        </p:txBody>
-      </p:sp>
-      <p:sp>
-        <p:nvSpPr>
-          <p:cNvPr id="3" name="TextBox 2"/>
-          <p:cNvSpPr txBox="1"/>
-          <p:nvPr/>
-        </p:nvSpPr>
-        <p:spPr>
-          <a:xfrm>
-            <a:off x="585216" y="960120"/>
-            <a:ext cx="10424160" cy="731520"/>
-          </a:xfrm>
-          <a:prstGeom prst="rect">
-            <a:avLst/>
-          </a:prstGeom>
-          <a:noFill/>
-        </p:spPr>
-        <p:txBody>
-          <a:bodyPr wrap="square">
-            <a:spAutoFit/>
-          </a:bodyPr>
-          <a:lstStyle/>
-          <a:p>
-            <a:r>
-              <a:rPr sz="1700" b="0">
-                <a:solidFill>
-                  <a:srgbClr val="475569"/>
-                </a:solidFill>
-                <a:latin typeface="Helvetica"/>
-              </a:rPr>
-              <a:t>Read off the partners' own consumes and produces clauses. Nothing inferred.</a:t>
-            </a:r>
-          </a:p>
-        </p:txBody>
-      </p:sp>
-      <p:sp>
-        <p:nvSpPr>
-          <p:cNvPr id="4" name="Rounded Rectangle 3"/>
-          <p:cNvSpPr/>
-          <p:nvPr/>
-        </p:nvSpPr>
-        <p:spPr>
-          <a:xfrm>
-            <a:off x="585216" y="1399032"/>
-            <a:ext cx="50292" cy="182880"/>
-          </a:xfrm>
-          <a:prstGeom prst="roundRect">
-            <a:avLst/>
-          </a:prstGeom>
-          <a:solidFill>
-            <a:srgbClr val="475569"/>
-          </a:solidFill>
-          <a:ln>
-            <a:noFill/>
-          </a:ln>
-          <a:effectLst/>
-        </p:spPr>
-        <p:style>
-          <a:lnRef idx="1">
-            <a:schemeClr val="accent1"/>
-          </a:lnRef>
-          <a:fillRef idx="3">
-            <a:schemeClr val="accent1"/>
-          </a:fillRef>
-          <a:effectRef idx="2">
-            <a:schemeClr val="accent1"/>
-          </a:effectRef>
-          <a:fontRef idx="minor">
-            <a:schemeClr val="lt1"/>
-          </a:fontRef>
-        </p:style>
-        <p:txBody>
-          <a:bodyPr rtlCol="0" anchor="ctr"/>
-          <a:lstStyle/>
-          <a:p>
-            <a:pPr algn="ctr"/>
-          </a:p>
-        </p:txBody>
-      </p:sp>
-      <p:sp>
-        <p:nvSpPr>
-          <p:cNvPr id="5" name="TextBox 4"/>
-          <p:cNvSpPr txBox="1"/>
-          <p:nvPr/>
-        </p:nvSpPr>
-        <p:spPr>
-          <a:xfrm>
-            <a:off x="786384" y="1344168"/>
-            <a:ext cx="3063239" cy="365760"/>
-          </a:xfrm>
-          <a:prstGeom prst="rect">
-            <a:avLst/>
-          </a:prstGeom>
-          <a:noFill/>
-        </p:spPr>
-        <p:txBody>
-          <a:bodyPr wrap="square">
-            <a:spAutoFit/>
-          </a:bodyPr>
-          <a:lstStyle/>
-          <a:p>
-            <a:r>
-              <a:rPr sz="1350" b="1">
-                <a:solidFill>
-                  <a:srgbClr val="1F2937"/>
-                </a:solidFill>
-                <a:latin typeface="Helvetica"/>
-              </a:rPr>
-              <a:t>**GAP-1** hourly trace to multi-year bound. Nobody owns the conversion.</a:t>
-            </a:r>
-          </a:p>
-        </p:txBody>
-      </p:sp>
-      <p:sp>
-        <p:nvSpPr>
-          <p:cNvPr id="6" name="Rounded Rectangle 5"/>
-          <p:cNvSpPr/>
-          <p:nvPr/>
-        </p:nvSpPr>
-        <p:spPr>
-          <a:xfrm>
-            <a:off x="585216" y="2093976"/>
-            <a:ext cx="50292" cy="182880"/>
-          </a:xfrm>
-          <a:prstGeom prst="roundRect">
-            <a:avLst/>
-          </a:prstGeom>
-          <a:solidFill>
-            <a:srgbClr val="475569"/>
-          </a:solidFill>
-          <a:ln>
-            <a:noFill/>
-          </a:ln>
-          <a:effectLst/>
-        </p:spPr>
-        <p:style>
-          <a:lnRef idx="1">
-            <a:schemeClr val="accent1"/>
-          </a:lnRef>
-          <a:fillRef idx="3">
-            <a:schemeClr val="accent1"/>
-          </a:fillRef>
-          <a:effectRef idx="2">
-            <a:schemeClr val="accent1"/>
-          </a:effectRef>
-          <a:fontRef idx="minor">
-            <a:schemeClr val="lt1"/>
-          </a:fontRef>
-        </p:style>
-        <p:txBody>
-          <a:bodyPr rtlCol="0" anchor="ctr"/>
-          <a:lstStyle/>
-          <a:p>
-            <a:pPr algn="ctr"/>
-          </a:p>
-        </p:txBody>
-      </p:sp>
-      <p:sp>
-        <p:nvSpPr>
-          <p:cNvPr id="7" name="TextBox 6"/>
-          <p:cNvSpPr txBox="1"/>
-          <p:nvPr/>
-        </p:nvSpPr>
-        <p:spPr>
-          <a:xfrm>
-            <a:off x="786384" y="2039112"/>
-            <a:ext cx="3063239" cy="365760"/>
-          </a:xfrm>
-          <a:prstGeom prst="rect">
-            <a:avLst/>
-          </a:prstGeom>
-          <a:noFill/>
-        </p:spPr>
-        <p:txBody>
-          <a:bodyPr wrap="square">
-            <a:spAutoFit/>
-          </a:bodyPr>
-          <a:lstStyle/>
-          <a:p>
-            <a:r>
-              <a:rPr sz="1350" b="1">
-                <a:solidFill>
-                  <a:srgbClr val="1F2937"/>
-                </a:solidFill>
-                <a:latin typeface="Helvetica"/>
-              </a:rPr>
-              <a:t>**GAP-2** installed capacity to available capacity. Tharsis derates privately.</a:t>
-            </a:r>
-          </a:p>
-        </p:txBody>
-      </p:sp>
-      <p:sp>
-        <p:nvSpPr>
-          <p:cNvPr id="8" name="Rounded Rectangle 7"/>
-          <p:cNvSpPr/>
-          <p:nvPr/>
-        </p:nvSpPr>
-        <p:spPr>
-          <a:xfrm>
-            <a:off x="585216" y="2788920"/>
-            <a:ext cx="50292" cy="182880"/>
-          </a:xfrm>
-          <a:prstGeom prst="roundRect">
-            <a:avLst/>
-          </a:prstGeom>
-          <a:solidFill>
-            <a:srgbClr val="475569"/>
-          </a:solidFill>
-          <a:ln>
-            <a:noFill/>
-          </a:ln>
-          <a:effectLst/>
-        </p:spPr>
-        <p:style>
-          <a:lnRef idx="1">
-            <a:schemeClr val="accent1"/>
-          </a:lnRef>
-          <a:fillRef idx="3">
-            <a:schemeClr val="accent1"/>
-          </a:fillRef>
-          <a:effectRef idx="2">
-            <a:schemeClr val="accent1"/>
-          </a:effectRef>
-          <a:fontRef idx="minor">
-            <a:schemeClr val="lt1"/>
-          </a:fontRef>
-        </p:style>
-        <p:txBody>
-          <a:bodyPr rtlCol="0" anchor="ctr"/>
-          <a:lstStyle/>
-          <a:p>
-            <a:pPr algn="ctr"/>
-          </a:p>
-        </p:txBody>
-      </p:sp>
-      <p:sp>
-        <p:nvSpPr>
-          <p:cNvPr id="9" name="TextBox 8"/>
-          <p:cNvSpPr txBox="1"/>
-          <p:nvPr/>
-        </p:nvSpPr>
-        <p:spPr>
-          <a:xfrm>
-            <a:off x="786384" y="2734056"/>
-            <a:ext cx="3063239" cy="365760"/>
-          </a:xfrm>
-          <a:prstGeom prst="rect">
-            <a:avLst/>
-          </a:prstGeom>
-          <a:noFill/>
-        </p:spPr>
-        <p:txBody>
-          <a:bodyPr wrap="square">
-            <a:spAutoFit/>
-          </a:bodyPr>
-          <a:lstStyle/>
-          <a:p>
-            <a:r>
-              <a:rPr sz="1350" b="1">
-                <a:solidFill>
-                  <a:srgbClr val="1F2937"/>
-                </a:solidFill>
-                <a:latin typeface="Helvetica"/>
-              </a:rPr>
-              <a:t>**GAP-3** thresholds produced, routed to nobody.</a:t>
-            </a:r>
-          </a:p>
-        </p:txBody>
-      </p:sp>
-      <p:sp>
-        <p:nvSpPr>
-          <p:cNvPr id="10" name="Rounded Rectangle 9"/>
-          <p:cNvSpPr/>
-          <p:nvPr/>
-        </p:nvSpPr>
-        <p:spPr>
-          <a:xfrm>
-            <a:off x="585216" y="3483864"/>
-            <a:ext cx="50292" cy="182880"/>
-          </a:xfrm>
-          <a:prstGeom prst="roundRect">
-            <a:avLst/>
-          </a:prstGeom>
-          <a:solidFill>
-            <a:srgbClr val="475569"/>
-          </a:solidFill>
-          <a:ln>
-            <a:noFill/>
-          </a:ln>
-          <a:effectLst/>
-        </p:spPr>
-        <p:style>
-          <a:lnRef idx="1">
-            <a:schemeClr val="accent1"/>
-          </a:lnRef>
-          <a:fillRef idx="3">
-            <a:schemeClr val="accent1"/>
-          </a:fillRef>
-          <a:effectRef idx="2">
-            <a:schemeClr val="accent1"/>
-          </a:effectRef>
-          <a:fontRef idx="minor">
-            <a:schemeClr val="lt1"/>
-          </a:fontRef>
-        </p:style>
-        <p:txBody>
-          <a:bodyPr rtlCol="0" anchor="ctr"/>
-          <a:lstStyle/>
-          <a:p>
-            <a:pPr algn="ctr"/>
-          </a:p>
-        </p:txBody>
-      </p:sp>
-      <p:sp>
-        <p:nvSpPr>
-          <p:cNvPr id="11" name="TextBox 10"/>
-          <p:cNvSpPr txBox="1"/>
-          <p:nvPr/>
-        </p:nvSpPr>
-        <p:spPr>
-          <a:xfrm>
-            <a:off x="786384" y="3429000"/>
-            <a:ext cx="3063239" cy="365760"/>
-          </a:xfrm>
-          <a:prstGeom prst="rect">
-            <a:avLst/>
-          </a:prstGeom>
-          <a:noFill/>
-        </p:spPr>
-        <p:txBody>
-          <a:bodyPr wrap="square">
-            <a:spAutoFit/>
-          </a:bodyPr>
-          <a:lstStyle/>
-          <a:p>
-            <a:r>
-              <a:rPr sz="1350" b="1">
-                <a:solidFill>
-                  <a:srgbClr val="1F2937"/>
-                </a:solidFill>
-                <a:latin typeface="Helvetica"/>
-              </a:rPr>
-              <a:t>**GAP-4** the largest demand driver, produced by no partner.</a:t>
-            </a:r>
-          </a:p>
-        </p:txBody>
-      </p:sp>
-      <p:sp>
-        <p:nvSpPr>
-          <p:cNvPr id="12" name="Rounded Rectangle 11"/>
-          <p:cNvSpPr/>
-          <p:nvPr/>
-        </p:nvSpPr>
-        <p:spPr>
-          <a:xfrm>
-            <a:off x="585216" y="4178807"/>
-            <a:ext cx="50292" cy="182880"/>
-          </a:xfrm>
-          <a:prstGeom prst="roundRect">
-            <a:avLst/>
-          </a:prstGeom>
-          <a:solidFill>
-            <a:srgbClr val="475569"/>
-          </a:solidFill>
-          <a:ln>
-            <a:noFill/>
-          </a:ln>
-          <a:effectLst/>
-        </p:spPr>
-        <p:style>
-          <a:lnRef idx="1">
-            <a:schemeClr val="accent1"/>
-          </a:lnRef>
-          <a:fillRef idx="3">
-            <a:schemeClr val="accent1"/>
-          </a:fillRef>
-          <a:effectRef idx="2">
-            <a:schemeClr val="accent1"/>
-          </a:effectRef>
-          <a:fontRef idx="minor">
-            <a:schemeClr val="lt1"/>
-          </a:fontRef>
-        </p:style>
-        <p:txBody>
-          <a:bodyPr rtlCol="0" anchor="ctr"/>
-          <a:lstStyle/>
-          <a:p>
-            <a:pPr algn="ctr"/>
-          </a:p>
-        </p:txBody>
-      </p:sp>
-      <p:sp>
-        <p:nvSpPr>
-          <p:cNvPr id="13" name="TextBox 12"/>
-          <p:cNvSpPr txBox="1"/>
-          <p:nvPr/>
-        </p:nvSpPr>
-        <p:spPr>
-          <a:xfrm>
-            <a:off x="786384" y="4123944"/>
-            <a:ext cx="3063239" cy="365760"/>
-          </a:xfrm>
-          <a:prstGeom prst="rect">
-            <a:avLst/>
-          </a:prstGeom>
-          <a:noFill/>
-        </p:spPr>
-        <p:txBody>
-          <a:bodyPr wrap="square">
-            <a:spAutoFit/>
-          </a:bodyPr>
-          <a:lstStyle/>
-          <a:p>
-            <a:r>
-              <a:rPr sz="1350" b="1">
-                <a:solidFill>
-                  <a:srgbClr val="1F2937"/>
-                </a:solidFill>
-                <a:latin typeface="Helvetica"/>
-              </a:rPr>
-              <a:t>Two of six partner pairs have any stated exchange. No interface variable is named anywhere.</a:t>
-            </a:r>
-          </a:p>
-        </p:txBody>
-      </p:sp>
-      <p:sp>
-        <p:nvSpPr>
-          <p:cNvPr id="14" name="TextBox 13"/>
-          <p:cNvSpPr txBox="1"/>
-          <p:nvPr/>
-        </p:nvSpPr>
-        <p:spPr>
-          <a:xfrm>
-            <a:off x="585216" y="6263640"/>
-            <a:ext cx="7315200" cy="274320"/>
-          </a:xfrm>
-          <a:prstGeom prst="rect">
-            <a:avLst/>
-          </a:prstGeom>
-          <a:noFill/>
-        </p:spPr>
-        <p:txBody>
-          <a:bodyPr wrap="square">
-            <a:spAutoFit/>
-          </a:bodyPr>
-          <a:lstStyle/>
-          <a:p>
-            <a:r>
-              <a:rPr sz="900" b="0">
-                <a:solidFill>
-                  <a:srgbClr val="64748B"/>
-                </a:solidFill>
-                <a:latin typeface="Helvetica"/>
-              </a:rPr>
-              <a:t>A private assumption is invisible in a status meeting and lethal in an integration.</a:t>
-            </a:r>
-          </a:p>
-        </p:txBody>
-      </p:sp>
       <p:pic>
         <p:nvPicPr>
-          <p:cNvPr id="15" name="Picture 14" descr="boundary.png"/>
+          <p:cNvPr id="2" name="Picture 1" descr="01.png"/>
           <p:cNvPicPr>
             <a:picLocks noChangeAspect="1"/>
           </p:cNvPicPr>
@@ -5023,8 +4072,8 @@
         </p:blipFill>
         <p:spPr>
           <a:xfrm>
-            <a:off x="4169663" y="1344168"/>
-            <a:ext cx="7436815" cy="4282580"/>
+            <a:off x="0" y="0"/>
+            <a:ext cx="12191695" cy="6858000"/>
           </a:xfrm>
           <a:prstGeom prst="rect">
             <a:avLst/>
@@ -5049,501 +4098,9 @@
         <p:nvPr/>
       </p:nvGrpSpPr>
       <p:grpSpPr/>
-      <p:sp>
-        <p:nvSpPr>
-          <p:cNvPr id="2" name="TextBox 1"/>
-          <p:cNvSpPr txBox="1"/>
-          <p:nvPr/>
-        </p:nvSpPr>
-        <p:spPr>
-          <a:xfrm>
-            <a:off x="585216" y="475488"/>
-            <a:ext cx="10789920" cy="640080"/>
-          </a:xfrm>
-          <a:prstGeom prst="rect">
-            <a:avLst/>
-          </a:prstGeom>
-          <a:noFill/>
-        </p:spPr>
-        <p:txBody>
-          <a:bodyPr wrap="square">
-            <a:spAutoFit/>
-          </a:bodyPr>
-          <a:lstStyle/>
-          <a:p>
-            <a:r>
-              <a:rPr sz="3000" b="1">
-                <a:solidFill>
-                  <a:srgbClr val="1F2937"/>
-                </a:solidFill>
-                <a:latin typeface="Helvetica"/>
-              </a:rPr>
-              <a:t>At what fidelity does this become admissible evidence?</a:t>
-            </a:r>
-          </a:p>
-        </p:txBody>
-      </p:sp>
-      <p:sp>
-        <p:nvSpPr>
-          <p:cNvPr id="3" name="TextBox 2"/>
-          <p:cNvSpPr txBox="1"/>
-          <p:nvPr/>
-        </p:nvSpPr>
-        <p:spPr>
-          <a:xfrm>
-            <a:off x="585216" y="960120"/>
-            <a:ext cx="10424160" cy="731520"/>
-          </a:xfrm>
-          <a:prstGeom prst="rect">
-            <a:avLst/>
-          </a:prstGeom>
-          <a:noFill/>
-        </p:spPr>
-        <p:txBody>
-          <a:bodyPr wrap="square">
-            <a:spAutoFit/>
-          </a:bodyPr>
-          <a:lstStyle/>
-          <a:p>
-            <a:r>
-              <a:rPr sz="1700" b="0">
-                <a:solidFill>
-                  <a:srgbClr val="475569"/>
-                </a:solidFill>
-                <a:latin typeface="Helvetica"/>
-              </a:rPr>
-              <a:t>The question is not whether tight coupling is scientifically interesting. It is where the line sits between a model that can carry a design decision that kills people if it is wrong, and one that cannot.</a:t>
-            </a:r>
-          </a:p>
-        </p:txBody>
-      </p:sp>
-      <p:sp>
-        <p:nvSpPr>
-          <p:cNvPr id="4" name="Rounded Rectangle 3"/>
-          <p:cNvSpPr/>
-          <p:nvPr/>
-        </p:nvSpPr>
-        <p:spPr>
-          <a:xfrm>
-            <a:off x="585216" y="1399032"/>
-            <a:ext cx="50292" cy="182880"/>
-          </a:xfrm>
-          <a:prstGeom prst="roundRect">
-            <a:avLst/>
-          </a:prstGeom>
-          <a:solidFill>
-            <a:srgbClr val="475569"/>
-          </a:solidFill>
-          <a:ln>
-            <a:noFill/>
-          </a:ln>
-          <a:effectLst/>
-        </p:spPr>
-        <p:style>
-          <a:lnRef idx="1">
-            <a:schemeClr val="accent1"/>
-          </a:lnRef>
-          <a:fillRef idx="3">
-            <a:schemeClr val="accent1"/>
-          </a:fillRef>
-          <a:effectRef idx="2">
-            <a:schemeClr val="accent1"/>
-          </a:effectRef>
-          <a:fontRef idx="minor">
-            <a:schemeClr val="lt1"/>
-          </a:fontRef>
-        </p:style>
-        <p:txBody>
-          <a:bodyPr rtlCol="0" anchor="ctr"/>
-          <a:lstStyle/>
-          <a:p>
-            <a:pPr algn="ctr"/>
-          </a:p>
-        </p:txBody>
-      </p:sp>
-      <p:sp>
-        <p:nvSpPr>
-          <p:cNvPr id="5" name="TextBox 4"/>
-          <p:cNvSpPr txBox="1"/>
-          <p:nvPr/>
-        </p:nvSpPr>
-        <p:spPr>
-          <a:xfrm>
-            <a:off x="786384" y="1344168"/>
-            <a:ext cx="3063239" cy="365760"/>
-          </a:xfrm>
-          <a:prstGeom prst="rect">
-            <a:avLst/>
-          </a:prstGeom>
-          <a:noFill/>
-        </p:spPr>
-        <p:txBody>
-          <a:bodyPr wrap="square">
-            <a:spAutoFit/>
-          </a:bodyPr>
-          <a:lstStyle/>
-          <a:p>
-            <a:r>
-              <a:rPr sz="1350" b="1">
-                <a:solidFill>
-                  <a:srgbClr val="1F2937"/>
-                </a:solidFill>
-                <a:latin typeface="Helvetica"/>
-              </a:rPr>
-              <a:t>**A settlement model exists so somebody can sign a habitat design.** Below some level of resolution and coupling it is not a coarser version of the same instrument. It is inadmissible as evidence for the decision it was built to inform.</a:t>
-            </a:r>
-          </a:p>
-        </p:txBody>
-      </p:sp>
-      <p:sp>
-        <p:nvSpPr>
-          <p:cNvPr id="6" name="Rounded Rectangle 5"/>
-          <p:cNvSpPr/>
-          <p:nvPr/>
-        </p:nvSpPr>
-        <p:spPr>
-          <a:xfrm>
-            <a:off x="585216" y="2825496"/>
-            <a:ext cx="50292" cy="182880"/>
-          </a:xfrm>
-          <a:prstGeom prst="roundRect">
-            <a:avLst/>
-          </a:prstGeom>
-          <a:solidFill>
-            <a:srgbClr val="475569"/>
-          </a:solidFill>
-          <a:ln>
-            <a:noFill/>
-          </a:ln>
-          <a:effectLst/>
-        </p:spPr>
-        <p:style>
-          <a:lnRef idx="1">
-            <a:schemeClr val="accent1"/>
-          </a:lnRef>
-          <a:fillRef idx="3">
-            <a:schemeClr val="accent1"/>
-          </a:fillRef>
-          <a:effectRef idx="2">
-            <a:schemeClr val="accent1"/>
-          </a:effectRef>
-          <a:fontRef idx="minor">
-            <a:schemeClr val="lt1"/>
-          </a:fontRef>
-        </p:style>
-        <p:txBody>
-          <a:bodyPr rtlCol="0" anchor="ctr"/>
-          <a:lstStyle/>
-          <a:p>
-            <a:pPr algn="ctr"/>
-          </a:p>
-        </p:txBody>
-      </p:sp>
-      <p:sp>
-        <p:nvSpPr>
-          <p:cNvPr id="7" name="TextBox 6"/>
-          <p:cNvSpPr txBox="1"/>
-          <p:nvPr/>
-        </p:nvSpPr>
-        <p:spPr>
-          <a:xfrm>
-            <a:off x="786384" y="2770632"/>
-            <a:ext cx="3063239" cy="365760"/>
-          </a:xfrm>
-          <a:prstGeom prst="rect">
-            <a:avLst/>
-          </a:prstGeom>
-          <a:noFill/>
-        </p:spPr>
-        <p:txBody>
-          <a:bodyPr wrap="square">
-            <a:spAutoFit/>
-          </a:bodyPr>
-          <a:lstStyle/>
-          <a:p>
-            <a:r>
-              <a:rPr sz="1350" b="1">
-                <a:solidFill>
-                  <a:srgbClr val="1F2937"/>
-                </a:solidFill>
-                <a:latin typeface="Helvetica"/>
-              </a:rPr>
-              <a:t>**No engineer signs a life-safety design on a tool whose own authors would not trust it to design one.** That sets a floor, and this consortium is below it.</a:t>
-            </a:r>
-          </a:p>
-        </p:txBody>
-      </p:sp>
-      <p:sp>
-        <p:nvSpPr>
-          <p:cNvPr id="8" name="Rounded Rectangle 7"/>
-          <p:cNvSpPr/>
-          <p:nvPr/>
-        </p:nvSpPr>
-        <p:spPr>
-          <a:xfrm>
-            <a:off x="585216" y="3886200"/>
-            <a:ext cx="50292" cy="182880"/>
-          </a:xfrm>
-          <a:prstGeom prst="roundRect">
-            <a:avLst/>
-          </a:prstGeom>
-          <a:solidFill>
-            <a:srgbClr val="475569"/>
-          </a:solidFill>
-          <a:ln>
-            <a:noFill/>
-          </a:ln>
-          <a:effectLst/>
-        </p:spPr>
-        <p:style>
-          <a:lnRef idx="1">
-            <a:schemeClr val="accent1"/>
-          </a:lnRef>
-          <a:fillRef idx="3">
-            <a:schemeClr val="accent1"/>
-          </a:fillRef>
-          <a:effectRef idx="2">
-            <a:schemeClr val="accent1"/>
-          </a:effectRef>
-          <a:fontRef idx="minor">
-            <a:schemeClr val="lt1"/>
-          </a:fontRef>
-        </p:style>
-        <p:txBody>
-          <a:bodyPr rtlCol="0" anchor="ctr"/>
-          <a:lstStyle/>
-          <a:p>
-            <a:pPr algn="ctr"/>
-          </a:p>
-        </p:txBody>
-      </p:sp>
-      <p:sp>
-        <p:nvSpPr>
-          <p:cNvPr id="9" name="TextBox 8"/>
-          <p:cNvSpPr txBox="1"/>
-          <p:nvPr/>
-        </p:nvSpPr>
-        <p:spPr>
-          <a:xfrm>
-            <a:off x="786384" y="3831336"/>
-            <a:ext cx="3063239" cy="365760"/>
-          </a:xfrm>
-          <a:prstGeom prst="rect">
-            <a:avLst/>
-          </a:prstGeom>
-          <a:noFill/>
-        </p:spPr>
-        <p:txBody>
-          <a:bodyPr wrap="square">
-            <a:spAutoFit/>
-          </a:bodyPr>
-          <a:lstStyle/>
-          <a:p>
-            <a:r>
-              <a:rPr sz="1350" b="1">
-                <a:solidFill>
-                  <a:srgbClr val="1F2937"/>
-                </a:solidFill>
-                <a:latin typeface="Helvetica"/>
-              </a:rPr>
-              <a:t>**The physics forces the same answer.** A dust event cuts generation and simultaneously drives crew indoors, changing thermal and life support load. Supply and demand answer to the same cause.</a:t>
-            </a:r>
-          </a:p>
-        </p:txBody>
-      </p:sp>
-      <p:sp>
-        <p:nvSpPr>
-          <p:cNvPr id="10" name="Rounded Rectangle 9"/>
-          <p:cNvSpPr/>
-          <p:nvPr/>
-        </p:nvSpPr>
-        <p:spPr>
-          <a:xfrm>
-            <a:off x="585216" y="5129784"/>
-            <a:ext cx="50292" cy="182880"/>
-          </a:xfrm>
-          <a:prstGeom prst="roundRect">
-            <a:avLst/>
-          </a:prstGeom>
-          <a:solidFill>
-            <a:srgbClr val="475569"/>
-          </a:solidFill>
-          <a:ln>
-            <a:noFill/>
-          </a:ln>
-          <a:effectLst/>
-        </p:spPr>
-        <p:style>
-          <a:lnRef idx="1">
-            <a:schemeClr val="accent1"/>
-          </a:lnRef>
-          <a:fillRef idx="3">
-            <a:schemeClr val="accent1"/>
-          </a:fillRef>
-          <a:effectRef idx="2">
-            <a:schemeClr val="accent1"/>
-          </a:effectRef>
-          <a:fontRef idx="minor">
-            <a:schemeClr val="lt1"/>
-          </a:fontRef>
-        </p:style>
-        <p:txBody>
-          <a:bodyPr rtlCol="0" anchor="ctr"/>
-          <a:lstStyle/>
-          <a:p>
-            <a:pPr algn="ctr"/>
-          </a:p>
-        </p:txBody>
-      </p:sp>
-      <p:sp>
-        <p:nvSpPr>
-          <p:cNvPr id="11" name="TextBox 10"/>
-          <p:cNvSpPr txBox="1"/>
-          <p:nvPr/>
-        </p:nvSpPr>
-        <p:spPr>
-          <a:xfrm>
-            <a:off x="786384" y="5074920"/>
-            <a:ext cx="3063239" cy="365760"/>
-          </a:xfrm>
-          <a:prstGeom prst="rect">
-            <a:avLst/>
-          </a:prstGeom>
-          <a:noFill/>
-        </p:spPr>
-        <p:txBody>
-          <a:bodyPr wrap="square">
-            <a:spAutoFit/>
-          </a:bodyPr>
-          <a:lstStyle/>
-          <a:p>
-            <a:r>
-              <a:rPr sz="1350" b="1">
-                <a:solidFill>
-                  <a:srgbClr val="1F2937"/>
-                </a:solidFill>
-                <a:latin typeface="Helvetica"/>
-              </a:rPr>
-              <a:t>Exchange bounds once and that dependence is severed by construction. What returns is a worst case for each side separately, when the coincidence is what ends a settlement.</a:t>
-            </a:r>
-          </a:p>
-        </p:txBody>
-      </p:sp>
-      <p:sp>
-        <p:nvSpPr>
-          <p:cNvPr id="12" name="Rounded Rectangle 11"/>
-          <p:cNvSpPr/>
-          <p:nvPr/>
-        </p:nvSpPr>
-        <p:spPr>
-          <a:xfrm>
-            <a:off x="585216" y="6190488"/>
-            <a:ext cx="50292" cy="182880"/>
-          </a:xfrm>
-          <a:prstGeom prst="roundRect">
-            <a:avLst/>
-          </a:prstGeom>
-          <a:solidFill>
-            <a:srgbClr val="475569"/>
-          </a:solidFill>
-          <a:ln>
-            <a:noFill/>
-          </a:ln>
-          <a:effectLst/>
-        </p:spPr>
-        <p:style>
-          <a:lnRef idx="1">
-            <a:schemeClr val="accent1"/>
-          </a:lnRef>
-          <a:fillRef idx="3">
-            <a:schemeClr val="accent1"/>
-          </a:fillRef>
-          <a:effectRef idx="2">
-            <a:schemeClr val="accent1"/>
-          </a:effectRef>
-          <a:fontRef idx="minor">
-            <a:schemeClr val="lt1"/>
-          </a:fontRef>
-        </p:style>
-        <p:txBody>
-          <a:bodyPr rtlCol="0" anchor="ctr"/>
-          <a:lstStyle/>
-          <a:p>
-            <a:pPr algn="ctr"/>
-          </a:p>
-        </p:txBody>
-      </p:sp>
-      <p:sp>
-        <p:nvSpPr>
-          <p:cNvPr id="13" name="TextBox 12"/>
-          <p:cNvSpPr txBox="1"/>
-          <p:nvPr/>
-        </p:nvSpPr>
-        <p:spPr>
-          <a:xfrm>
-            <a:off x="786384" y="6135624"/>
-            <a:ext cx="3063239" cy="365760"/>
-          </a:xfrm>
-          <a:prstGeom prst="rect">
-            <a:avLst/>
-          </a:prstGeom>
-          <a:noFill/>
-        </p:spPr>
-        <p:txBody>
-          <a:bodyPr wrap="square">
-            <a:spAutoFit/>
-          </a:bodyPr>
-          <a:lstStyle/>
-          <a:p>
-            <a:r>
-              <a:rPr sz="1350" b="1">
-                <a:solidFill>
-                  <a:srgbClr val="1F2937"/>
-                </a:solidFill>
-                <a:latin typeface="Helvetica"/>
-              </a:rPr>
-              <a:t>Meridian's clause 4.2 already forbids exactly this: where two stressors share a physical cause, the model shall not treat them as independent.</a:t>
-            </a:r>
-          </a:p>
-        </p:txBody>
-      </p:sp>
-      <p:sp>
-        <p:nvSpPr>
-          <p:cNvPr id="14" name="TextBox 13"/>
-          <p:cNvSpPr txBox="1"/>
-          <p:nvPr/>
-        </p:nvSpPr>
-        <p:spPr>
-          <a:xfrm>
-            <a:off x="585216" y="6263640"/>
-            <a:ext cx="7315200" cy="274320"/>
-          </a:xfrm>
-          <a:prstGeom prst="rect">
-            <a:avLst/>
-          </a:prstGeom>
-          <a:noFill/>
-        </p:spPr>
-        <p:txBody>
-          <a:bodyPr wrap="square">
-            <a:spAutoFit/>
-          </a:bodyPr>
-          <a:lstStyle/>
-          <a:p>
-            <a:r>
-              <a:rPr sz="900" b="0">
-                <a:solidFill>
-                  <a:srgbClr val="64748B"/>
-                </a:solidFill>
-                <a:latin typeface="Helvetica"/>
-              </a:rPr>
-              <a:t>Three quarters of one instrument, not four models that would be nice to connect.</a:t>
-            </a:r>
-          </a:p>
-        </p:txBody>
-      </p:sp>
       <p:pic>
         <p:nvPicPr>
-          <p:cNvPr id="15" name="Picture 14" descr="independence.png"/>
+          <p:cNvPr id="2" name="Picture 1" descr="02.png"/>
           <p:cNvPicPr>
             <a:picLocks noChangeAspect="1"/>
           </p:cNvPicPr>
@@ -5557,8 +4114,8 @@
         </p:blipFill>
         <p:spPr>
           <a:xfrm>
-            <a:off x="4169663" y="1344168"/>
-            <a:ext cx="7436815" cy="3301166"/>
+            <a:off x="0" y="0"/>
+            <a:ext cx="12191695" cy="6858000"/>
           </a:xfrm>
           <a:prstGeom prst="rect">
             <a:avLst/>
@@ -5583,579 +4140,9 @@
         <p:nvPr/>
       </p:nvGrpSpPr>
       <p:grpSpPr/>
-      <p:sp>
-        <p:nvSpPr>
-          <p:cNvPr id="2" name="TextBox 1"/>
-          <p:cNvSpPr txBox="1"/>
-          <p:nvPr/>
-        </p:nvSpPr>
-        <p:spPr>
-          <a:xfrm>
-            <a:off x="585216" y="475488"/>
-            <a:ext cx="10789920" cy="640080"/>
-          </a:xfrm>
-          <a:prstGeom prst="rect">
-            <a:avLst/>
-          </a:prstGeom>
-          <a:noFill/>
-        </p:spPr>
-        <p:txBody>
-          <a:bodyPr wrap="square">
-            <a:spAutoFit/>
-          </a:bodyPr>
-          <a:lstStyle/>
-          <a:p>
-            <a:r>
-              <a:rPr sz="3000" b="1">
-                <a:solidFill>
-                  <a:srgbClr val="1F2937"/>
-                </a:solidFill>
-                <a:latin typeface="Helvetica"/>
-              </a:rPr>
-              <a:t>Six weeks, and never nothing to show</a:t>
-            </a:r>
-          </a:p>
-        </p:txBody>
-      </p:sp>
-      <p:sp>
-        <p:nvSpPr>
-          <p:cNvPr id="3" name="TextBox 2"/>
-          <p:cNvSpPr txBox="1"/>
-          <p:nvPr/>
-        </p:nvSpPr>
-        <p:spPr>
-          <a:xfrm>
-            <a:off x="585216" y="960120"/>
-            <a:ext cx="10424160" cy="731520"/>
-          </a:xfrm>
-          <a:prstGeom prst="rect">
-            <a:avLst/>
-          </a:prstGeom>
-          <a:noFill/>
-        </p:spPr>
-        <p:txBody>
-          <a:bodyPr wrap="square">
-            <a:spAutoFit/>
-          </a:bodyPr>
-          <a:lstStyle/>
-          <a:p>
-            <a:r>
-              <a:rPr sz="1700" b="0">
-                <a:solidFill>
-                  <a:srgbClr val="475569"/>
-                </a:solidFill>
-                <a:latin typeface="Helvetica"/>
-              </a:rPr>
-              <a:t>From week 2 the demonstration runs. Every week after improves it rather than building toward a first one.</a:t>
-            </a:r>
-          </a:p>
-        </p:txBody>
-      </p:sp>
-      <p:sp>
-        <p:nvSpPr>
-          <p:cNvPr id="4" name="Rounded Rectangle 3"/>
-          <p:cNvSpPr/>
-          <p:nvPr/>
-        </p:nvSpPr>
-        <p:spPr>
-          <a:xfrm>
-            <a:off x="585216" y="1399032"/>
-            <a:ext cx="50292" cy="182880"/>
-          </a:xfrm>
-          <a:prstGeom prst="roundRect">
-            <a:avLst/>
-          </a:prstGeom>
-          <a:solidFill>
-            <a:srgbClr val="475569"/>
-          </a:solidFill>
-          <a:ln>
-            <a:noFill/>
-          </a:ln>
-          <a:effectLst/>
-        </p:spPr>
-        <p:style>
-          <a:lnRef idx="1">
-            <a:schemeClr val="accent1"/>
-          </a:lnRef>
-          <a:fillRef idx="3">
-            <a:schemeClr val="accent1"/>
-          </a:fillRef>
-          <a:effectRef idx="2">
-            <a:schemeClr val="accent1"/>
-          </a:effectRef>
-          <a:fontRef idx="minor">
-            <a:schemeClr val="lt1"/>
-          </a:fontRef>
-        </p:style>
-        <p:txBody>
-          <a:bodyPr rtlCol="0" anchor="ctr"/>
-          <a:lstStyle/>
-          <a:p>
-            <a:pPr algn="ctr"/>
-          </a:p>
-        </p:txBody>
-      </p:sp>
-      <p:sp>
-        <p:nvSpPr>
-          <p:cNvPr id="5" name="TextBox 4"/>
-          <p:cNvSpPr txBox="1"/>
-          <p:nvPr/>
-        </p:nvSpPr>
-        <p:spPr>
-          <a:xfrm>
-            <a:off x="786384" y="1344168"/>
-            <a:ext cx="3063239" cy="365760"/>
-          </a:xfrm>
-          <a:prstGeom prst="rect">
-            <a:avLst/>
-          </a:prstGeom>
-          <a:noFill/>
-        </p:spPr>
-        <p:txBody>
-          <a:bodyPr wrap="square">
-            <a:spAutoFit/>
-          </a:bodyPr>
-          <a:lstStyle/>
-          <a:p>
-            <a:r>
-              <a:rPr sz="1350" b="1">
-                <a:solidFill>
-                  <a:srgbClr val="1F2937"/>
-                </a:solidFill>
-                <a:latin typeface="Helvetica"/>
-              </a:rPr>
-              <a:t>**Week 2 runs end to end on deliberately crude inputs.** Placeholder numbers, one sol of data, nothing polished. Its only job is to make every format, encoding and calendar mismatch fail while there is time to fix them.</a:t>
-            </a:r>
-          </a:p>
-        </p:txBody>
-      </p:sp>
-      <p:sp>
-        <p:nvSpPr>
-          <p:cNvPr id="6" name="Rounded Rectangle 5"/>
-          <p:cNvSpPr/>
-          <p:nvPr/>
-        </p:nvSpPr>
-        <p:spPr>
-          <a:xfrm>
-            <a:off x="585216" y="2642616"/>
-            <a:ext cx="50292" cy="182880"/>
-          </a:xfrm>
-          <a:prstGeom prst="roundRect">
-            <a:avLst/>
-          </a:prstGeom>
-          <a:solidFill>
-            <a:srgbClr val="475569"/>
-          </a:solidFill>
-          <a:ln>
-            <a:noFill/>
-          </a:ln>
-          <a:effectLst/>
-        </p:spPr>
-        <p:style>
-          <a:lnRef idx="1">
-            <a:schemeClr val="accent1"/>
-          </a:lnRef>
-          <a:fillRef idx="3">
-            <a:schemeClr val="accent1"/>
-          </a:fillRef>
-          <a:effectRef idx="2">
-            <a:schemeClr val="accent1"/>
-          </a:effectRef>
-          <a:fontRef idx="minor">
-            <a:schemeClr val="lt1"/>
-          </a:fontRef>
-        </p:style>
-        <p:txBody>
-          <a:bodyPr rtlCol="0" anchor="ctr"/>
-          <a:lstStyle/>
-          <a:p>
-            <a:pPr algn="ctr"/>
-          </a:p>
-        </p:txBody>
-      </p:sp>
-      <p:sp>
-        <p:nvSpPr>
-          <p:cNvPr id="7" name="TextBox 6"/>
-          <p:cNvSpPr txBox="1"/>
-          <p:nvPr/>
-        </p:nvSpPr>
-        <p:spPr>
-          <a:xfrm>
-            <a:off x="786384" y="2587752"/>
-            <a:ext cx="3063239" cy="365760"/>
-          </a:xfrm>
-          <a:prstGeom prst="rect">
-            <a:avLst/>
-          </a:prstGeom>
-          <a:noFill/>
-        </p:spPr>
-        <p:txBody>
-          <a:bodyPr wrap="square">
-            <a:spAutoFit/>
-          </a:bodyPr>
-          <a:lstStyle/>
-          <a:p>
-            <a:r>
-              <a:rPr sz="1350" b="1">
-                <a:solidFill>
-                  <a:srgbClr val="1F2937"/>
-                </a:solidFill>
-                <a:latin typeface="Helvetica"/>
-              </a:rPr>
-              <a:t>The consortium is at month 8 and has never run end to end. An exchange arriving late and in an unexpected format is what that produces.</a:t>
-            </a:r>
-          </a:p>
-        </p:txBody>
-      </p:sp>
-      <p:sp>
-        <p:nvSpPr>
-          <p:cNvPr id="8" name="Rounded Rectangle 7"/>
-          <p:cNvSpPr/>
-          <p:nvPr/>
-        </p:nvSpPr>
-        <p:spPr>
-          <a:xfrm>
-            <a:off x="585216" y="3703320"/>
-            <a:ext cx="50292" cy="182880"/>
-          </a:xfrm>
-          <a:prstGeom prst="roundRect">
-            <a:avLst/>
-          </a:prstGeom>
-          <a:solidFill>
-            <a:srgbClr val="475569"/>
-          </a:solidFill>
-          <a:ln>
-            <a:noFill/>
-          </a:ln>
-          <a:effectLst/>
-        </p:spPr>
-        <p:style>
-          <a:lnRef idx="1">
-            <a:schemeClr val="accent1"/>
-          </a:lnRef>
-          <a:fillRef idx="3">
-            <a:schemeClr val="accent1"/>
-          </a:fillRef>
-          <a:effectRef idx="2">
-            <a:schemeClr val="accent1"/>
-          </a:effectRef>
-          <a:fontRef idx="minor">
-            <a:schemeClr val="lt1"/>
-          </a:fontRef>
-        </p:style>
-        <p:txBody>
-          <a:bodyPr rtlCol="0" anchor="ctr"/>
-          <a:lstStyle/>
-          <a:p>
-            <a:pPr algn="ctr"/>
-          </a:p>
-        </p:txBody>
-      </p:sp>
-      <p:sp>
-        <p:nvSpPr>
-          <p:cNvPr id="9" name="TextBox 8"/>
-          <p:cNvSpPr txBox="1"/>
-          <p:nvPr/>
-        </p:nvSpPr>
-        <p:spPr>
-          <a:xfrm>
-            <a:off x="786384" y="3648456"/>
-            <a:ext cx="3063239" cy="365760"/>
-          </a:xfrm>
-          <a:prstGeom prst="rect">
-            <a:avLst/>
-          </a:prstGeom>
-          <a:noFill/>
-        </p:spPr>
-        <p:txBody>
-          <a:bodyPr wrap="square">
-            <a:spAutoFit/>
-          </a:bodyPr>
-          <a:lstStyle/>
-          <a:p>
-            <a:r>
-              <a:rPr sz="1350" b="1">
-                <a:solidFill>
-                  <a:srgbClr val="1F2937"/>
-                </a:solidFill>
-                <a:latin typeface="Helvetica"/>
-              </a:rPr>
-              <a:t>**Each week's output is a superset of the last.** The worst case in week 6 is showing week 5's version.</a:t>
-            </a:r>
-          </a:p>
-        </p:txBody>
-      </p:sp>
-      <p:sp>
-        <p:nvSpPr>
-          <p:cNvPr id="10" name="Rounded Rectangle 9"/>
-          <p:cNvSpPr/>
-          <p:nvPr/>
-        </p:nvSpPr>
-        <p:spPr>
-          <a:xfrm>
-            <a:off x="585216" y="4581144"/>
-            <a:ext cx="50292" cy="182880"/>
-          </a:xfrm>
-          <a:prstGeom prst="roundRect">
-            <a:avLst/>
-          </a:prstGeom>
-          <a:solidFill>
-            <a:srgbClr val="475569"/>
-          </a:solidFill>
-          <a:ln>
-            <a:noFill/>
-          </a:ln>
-          <a:effectLst/>
-        </p:spPr>
-        <p:style>
-          <a:lnRef idx="1">
-            <a:schemeClr val="accent1"/>
-          </a:lnRef>
-          <a:fillRef idx="3">
-            <a:schemeClr val="accent1"/>
-          </a:fillRef>
-          <a:effectRef idx="2">
-            <a:schemeClr val="accent1"/>
-          </a:effectRef>
-          <a:fontRef idx="minor">
-            <a:schemeClr val="lt1"/>
-          </a:fontRef>
-        </p:style>
-        <p:txBody>
-          <a:bodyPr rtlCol="0" anchor="ctr"/>
-          <a:lstStyle/>
-          <a:p>
-            <a:pPr algn="ctr"/>
-          </a:p>
-        </p:txBody>
-      </p:sp>
-      <p:sp>
-        <p:nvSpPr>
-          <p:cNvPr id="11" name="TextBox 10"/>
-          <p:cNvSpPr txBox="1"/>
-          <p:nvPr/>
-        </p:nvSpPr>
-        <p:spPr>
-          <a:xfrm>
-            <a:off x="786384" y="4526280"/>
-            <a:ext cx="3063239" cy="365760"/>
-          </a:xfrm>
-          <a:prstGeom prst="rect">
-            <a:avLst/>
-          </a:prstGeom>
-          <a:noFill/>
-        </p:spPr>
-        <p:txBody>
-          <a:bodyPr wrap="square">
-            <a:spAutoFit/>
-          </a:bodyPr>
-          <a:lstStyle/>
-          <a:p>
-            <a:r>
-              <a:rPr sz="1350" b="1">
-                <a:solidFill>
-                  <a:srgbClr val="1F2937"/>
-                </a:solidFill>
-                <a:latin typeface="Helvetica"/>
-              </a:rPr>
-              <a:t>**Week 5 is buffer**, and nothing is scheduled into it that cannot move out. A plan with no slack assumes nothing goes wrong.</a:t>
-            </a:r>
-          </a:p>
-        </p:txBody>
-      </p:sp>
-      <p:sp>
-        <p:nvSpPr>
-          <p:cNvPr id="12" name="Rounded Rectangle 11"/>
-          <p:cNvSpPr/>
-          <p:nvPr/>
-        </p:nvSpPr>
-        <p:spPr>
-          <a:xfrm>
-            <a:off x="585216" y="5458968"/>
-            <a:ext cx="50292" cy="182880"/>
-          </a:xfrm>
-          <a:prstGeom prst="roundRect">
-            <a:avLst/>
-          </a:prstGeom>
-          <a:solidFill>
-            <a:srgbClr val="475569"/>
-          </a:solidFill>
-          <a:ln>
-            <a:noFill/>
-          </a:ln>
-          <a:effectLst/>
-        </p:spPr>
-        <p:style>
-          <a:lnRef idx="1">
-            <a:schemeClr val="accent1"/>
-          </a:lnRef>
-          <a:fillRef idx="3">
-            <a:schemeClr val="accent1"/>
-          </a:fillRef>
-          <a:effectRef idx="2">
-            <a:schemeClr val="accent1"/>
-          </a:effectRef>
-          <a:fontRef idx="minor">
-            <a:schemeClr val="lt1"/>
-          </a:fontRef>
-        </p:style>
-        <p:txBody>
-          <a:bodyPr rtlCol="0" anchor="ctr"/>
-          <a:lstStyle/>
-          <a:p>
-            <a:pPr algn="ctr"/>
-          </a:p>
-        </p:txBody>
-      </p:sp>
-      <p:sp>
-        <p:nvSpPr>
-          <p:cNvPr id="13" name="TextBox 12"/>
-          <p:cNvSpPr txBox="1"/>
-          <p:nvPr/>
-        </p:nvSpPr>
-        <p:spPr>
-          <a:xfrm>
-            <a:off x="786384" y="5404104"/>
-            <a:ext cx="3063239" cy="365760"/>
-          </a:xfrm>
-          <a:prstGeom prst="rect">
-            <a:avLst/>
-          </a:prstGeom>
-          <a:noFill/>
-        </p:spPr>
-        <p:txBody>
-          <a:bodyPr wrap="square">
-            <a:spAutoFit/>
-          </a:bodyPr>
-          <a:lstStyle/>
-          <a:p>
-            <a:r>
-              <a:rPr sz="1350" b="1">
-                <a:solidFill>
-                  <a:srgbClr val="1F2937"/>
-                </a:solidFill>
-                <a:latin typeface="Helvetica"/>
-              </a:rPr>
-              <a:t>No week in this plan answers the question 'what can you show us' with nothing, because that answer ends the programme.</a:t>
-            </a:r>
-          </a:p>
-        </p:txBody>
-      </p:sp>
-      <p:sp>
-        <p:nvSpPr>
-          <p:cNvPr id="14" name="Rounded Rectangle 13"/>
-          <p:cNvSpPr/>
-          <p:nvPr/>
-        </p:nvSpPr>
-        <p:spPr>
-          <a:xfrm>
-            <a:off x="585216" y="6336792"/>
-            <a:ext cx="50292" cy="182880"/>
-          </a:xfrm>
-          <a:prstGeom prst="roundRect">
-            <a:avLst/>
-          </a:prstGeom>
-          <a:solidFill>
-            <a:srgbClr val="475569"/>
-          </a:solidFill>
-          <a:ln>
-            <a:noFill/>
-          </a:ln>
-          <a:effectLst/>
-        </p:spPr>
-        <p:style>
-          <a:lnRef idx="1">
-            <a:schemeClr val="accent1"/>
-          </a:lnRef>
-          <a:fillRef idx="3">
-            <a:schemeClr val="accent1"/>
-          </a:fillRef>
-          <a:effectRef idx="2">
-            <a:schemeClr val="accent1"/>
-          </a:effectRef>
-          <a:fontRef idx="minor">
-            <a:schemeClr val="lt1"/>
-          </a:fontRef>
-        </p:style>
-        <p:txBody>
-          <a:bodyPr rtlCol="0" anchor="ctr"/>
-          <a:lstStyle/>
-          <a:p>
-            <a:pPr algn="ctr"/>
-          </a:p>
-        </p:txBody>
-      </p:sp>
-      <p:sp>
-        <p:nvSpPr>
-          <p:cNvPr id="15" name="TextBox 14"/>
-          <p:cNvSpPr txBox="1"/>
-          <p:nvPr/>
-        </p:nvSpPr>
-        <p:spPr>
-          <a:xfrm>
-            <a:off x="786384" y="6281928"/>
-            <a:ext cx="3063239" cy="365760"/>
-          </a:xfrm>
-          <a:prstGeom prst="rect">
-            <a:avLst/>
-          </a:prstGeom>
-          <a:noFill/>
-        </p:spPr>
-        <p:txBody>
-          <a:bodyPr wrap="square">
-            <a:spAutoFit/>
-          </a:bodyPr>
-          <a:lstStyle/>
-          <a:p>
-            <a:r>
-              <a:rPr sz="1350" b="1">
-                <a:solidFill>
-                  <a:srgbClr val="1F2937"/>
-                </a:solidFill>
-                <a:latin typeface="Helvetica"/>
-              </a:rPr>
-              <a:t>**Week 5 also tests the recommendation.** If Solis's revised configuration comes back within a tolerance set in week 1, the feedback is weak, one pass suffices, and the coupling argument is wrong. Stated in advance so it can fail.</a:t>
-            </a:r>
-          </a:p>
-        </p:txBody>
-      </p:sp>
-      <p:sp>
-        <p:nvSpPr>
-          <p:cNvPr id="16" name="TextBox 15"/>
-          <p:cNvSpPr txBox="1"/>
-          <p:nvPr/>
-        </p:nvSpPr>
-        <p:spPr>
-          <a:xfrm>
-            <a:off x="585216" y="6263640"/>
-            <a:ext cx="7315200" cy="274320"/>
-          </a:xfrm>
-          <a:prstGeom prst="rect">
-            <a:avLst/>
-          </a:prstGeom>
-          <a:noFill/>
-        </p:spPr>
-        <p:txBody>
-          <a:bodyPr wrap="square">
-            <a:spAutoFit/>
-          </a:bodyPr>
-          <a:lstStyle/>
-          <a:p>
-            <a:r>
-              <a:rPr sz="900" b="0">
-                <a:solidFill>
-                  <a:srgbClr val="64748B"/>
-                </a:solidFill>
-                <a:latin typeface="Helvetica"/>
-              </a:rPr>
-              <a:t>No big-bang week, no first attempt in front of the funder, and a headline claim the demonstration can overturn.</a:t>
-            </a:r>
-          </a:p>
-        </p:txBody>
-      </p:sp>
       <p:pic>
         <p:nvPicPr>
-          <p:cNvPr id="17" name="Picture 16" descr="ratchet.png"/>
+          <p:cNvPr id="2" name="Picture 1" descr="03.png"/>
           <p:cNvPicPr>
             <a:picLocks noChangeAspect="1"/>
           </p:cNvPicPr>
@@ -6169,8 +4156,8 @@
         </p:blipFill>
         <p:spPr>
           <a:xfrm>
-            <a:off x="4169663" y="1344168"/>
-            <a:ext cx="7436815" cy="3445873"/>
+            <a:off x="0" y="0"/>
+            <a:ext cx="12191695" cy="6858000"/>
           </a:xfrm>
           <a:prstGeom prst="rect">
             <a:avLst/>
@@ -6195,501 +4182,9 @@
         <p:nvPr/>
       </p:nvGrpSpPr>
       <p:grpSpPr/>
-      <p:sp>
-        <p:nvSpPr>
-          <p:cNvPr id="2" name="TextBox 1"/>
-          <p:cNvSpPr txBox="1"/>
-          <p:nvPr/>
-        </p:nvSpPr>
-        <p:spPr>
-          <a:xfrm>
-            <a:off x="585216" y="475488"/>
-            <a:ext cx="10789920" cy="640080"/>
-          </a:xfrm>
-          <a:prstGeom prst="rect">
-            <a:avLst/>
-          </a:prstGeom>
-          <a:noFill/>
-        </p:spPr>
-        <p:txBody>
-          <a:bodyPr wrap="square">
-            <a:spAutoFit/>
-          </a:bodyPr>
-          <a:lstStyle/>
-          <a:p>
-            <a:r>
-              <a:rPr sz="3000" b="1">
-                <a:solidFill>
-                  <a:srgbClr val="1F2937"/>
-                </a:solidFill>
-                <a:latin typeface="Helvetica"/>
-              </a:rPr>
-              <a:t>The six weeks</a:t>
-            </a:r>
-          </a:p>
-        </p:txBody>
-      </p:sp>
-      <p:sp>
-        <p:nvSpPr>
-          <p:cNvPr id="3" name="TextBox 2"/>
-          <p:cNvSpPr txBox="1"/>
-          <p:nvPr/>
-        </p:nvSpPr>
-        <p:spPr>
-          <a:xfrm>
-            <a:off x="585216" y="960120"/>
-            <a:ext cx="10424160" cy="731520"/>
-          </a:xfrm>
-          <a:prstGeom prst="rect">
-            <a:avLst/>
-          </a:prstGeom>
-          <a:noFill/>
-        </p:spPr>
-        <p:txBody>
-          <a:bodyPr wrap="square">
-            <a:spAutoFit/>
-          </a:bodyPr>
-          <a:lstStyle/>
-          <a:p>
-            <a:r>
-              <a:rPr sz="1700" b="0">
-                <a:solidFill>
-                  <a:srgbClr val="475569"/>
-                </a:solidFill>
-                <a:latin typeface="Helvetica"/>
-              </a:rPr>
-              <a:t>Two tracks in parallel, one end-to-end run in week 2, one week of slack, four days of rehearsal.</a:t>
-            </a:r>
-          </a:p>
-        </p:txBody>
-      </p:sp>
-      <p:sp>
-        <p:nvSpPr>
-          <p:cNvPr id="4" name="Rounded Rectangle 3"/>
-          <p:cNvSpPr/>
-          <p:nvPr/>
-        </p:nvSpPr>
-        <p:spPr>
-          <a:xfrm>
-            <a:off x="585216" y="1399032"/>
-            <a:ext cx="50292" cy="182880"/>
-          </a:xfrm>
-          <a:prstGeom prst="roundRect">
-            <a:avLst/>
-          </a:prstGeom>
-          <a:solidFill>
-            <a:srgbClr val="475569"/>
-          </a:solidFill>
-          <a:ln>
-            <a:noFill/>
-          </a:ln>
-          <a:effectLst/>
-        </p:spPr>
-        <p:style>
-          <a:lnRef idx="1">
-            <a:schemeClr val="accent1"/>
-          </a:lnRef>
-          <a:fillRef idx="3">
-            <a:schemeClr val="accent1"/>
-          </a:fillRef>
-          <a:effectRef idx="2">
-            <a:schemeClr val="accent1"/>
-          </a:effectRef>
-          <a:fontRef idx="minor">
-            <a:schemeClr val="lt1"/>
-          </a:fontRef>
-        </p:style>
-        <p:txBody>
-          <a:bodyPr rtlCol="0" anchor="ctr"/>
-          <a:lstStyle/>
-          <a:p>
-            <a:pPr algn="ctr"/>
-          </a:p>
-        </p:txBody>
-      </p:sp>
-      <p:sp>
-        <p:nvSpPr>
-          <p:cNvPr id="5" name="TextBox 4"/>
-          <p:cNvSpPr txBox="1"/>
-          <p:nvPr/>
-        </p:nvSpPr>
-        <p:spPr>
-          <a:xfrm>
-            <a:off x="786384" y="1344168"/>
-            <a:ext cx="3063239" cy="365760"/>
-          </a:xfrm>
-          <a:prstGeom prst="rect">
-            <a:avLst/>
-          </a:prstGeom>
-          <a:noFill/>
-        </p:spPr>
-        <p:txBody>
-          <a:bodyPr wrap="square">
-            <a:spAutoFit/>
-          </a:bodyPr>
-          <a:lstStyle/>
-          <a:p>
-            <a:r>
-              <a:rPr sz="1350" b="1">
-                <a:solidFill>
-                  <a:srgbClr val="1F2937"/>
-                </a:solidFill>
-                <a:latin typeface="Helvetica"/>
-              </a:rPr>
-              <a:t>**Track A** is the critical path. The exchange that already failed.</a:t>
-            </a:r>
-          </a:p>
-        </p:txBody>
-      </p:sp>
-      <p:sp>
-        <p:nvSpPr>
-          <p:cNvPr id="6" name="Rounded Rectangle 5"/>
-          <p:cNvSpPr/>
-          <p:nvPr/>
-        </p:nvSpPr>
-        <p:spPr>
-          <a:xfrm>
-            <a:off x="585216" y="2093976"/>
-            <a:ext cx="50292" cy="182880"/>
-          </a:xfrm>
-          <a:prstGeom prst="roundRect">
-            <a:avLst/>
-          </a:prstGeom>
-          <a:solidFill>
-            <a:srgbClr val="475569"/>
-          </a:solidFill>
-          <a:ln>
-            <a:noFill/>
-          </a:ln>
-          <a:effectLst/>
-        </p:spPr>
-        <p:style>
-          <a:lnRef idx="1">
-            <a:schemeClr val="accent1"/>
-          </a:lnRef>
-          <a:fillRef idx="3">
-            <a:schemeClr val="accent1"/>
-          </a:fillRef>
-          <a:effectRef idx="2">
-            <a:schemeClr val="accent1"/>
-          </a:effectRef>
-          <a:fontRef idx="minor">
-            <a:schemeClr val="lt1"/>
-          </a:fontRef>
-        </p:style>
-        <p:txBody>
-          <a:bodyPr rtlCol="0" anchor="ctr"/>
-          <a:lstStyle/>
-          <a:p>
-            <a:pPr algn="ctr"/>
-          </a:p>
-        </p:txBody>
-      </p:sp>
-      <p:sp>
-        <p:nvSpPr>
-          <p:cNvPr id="7" name="TextBox 6"/>
-          <p:cNvSpPr txBox="1"/>
-          <p:nvPr/>
-        </p:nvSpPr>
-        <p:spPr>
-          <a:xfrm>
-            <a:off x="786384" y="2039112"/>
-            <a:ext cx="3063239" cy="365760"/>
-          </a:xfrm>
-          <a:prstGeom prst="rect">
-            <a:avLst/>
-          </a:prstGeom>
-          <a:noFill/>
-        </p:spPr>
-        <p:txBody>
-          <a:bodyPr wrap="square">
-            <a:spAutoFit/>
-          </a:bodyPr>
-          <a:lstStyle/>
-          <a:p>
-            <a:r>
-              <a:rPr sz="1350" b="1">
-                <a:solidFill>
-                  <a:srgbClr val="1F2937"/>
-                </a:solidFill>
-                <a:latin typeface="Helvetica"/>
-              </a:rPr>
-              <a:t>**Track B** runs alongside, because what Meridian requires changes what track A must carry.</a:t>
-            </a:r>
-          </a:p>
-        </p:txBody>
-      </p:sp>
-      <p:sp>
-        <p:nvSpPr>
-          <p:cNvPr id="8" name="Rounded Rectangle 7"/>
-          <p:cNvSpPr/>
-          <p:nvPr/>
-        </p:nvSpPr>
-        <p:spPr>
-          <a:xfrm>
-            <a:off x="585216" y="2971799"/>
-            <a:ext cx="50292" cy="182880"/>
-          </a:xfrm>
-          <a:prstGeom prst="roundRect">
-            <a:avLst/>
-          </a:prstGeom>
-          <a:solidFill>
-            <a:srgbClr val="475569"/>
-          </a:solidFill>
-          <a:ln>
-            <a:noFill/>
-          </a:ln>
-          <a:effectLst/>
-        </p:spPr>
-        <p:style>
-          <a:lnRef idx="1">
-            <a:schemeClr val="accent1"/>
-          </a:lnRef>
-          <a:fillRef idx="3">
-            <a:schemeClr val="accent1"/>
-          </a:fillRef>
-          <a:effectRef idx="2">
-            <a:schemeClr val="accent1"/>
-          </a:effectRef>
-          <a:fontRef idx="minor">
-            <a:schemeClr val="lt1"/>
-          </a:fontRef>
-        </p:style>
-        <p:txBody>
-          <a:bodyPr rtlCol="0" anchor="ctr"/>
-          <a:lstStyle/>
-          <a:p>
-            <a:pPr algn="ctr"/>
-          </a:p>
-        </p:txBody>
-      </p:sp>
-      <p:sp>
-        <p:nvSpPr>
-          <p:cNvPr id="9" name="TextBox 8"/>
-          <p:cNvSpPr txBox="1"/>
-          <p:nvPr/>
-        </p:nvSpPr>
-        <p:spPr>
-          <a:xfrm>
-            <a:off x="786384" y="2916935"/>
-            <a:ext cx="3063239" cy="365760"/>
-          </a:xfrm>
-          <a:prstGeom prst="rect">
-            <a:avLst/>
-          </a:prstGeom>
-          <a:noFill/>
-        </p:spPr>
-        <p:txBody>
-          <a:bodyPr wrap="square">
-            <a:spAutoFit/>
-          </a:bodyPr>
-          <a:lstStyle/>
-          <a:p>
-            <a:r>
-              <a:rPr sz="1350" b="1">
-                <a:solidFill>
-                  <a:srgbClr val="1F2937"/>
-                </a:solidFill>
-                <a:latin typeface="Helvetica"/>
-              </a:rPr>
-              <a:t>**Week 2** runs end to end on crude inputs, so integration fails early.</a:t>
-            </a:r>
-          </a:p>
-        </p:txBody>
-      </p:sp>
-      <p:sp>
-        <p:nvSpPr>
-          <p:cNvPr id="10" name="Rounded Rectangle 9"/>
-          <p:cNvSpPr/>
-          <p:nvPr/>
-        </p:nvSpPr>
-        <p:spPr>
-          <a:xfrm>
-            <a:off x="585216" y="3666743"/>
-            <a:ext cx="50292" cy="182880"/>
-          </a:xfrm>
-          <a:prstGeom prst="roundRect">
-            <a:avLst/>
-          </a:prstGeom>
-          <a:solidFill>
-            <a:srgbClr val="475569"/>
-          </a:solidFill>
-          <a:ln>
-            <a:noFill/>
-          </a:ln>
-          <a:effectLst/>
-        </p:spPr>
-        <p:style>
-          <a:lnRef idx="1">
-            <a:schemeClr val="accent1"/>
-          </a:lnRef>
-          <a:fillRef idx="3">
-            <a:schemeClr val="accent1"/>
-          </a:fillRef>
-          <a:effectRef idx="2">
-            <a:schemeClr val="accent1"/>
-          </a:effectRef>
-          <a:fontRef idx="minor">
-            <a:schemeClr val="lt1"/>
-          </a:fontRef>
-        </p:style>
-        <p:txBody>
-          <a:bodyPr rtlCol="0" anchor="ctr"/>
-          <a:lstStyle/>
-          <a:p>
-            <a:pPr algn="ctr"/>
-          </a:p>
-        </p:txBody>
-      </p:sp>
-      <p:sp>
-        <p:nvSpPr>
-          <p:cNvPr id="11" name="TextBox 10"/>
-          <p:cNvSpPr txBox="1"/>
-          <p:nvPr/>
-        </p:nvSpPr>
-        <p:spPr>
-          <a:xfrm>
-            <a:off x="786384" y="3611879"/>
-            <a:ext cx="3063239" cy="365760"/>
-          </a:xfrm>
-          <a:prstGeom prst="rect">
-            <a:avLst/>
-          </a:prstGeom>
-          <a:noFill/>
-        </p:spPr>
-        <p:txBody>
-          <a:bodyPr wrap="square">
-            <a:spAutoFit/>
-          </a:bodyPr>
-          <a:lstStyle/>
-          <a:p>
-            <a:r>
-              <a:rPr sz="1350" b="1">
-                <a:solidFill>
-                  <a:srgbClr val="1F2937"/>
-                </a:solidFill>
-                <a:latin typeface="Helvetica"/>
-              </a:rPr>
-              <a:t>**Week 5** is buffer and nothing is scheduled into it that cannot move out.</a:t>
-            </a:r>
-          </a:p>
-        </p:txBody>
-      </p:sp>
-      <p:sp>
-        <p:nvSpPr>
-          <p:cNvPr id="12" name="Rounded Rectangle 11"/>
-          <p:cNvSpPr/>
-          <p:nvPr/>
-        </p:nvSpPr>
-        <p:spPr>
-          <a:xfrm>
-            <a:off x="585216" y="4361687"/>
-            <a:ext cx="50292" cy="182880"/>
-          </a:xfrm>
-          <a:prstGeom prst="roundRect">
-            <a:avLst/>
-          </a:prstGeom>
-          <a:solidFill>
-            <a:srgbClr val="475569"/>
-          </a:solidFill>
-          <a:ln>
-            <a:noFill/>
-          </a:ln>
-          <a:effectLst/>
-        </p:spPr>
-        <p:style>
-          <a:lnRef idx="1">
-            <a:schemeClr val="accent1"/>
-          </a:lnRef>
-          <a:fillRef idx="3">
-            <a:schemeClr val="accent1"/>
-          </a:fillRef>
-          <a:effectRef idx="2">
-            <a:schemeClr val="accent1"/>
-          </a:effectRef>
-          <a:fontRef idx="minor">
-            <a:schemeClr val="lt1"/>
-          </a:fontRef>
-        </p:style>
-        <p:txBody>
-          <a:bodyPr rtlCol="0" anchor="ctr"/>
-          <a:lstStyle/>
-          <a:p>
-            <a:pPr algn="ctr"/>
-          </a:p>
-        </p:txBody>
-      </p:sp>
-      <p:sp>
-        <p:nvSpPr>
-          <p:cNvPr id="13" name="TextBox 12"/>
-          <p:cNvSpPr txBox="1"/>
-          <p:nvPr/>
-        </p:nvSpPr>
-        <p:spPr>
-          <a:xfrm>
-            <a:off x="786384" y="4306823"/>
-            <a:ext cx="3063239" cy="365760"/>
-          </a:xfrm>
-          <a:prstGeom prst="rect">
-            <a:avLst/>
-          </a:prstGeom>
-          <a:noFill/>
-        </p:spPr>
-        <p:txBody>
-          <a:bodyPr wrap="square">
-            <a:spAutoFit/>
-          </a:bodyPr>
-          <a:lstStyle/>
-          <a:p>
-            <a:r>
-              <a:rPr sz="1350" b="1">
-                <a:solidFill>
-                  <a:srgbClr val="1F2937"/>
-                </a:solidFill>
-                <a:latin typeface="Helvetica"/>
-              </a:rPr>
-              <a:t>Review points end weeks 1, 2, 3 and 5. Every action closes a named gap.</a:t>
-            </a:r>
-          </a:p>
-        </p:txBody>
-      </p:sp>
-      <p:sp>
-        <p:nvSpPr>
-          <p:cNvPr id="14" name="TextBox 13"/>
-          <p:cNvSpPr txBox="1"/>
-          <p:nvPr/>
-        </p:nvSpPr>
-        <p:spPr>
-          <a:xfrm>
-            <a:off x="585216" y="6263640"/>
-            <a:ext cx="7315200" cy="274320"/>
-          </a:xfrm>
-          <a:prstGeom prst="rect">
-            <a:avLst/>
-          </a:prstGeom>
-          <a:noFill/>
-        </p:spPr>
-        <p:txBody>
-          <a:bodyPr wrap="square">
-            <a:spAutoFit/>
-          </a:bodyPr>
-          <a:lstStyle/>
-          <a:p>
-            <a:r>
-              <a:rPr sz="900" b="0">
-                <a:solidFill>
-                  <a:srgbClr val="64748B"/>
-                </a:solidFill>
-                <a:latin typeface="Helvetica"/>
-              </a:rPr>
-              <a:t>The traceability pass is the deliverable, not the run.</a:t>
-            </a:r>
-          </a:p>
-        </p:txBody>
-      </p:sp>
       <p:pic>
         <p:nvPicPr>
-          <p:cNvPr id="15" name="Picture 14" descr="calendar.png"/>
+          <p:cNvPr id="2" name="Picture 1" descr="04.png"/>
           <p:cNvPicPr>
             <a:picLocks noChangeAspect="1"/>
           </p:cNvPicPr>
@@ -6703,8 +4198,8 @@
         </p:blipFill>
         <p:spPr>
           <a:xfrm>
-            <a:off x="4169663" y="1344168"/>
-            <a:ext cx="7436815" cy="3962871"/>
+            <a:off x="0" y="0"/>
+            <a:ext cx="12191695" cy="6858000"/>
           </a:xfrm>
           <a:prstGeom prst="rect">
             <a:avLst/>
@@ -6729,423 +4224,9 @@
         <p:nvPr/>
       </p:nvGrpSpPr>
       <p:grpSpPr/>
-      <p:sp>
-        <p:nvSpPr>
-          <p:cNvPr id="2" name="TextBox 1"/>
-          <p:cNvSpPr txBox="1"/>
-          <p:nvPr/>
-        </p:nvSpPr>
-        <p:spPr>
-          <a:xfrm>
-            <a:off x="585216" y="475488"/>
-            <a:ext cx="10789920" cy="640080"/>
-          </a:xfrm>
-          <a:prstGeom prst="rect">
-            <a:avLst/>
-          </a:prstGeom>
-          <a:noFill/>
-        </p:spPr>
-        <p:txBody>
-          <a:bodyPr wrap="square">
-            <a:spAutoFit/>
-          </a:bodyPr>
-          <a:lstStyle/>
-          <a:p>
-            <a:r>
-              <a:rPr sz="3000" b="1">
-                <a:solidFill>
-                  <a:srgbClr val="1F2937"/>
-                </a:solidFill>
-                <a:latin typeface="Helvetica"/>
-              </a:rPr>
-              <a:t>Eleven sessions in six weeks</a:t>
-            </a:r>
-          </a:p>
-        </p:txBody>
-      </p:sp>
-      <p:sp>
-        <p:nvSpPr>
-          <p:cNvPr id="3" name="TextBox 2"/>
-          <p:cNvSpPr txBox="1"/>
-          <p:nvPr/>
-        </p:nvSpPr>
-        <p:spPr>
-          <a:xfrm>
-            <a:off x="585216" y="960120"/>
-            <a:ext cx="10424160" cy="731520"/>
-          </a:xfrm>
-          <a:prstGeom prst="rect">
-            <a:avLst/>
-          </a:prstGeom>
-          <a:noFill/>
-        </p:spPr>
-        <p:txBody>
-          <a:bodyPr wrap="square">
-            <a:spAutoFit/>
-          </a:bodyPr>
-          <a:lstStyle/>
-          <a:p>
-            <a:r>
-              <a:rPr sz="1700" b="0">
-                <a:solidFill>
-                  <a:srgbClr val="475569"/>
-                </a:solidFill>
-                <a:latin typeface="Helvetica"/>
-              </a:rPr>
-              <a:t>Being in the room and holding the ruling are different things, and the difference is the governance.</a:t>
-            </a:r>
-          </a:p>
-        </p:txBody>
-      </p:sp>
-      <p:sp>
-        <p:nvSpPr>
-          <p:cNvPr id="4" name="Rounded Rectangle 3"/>
-          <p:cNvSpPr/>
-          <p:nvPr/>
-        </p:nvSpPr>
-        <p:spPr>
-          <a:xfrm>
-            <a:off x="585216" y="1399032"/>
-            <a:ext cx="50292" cy="182880"/>
-          </a:xfrm>
-          <a:prstGeom prst="roundRect">
-            <a:avLst/>
-          </a:prstGeom>
-          <a:solidFill>
-            <a:srgbClr val="475569"/>
-          </a:solidFill>
-          <a:ln>
-            <a:noFill/>
-          </a:ln>
-          <a:effectLst/>
-        </p:spPr>
-        <p:style>
-          <a:lnRef idx="1">
-            <a:schemeClr val="accent1"/>
-          </a:lnRef>
-          <a:fillRef idx="3">
-            <a:schemeClr val="accent1"/>
-          </a:fillRef>
-          <a:effectRef idx="2">
-            <a:schemeClr val="accent1"/>
-          </a:effectRef>
-          <a:fontRef idx="minor">
-            <a:schemeClr val="lt1"/>
-          </a:fontRef>
-        </p:style>
-        <p:txBody>
-          <a:bodyPr rtlCol="0" anchor="ctr"/>
-          <a:lstStyle/>
-          <a:p>
-            <a:pPr algn="ctr"/>
-          </a:p>
-        </p:txBody>
-      </p:sp>
-      <p:sp>
-        <p:nvSpPr>
-          <p:cNvPr id="5" name="TextBox 4"/>
-          <p:cNvSpPr txBox="1"/>
-          <p:nvPr/>
-        </p:nvSpPr>
-        <p:spPr>
-          <a:xfrm>
-            <a:off x="786384" y="1344168"/>
-            <a:ext cx="3063239" cy="365760"/>
-          </a:xfrm>
-          <a:prstGeom prst="rect">
-            <a:avLst/>
-          </a:prstGeom>
-          <a:noFill/>
-        </p:spPr>
-        <p:txBody>
-          <a:bodyPr wrap="square">
-            <a:spAutoFit/>
-          </a:bodyPr>
-          <a:lstStyle/>
-          <a:p>
-            <a:r>
-              <a:rPr sz="1350" b="1">
-                <a:solidFill>
-                  <a:srgbClr val="1F2937"/>
-                </a:solidFill>
-                <a:latin typeface="Helvetica"/>
-              </a:rPr>
-              <a:t>**Weeks 1 and 2 carry five of the eleven**, including the derate session, which needs Solis and Meridian in one room and is the expensive decision in the plan.</a:t>
-            </a:r>
-          </a:p>
-        </p:txBody>
-      </p:sp>
-      <p:sp>
-        <p:nvSpPr>
-          <p:cNvPr id="6" name="Rounded Rectangle 5"/>
-          <p:cNvSpPr/>
-          <p:nvPr/>
-        </p:nvSpPr>
-        <p:spPr>
-          <a:xfrm>
-            <a:off x="585216" y="2459736"/>
-            <a:ext cx="50292" cy="182880"/>
-          </a:xfrm>
-          <a:prstGeom prst="roundRect">
-            <a:avLst/>
-          </a:prstGeom>
-          <a:solidFill>
-            <a:srgbClr val="475569"/>
-          </a:solidFill>
-          <a:ln>
-            <a:noFill/>
-          </a:ln>
-          <a:effectLst/>
-        </p:spPr>
-        <p:style>
-          <a:lnRef idx="1">
-            <a:schemeClr val="accent1"/>
-          </a:lnRef>
-          <a:fillRef idx="3">
-            <a:schemeClr val="accent1"/>
-          </a:fillRef>
-          <a:effectRef idx="2">
-            <a:schemeClr val="accent1"/>
-          </a:effectRef>
-          <a:fontRef idx="minor">
-            <a:schemeClr val="lt1"/>
-          </a:fontRef>
-        </p:style>
-        <p:txBody>
-          <a:bodyPr rtlCol="0" anchor="ctr"/>
-          <a:lstStyle/>
-          <a:p>
-            <a:pPr algn="ctr"/>
-          </a:p>
-        </p:txBody>
-      </p:sp>
-      <p:sp>
-        <p:nvSpPr>
-          <p:cNvPr id="7" name="TextBox 6"/>
-          <p:cNvSpPr txBox="1"/>
-          <p:nvPr/>
-        </p:nvSpPr>
-        <p:spPr>
-          <a:xfrm>
-            <a:off x="786384" y="2404872"/>
-            <a:ext cx="3063239" cy="365760"/>
-          </a:xfrm>
-          <a:prstGeom prst="rect">
-            <a:avLst/>
-          </a:prstGeom>
-          <a:noFill/>
-        </p:spPr>
-        <p:txBody>
-          <a:bodyPr wrap="square">
-            <a:spAutoFit/>
-          </a:bodyPr>
-          <a:lstStyle/>
-          <a:p>
-            <a:r>
-              <a:rPr sz="1350" b="1">
-                <a:solidFill>
-                  <a:srgbClr val="1F2937"/>
-                </a:solidFill>
-                <a:latin typeface="Helvetica"/>
-              </a:rPr>
-              <a:t>**Two to three touchpoints a week** for the coordinator, then a weekly thirty minute standup through week 5.</a:t>
-            </a:r>
-          </a:p>
-        </p:txBody>
-      </p:sp>
-      <p:sp>
-        <p:nvSpPr>
-          <p:cNvPr id="8" name="Rounded Rectangle 7"/>
-          <p:cNvSpPr/>
-          <p:nvPr/>
-        </p:nvSpPr>
-        <p:spPr>
-          <a:xfrm>
-            <a:off x="585216" y="3337560"/>
-            <a:ext cx="50292" cy="182880"/>
-          </a:xfrm>
-          <a:prstGeom prst="roundRect">
-            <a:avLst/>
-          </a:prstGeom>
-          <a:solidFill>
-            <a:srgbClr val="475569"/>
-          </a:solidFill>
-          <a:ln>
-            <a:noFill/>
-          </a:ln>
-          <a:effectLst/>
-        </p:spPr>
-        <p:style>
-          <a:lnRef idx="1">
-            <a:schemeClr val="accent1"/>
-          </a:lnRef>
-          <a:fillRef idx="3">
-            <a:schemeClr val="accent1"/>
-          </a:fillRef>
-          <a:effectRef idx="2">
-            <a:schemeClr val="accent1"/>
-          </a:effectRef>
-          <a:fontRef idx="minor">
-            <a:schemeClr val="lt1"/>
-          </a:fontRef>
-        </p:style>
-        <p:txBody>
-          <a:bodyPr rtlCol="0" anchor="ctr"/>
-          <a:lstStyle/>
-          <a:p>
-            <a:pPr algn="ctr"/>
-          </a:p>
-        </p:txBody>
-      </p:sp>
-      <p:sp>
-        <p:nvSpPr>
-          <p:cNvPr id="9" name="TextBox 8"/>
-          <p:cNvSpPr txBox="1"/>
-          <p:nvPr/>
-        </p:nvSpPr>
-        <p:spPr>
-          <a:xfrm>
-            <a:off x="786384" y="3282696"/>
-            <a:ext cx="3063239" cy="365760"/>
-          </a:xfrm>
-          <a:prstGeom prst="rect">
-            <a:avLst/>
-          </a:prstGeom>
-          <a:noFill/>
-        </p:spPr>
-        <p:txBody>
-          <a:bodyPr wrap="square">
-            <a:spAutoFit/>
-          </a:bodyPr>
-          <a:lstStyle/>
-          <a:p>
-            <a:r>
-              <a:rPr sz="1350" b="1">
-                <a:solidFill>
-                  <a:srgbClr val="1F2937"/>
-                </a:solidFill>
-                <a:latin typeface="Helvetica"/>
-              </a:rPr>
-              <a:t>**Helix is in seven of eleven rooms and holds none of the rulings.** It must be present when the contract it already built against is settled. It cannot hold the decision, because converting between vocabularies confers no standing to rule on meaning.</a:t>
-            </a:r>
-          </a:p>
-        </p:txBody>
-      </p:sp>
-      <p:sp>
-        <p:nvSpPr>
-          <p:cNvPr id="10" name="Rounded Rectangle 9"/>
-          <p:cNvSpPr/>
-          <p:nvPr/>
-        </p:nvSpPr>
-        <p:spPr>
-          <a:xfrm>
-            <a:off x="585216" y="4764023"/>
-            <a:ext cx="50292" cy="182880"/>
-          </a:xfrm>
-          <a:prstGeom prst="roundRect">
-            <a:avLst/>
-          </a:prstGeom>
-          <a:solidFill>
-            <a:srgbClr val="475569"/>
-          </a:solidFill>
-          <a:ln>
-            <a:noFill/>
-          </a:ln>
-          <a:effectLst/>
-        </p:spPr>
-        <p:style>
-          <a:lnRef idx="1">
-            <a:schemeClr val="accent1"/>
-          </a:lnRef>
-          <a:fillRef idx="3">
-            <a:schemeClr val="accent1"/>
-          </a:fillRef>
-          <a:effectRef idx="2">
-            <a:schemeClr val="accent1"/>
-          </a:effectRef>
-          <a:fontRef idx="minor">
-            <a:schemeClr val="lt1"/>
-          </a:fontRef>
-        </p:style>
-        <p:txBody>
-          <a:bodyPr rtlCol="0" anchor="ctr"/>
-          <a:lstStyle/>
-          <a:p>
-            <a:pPr algn="ctr"/>
-          </a:p>
-        </p:txBody>
-      </p:sp>
-      <p:sp>
-        <p:nvSpPr>
-          <p:cNvPr id="11" name="TextBox 10"/>
-          <p:cNvSpPr txBox="1"/>
-          <p:nvPr/>
-        </p:nvSpPr>
-        <p:spPr>
-          <a:xfrm>
-            <a:off x="786384" y="4709159"/>
-            <a:ext cx="3063239" cy="365760"/>
-          </a:xfrm>
-          <a:prstGeom prst="rect">
-            <a:avLst/>
-          </a:prstGeom>
-          <a:noFill/>
-        </p:spPr>
-        <p:txBody>
-          <a:bodyPr wrap="square">
-            <a:spAutoFit/>
-          </a:bodyPr>
-          <a:lstStyle/>
-          <a:p>
-            <a:r>
-              <a:rPr sz="1350" b="1">
-                <a:solidFill>
-                  <a:srgbClr val="1F2937"/>
-                </a:solidFill>
-                <a:latin typeface="Helvetica"/>
-              </a:rPr>
-              <a:t>It also holds the only working transport code for the exchange that already failed. We cannot tell from the case study material whether that helps, so the plan gains if it does and loses nothing if it does not.</a:t>
-            </a:r>
-          </a:p>
-        </p:txBody>
-      </p:sp>
-      <p:sp>
-        <p:nvSpPr>
-          <p:cNvPr id="12" name="TextBox 11"/>
-          <p:cNvSpPr txBox="1"/>
-          <p:nvPr/>
-        </p:nvSpPr>
-        <p:spPr>
-          <a:xfrm>
-            <a:off x="585216" y="6263640"/>
-            <a:ext cx="7315200" cy="274320"/>
-          </a:xfrm>
-          <a:prstGeom prst="rect">
-            <a:avLst/>
-          </a:prstGeom>
-          <a:noFill/>
-        </p:spPr>
-        <p:txBody>
-          <a:bodyPr wrap="square">
-            <a:spAutoFit/>
-          </a:bodyPr>
-          <a:lstStyle/>
-          <a:p>
-            <a:r>
-              <a:rPr sz="900" b="0">
-                <a:solidFill>
-                  <a:srgbClr val="64748B"/>
-                </a:solidFill>
-                <a:latin typeface="Helvetica"/>
-              </a:rPr>
-              <a:t>Two to three touchpoints a week for the coordinator. The schedule is data in the repository, and a test asserts the seating rule.</a:t>
-            </a:r>
-          </a:p>
-        </p:txBody>
-      </p:sp>
       <p:pic>
         <p:nvPicPr>
-          <p:cNvPr id="13" name="Picture 12" descr="roommap.png"/>
+          <p:cNvPr id="2" name="Picture 1" descr="05.png"/>
           <p:cNvPicPr>
             <a:picLocks noChangeAspect="1"/>
           </p:cNvPicPr>
@@ -7159,8 +4240,8 @@
         </p:blipFill>
         <p:spPr>
           <a:xfrm>
-            <a:off x="4169663" y="1344168"/>
-            <a:ext cx="7436815" cy="2741062"/>
+            <a:off x="0" y="0"/>
+            <a:ext cx="12191695" cy="6858000"/>
           </a:xfrm>
           <a:prstGeom prst="rect">
             <a:avLst/>
@@ -7185,498 +4266,30 @@
         <p:nvPr/>
       </p:nvGrpSpPr>
       <p:grpSpPr/>
-      <p:sp>
-        <p:nvSpPr>
-          <p:cNvPr id="2" name="TextBox 1"/>
-          <p:cNvSpPr txBox="1"/>
+      <p:pic>
+        <p:nvPicPr>
+          <p:cNvPr id="2" name="Picture 1" descr="06.png"/>
+          <p:cNvPicPr>
+            <a:picLocks noChangeAspect="1"/>
+          </p:cNvPicPr>
           <p:nvPr/>
-        </p:nvSpPr>
+        </p:nvPicPr>
+        <p:blipFill>
+          <a:blip r:embed="rId2"/>
+          <a:stretch>
+            <a:fillRect/>
+          </a:stretch>
+        </p:blipFill>
         <p:spPr>
           <a:xfrm>
-            <a:off x="585216" y="475488"/>
-            <a:ext cx="10789920" cy="640080"/>
+            <a:off x="0" y="0"/>
+            <a:ext cx="12191695" cy="6858000"/>
           </a:xfrm>
           <a:prstGeom prst="rect">
             <a:avLst/>
           </a:prstGeom>
-          <a:noFill/>
         </p:spPr>
-        <p:txBody>
-          <a:bodyPr wrap="square">
-            <a:spAutoFit/>
-          </a:bodyPr>
-          <a:lstStyle/>
-          <a:p>
-            <a:r>
-              <a:rPr sz="3000" b="1">
-                <a:solidFill>
-                  <a:srgbClr val="1F2937"/>
-                </a:solidFill>
-                <a:latin typeface="Helvetica"/>
-              </a:rPr>
-              <a:t>Nobody has to be persuaded</a:t>
-            </a:r>
-          </a:p>
-        </p:txBody>
-      </p:sp>
-      <p:sp>
-        <p:nvSpPr>
-          <p:cNvPr id="3" name="TextBox 2"/>
-          <p:cNvSpPr txBox="1"/>
-          <p:nvPr/>
-        </p:nvSpPr>
-        <p:spPr>
-          <a:xfrm>
-            <a:off x="585216" y="960120"/>
-            <a:ext cx="10424160" cy="731520"/>
-          </a:xfrm>
-          <a:prstGeom prst="rect">
-            <a:avLst/>
-          </a:prstGeom>
-          <a:noFill/>
-        </p:spPr>
-        <p:txBody>
-          <a:bodyPr wrap="square">
-            <a:spAutoFit/>
-          </a:bodyPr>
-          <a:lstStyle/>
-          <a:p>
-            <a:r>
-              <a:rPr sz="1700" b="0">
-                <a:solidFill>
-                  <a:srgbClr val="475569"/>
-                </a:solidFill>
-                <a:latin typeface="Helvetica"/>
-              </a:rPr>
-              <a:t>Every partner is worse off under the status quo, and three do not yet know how.</a:t>
-            </a:r>
-          </a:p>
-        </p:txBody>
-      </p:sp>
-      <p:sp>
-        <p:nvSpPr>
-          <p:cNvPr id="4" name="Rounded Rectangle 3"/>
-          <p:cNvSpPr/>
-          <p:nvPr/>
-        </p:nvSpPr>
-        <p:spPr>
-          <a:xfrm>
-            <a:off x="585216" y="1719072"/>
-            <a:ext cx="50292" cy="182880"/>
-          </a:xfrm>
-          <a:prstGeom prst="roundRect">
-            <a:avLst/>
-          </a:prstGeom>
-          <a:solidFill>
-            <a:srgbClr val="475569"/>
-          </a:solidFill>
-          <a:ln>
-            <a:noFill/>
-          </a:ln>
-          <a:effectLst/>
-        </p:spPr>
-        <p:style>
-          <a:lnRef idx="1">
-            <a:schemeClr val="accent1"/>
-          </a:lnRef>
-          <a:fillRef idx="3">
-            <a:schemeClr val="accent1"/>
-          </a:fillRef>
-          <a:effectRef idx="2">
-            <a:schemeClr val="accent1"/>
-          </a:effectRef>
-          <a:fontRef idx="minor">
-            <a:schemeClr val="lt1"/>
-          </a:fontRef>
-        </p:style>
-        <p:txBody>
-          <a:bodyPr rtlCol="0" anchor="ctr"/>
-          <a:lstStyle/>
-          <a:p>
-            <a:pPr algn="ctr"/>
-          </a:p>
-        </p:txBody>
-      </p:sp>
-      <p:sp>
-        <p:nvSpPr>
-          <p:cNvPr id="5" name="TextBox 4"/>
-          <p:cNvSpPr txBox="1"/>
-          <p:nvPr/>
-        </p:nvSpPr>
-        <p:spPr>
-          <a:xfrm>
-            <a:off x="786384" y="1664207"/>
-            <a:ext cx="10222992" cy="365760"/>
-          </a:xfrm>
-          <a:prstGeom prst="rect">
-            <a:avLst/>
-          </a:prstGeom>
-          <a:noFill/>
-        </p:spPr>
-        <p:txBody>
-          <a:bodyPr wrap="square">
-            <a:spAutoFit/>
-          </a:bodyPr>
-          <a:lstStyle/>
-          <a:p>
-            <a:r>
-              <a:rPr sz="1350" b="1">
-                <a:solidFill>
-                  <a:srgbClr val="1F2937"/>
-                </a:solidFill>
-                <a:latin typeface="Helvetica"/>
-              </a:rPr>
-              <a:t>**Helix** has built against a provisional reading. A declared contract is the only outcome in which that work survives. Approach first.</a:t>
-            </a:r>
-          </a:p>
-        </p:txBody>
-      </p:sp>
-      <p:sp>
-        <p:nvSpPr>
-          <p:cNvPr id="6" name="Rounded Rectangle 5"/>
-          <p:cNvSpPr/>
-          <p:nvPr/>
-        </p:nvSpPr>
-        <p:spPr>
-          <a:xfrm>
-            <a:off x="585216" y="2779775"/>
-            <a:ext cx="50292" cy="182880"/>
-          </a:xfrm>
-          <a:prstGeom prst="roundRect">
-            <a:avLst/>
-          </a:prstGeom>
-          <a:solidFill>
-            <a:srgbClr val="475569"/>
-          </a:solidFill>
-          <a:ln>
-            <a:noFill/>
-          </a:ln>
-          <a:effectLst/>
-        </p:spPr>
-        <p:style>
-          <a:lnRef idx="1">
-            <a:schemeClr val="accent1"/>
-          </a:lnRef>
-          <a:fillRef idx="3">
-            <a:schemeClr val="accent1"/>
-          </a:fillRef>
-          <a:effectRef idx="2">
-            <a:schemeClr val="accent1"/>
-          </a:effectRef>
-          <a:fontRef idx="minor">
-            <a:schemeClr val="lt1"/>
-          </a:fontRef>
-        </p:style>
-        <p:txBody>
-          <a:bodyPr rtlCol="0" anchor="ctr"/>
-          <a:lstStyle/>
-          <a:p>
-            <a:pPr algn="ctr"/>
-          </a:p>
-        </p:txBody>
-      </p:sp>
-      <p:sp>
-        <p:nvSpPr>
-          <p:cNvPr id="7" name="TextBox 6"/>
-          <p:cNvSpPr txBox="1"/>
-          <p:nvPr/>
-        </p:nvSpPr>
-        <p:spPr>
-          <a:xfrm>
-            <a:off x="786384" y="2724911"/>
-            <a:ext cx="10222992" cy="365760"/>
-          </a:xfrm>
-          <a:prstGeom prst="rect">
-            <a:avLst/>
-          </a:prstGeom>
-          <a:noFill/>
-        </p:spPr>
-        <p:txBody>
-          <a:bodyPr wrap="square">
-            <a:spAutoFit/>
-          </a:bodyPr>
-          <a:lstStyle/>
-          <a:p>
-            <a:r>
-              <a:rPr sz="1350" b="1">
-                <a:solidFill>
-                  <a:srgbClr val="1F2937"/>
-                </a:solidFill>
-                <a:latin typeface="Helvetica"/>
-              </a:rPr>
-              <a:t>**Meridian** has already asked for the uncertainty clause, in the form of an objection. Agree with it in public.</a:t>
-            </a:r>
-          </a:p>
-        </p:txBody>
-      </p:sp>
-      <p:sp>
-        <p:nvSpPr>
-          <p:cNvPr id="8" name="Rounded Rectangle 7"/>
-          <p:cNvSpPr/>
-          <p:nvPr/>
-        </p:nvSpPr>
-        <p:spPr>
-          <a:xfrm>
-            <a:off x="585216" y="3657599"/>
-            <a:ext cx="50292" cy="182880"/>
-          </a:xfrm>
-          <a:prstGeom prst="roundRect">
-            <a:avLst/>
-          </a:prstGeom>
-          <a:solidFill>
-            <a:srgbClr val="475569"/>
-          </a:solidFill>
-          <a:ln>
-            <a:noFill/>
-          </a:ln>
-          <a:effectLst/>
-        </p:spPr>
-        <p:style>
-          <a:lnRef idx="1">
-            <a:schemeClr val="accent1"/>
-          </a:lnRef>
-          <a:fillRef idx="3">
-            <a:schemeClr val="accent1"/>
-          </a:fillRef>
-          <a:effectRef idx="2">
-            <a:schemeClr val="accent1"/>
-          </a:effectRef>
-          <a:fontRef idx="minor">
-            <a:schemeClr val="lt1"/>
-          </a:fontRef>
-        </p:style>
-        <p:txBody>
-          <a:bodyPr rtlCol="0" anchor="ctr"/>
-          <a:lstStyle/>
-          <a:p>
-            <a:pPr algn="ctr"/>
-          </a:p>
-        </p:txBody>
-      </p:sp>
-      <p:sp>
-        <p:nvSpPr>
-          <p:cNvPr id="9" name="TextBox 8"/>
-          <p:cNvSpPr txBox="1"/>
-          <p:nvPr/>
-        </p:nvSpPr>
-        <p:spPr>
-          <a:xfrm>
-            <a:off x="786384" y="3602735"/>
-            <a:ext cx="10222992" cy="365760"/>
-          </a:xfrm>
-          <a:prstGeom prst="rect">
-            <a:avLst/>
-          </a:prstGeom>
-          <a:noFill/>
-        </p:spPr>
-        <p:txBody>
-          <a:bodyPr wrap="square">
-            <a:spAutoFit/>
-          </a:bodyPr>
-          <a:lstStyle/>
-          <a:p>
-            <a:r>
-              <a:rPr sz="1350" b="1">
-                <a:solidFill>
-                  <a:srgbClr val="1F2937"/>
-                </a:solidFill>
-                <a:latin typeface="Helvetica"/>
-              </a:rPr>
-              <a:t>**Solis** is being judged on a derate function it never saw. Declaring its units is how it takes back control of how its own design is evaluated.</a:t>
-            </a:r>
-          </a:p>
-        </p:txBody>
-      </p:sp>
-      <p:sp>
-        <p:nvSpPr>
-          <p:cNvPr id="10" name="Rounded Rectangle 9"/>
-          <p:cNvSpPr/>
-          <p:nvPr/>
-        </p:nvSpPr>
-        <p:spPr>
-          <a:xfrm>
-            <a:off x="585216" y="4718303"/>
-            <a:ext cx="50292" cy="182880"/>
-          </a:xfrm>
-          <a:prstGeom prst="roundRect">
-            <a:avLst/>
-          </a:prstGeom>
-          <a:solidFill>
-            <a:srgbClr val="475569"/>
-          </a:solidFill>
-          <a:ln>
-            <a:noFill/>
-          </a:ln>
-          <a:effectLst/>
-        </p:spPr>
-        <p:style>
-          <a:lnRef idx="1">
-            <a:schemeClr val="accent1"/>
-          </a:lnRef>
-          <a:fillRef idx="3">
-            <a:schemeClr val="accent1"/>
-          </a:fillRef>
-          <a:effectRef idx="2">
-            <a:schemeClr val="accent1"/>
-          </a:effectRef>
-          <a:fontRef idx="minor">
-            <a:schemeClr val="lt1"/>
-          </a:fontRef>
-        </p:style>
-        <p:txBody>
-          <a:bodyPr rtlCol="0" anchor="ctr"/>
-          <a:lstStyle/>
-          <a:p>
-            <a:pPr algn="ctr"/>
-          </a:p>
-        </p:txBody>
-      </p:sp>
-      <p:sp>
-        <p:nvSpPr>
-          <p:cNvPr id="11" name="TextBox 10"/>
-          <p:cNvSpPr txBox="1"/>
-          <p:nvPr/>
-        </p:nvSpPr>
-        <p:spPr>
-          <a:xfrm>
-            <a:off x="786384" y="4663440"/>
-            <a:ext cx="10222992" cy="365760"/>
-          </a:xfrm>
-          <a:prstGeom prst="rect">
-            <a:avLst/>
-          </a:prstGeom>
-          <a:noFill/>
-        </p:spPr>
-        <p:txBody>
-          <a:bodyPr wrap="square">
-            <a:spAutoFit/>
-          </a:bodyPr>
-          <a:lstStyle/>
-          <a:p>
-            <a:r>
-              <a:rPr sz="1350" b="1">
-                <a:solidFill>
-                  <a:srgbClr val="1F2937"/>
-                </a:solidFill>
-                <a:latin typeface="Helvetica"/>
-              </a:rPr>
-              <a:t>**Tharsis** carries the blame for thresholds it was never sent and a schedule nobody owns. Declaring the routes moves that liability to where it belongs.</a:t>
-            </a:r>
-          </a:p>
-        </p:txBody>
-      </p:sp>
-      <p:sp>
-        <p:nvSpPr>
-          <p:cNvPr id="12" name="Rounded Rectangle 11"/>
-          <p:cNvSpPr/>
-          <p:nvPr/>
-        </p:nvSpPr>
-        <p:spPr>
-          <a:xfrm>
-            <a:off x="585216" y="5779007"/>
-            <a:ext cx="50292" cy="182880"/>
-          </a:xfrm>
-          <a:prstGeom prst="roundRect">
-            <a:avLst/>
-          </a:prstGeom>
-          <a:solidFill>
-            <a:srgbClr val="475569"/>
-          </a:solidFill>
-          <a:ln>
-            <a:noFill/>
-          </a:ln>
-          <a:effectLst/>
-        </p:spPr>
-        <p:style>
-          <a:lnRef idx="1">
-            <a:schemeClr val="accent1"/>
-          </a:lnRef>
-          <a:fillRef idx="3">
-            <a:schemeClr val="accent1"/>
-          </a:fillRef>
-          <a:effectRef idx="2">
-            <a:schemeClr val="accent1"/>
-          </a:effectRef>
-          <a:fontRef idx="minor">
-            <a:schemeClr val="lt1"/>
-          </a:fontRef>
-        </p:style>
-        <p:txBody>
-          <a:bodyPr rtlCol="0" anchor="ctr"/>
-          <a:lstStyle/>
-          <a:p>
-            <a:pPr algn="ctr"/>
-          </a:p>
-        </p:txBody>
-      </p:sp>
-      <p:sp>
-        <p:nvSpPr>
-          <p:cNvPr id="13" name="TextBox 12"/>
-          <p:cNvSpPr txBox="1"/>
-          <p:nvPr/>
-        </p:nvSpPr>
-        <p:spPr>
-          <a:xfrm>
-            <a:off x="786384" y="5724144"/>
-            <a:ext cx="10222992" cy="365760"/>
-          </a:xfrm>
-          <a:prstGeom prst="rect">
-            <a:avLst/>
-          </a:prstGeom>
-          <a:noFill/>
-        </p:spPr>
-        <p:txBody>
-          <a:bodyPr wrap="square">
-            <a:spAutoFit/>
-          </a:bodyPr>
-          <a:lstStyle/>
-          <a:p>
-            <a:r>
-              <a:rPr sz="1350" b="1">
-                <a:solidFill>
-                  <a:srgbClr val="1F2937"/>
-                </a:solidFill>
-                <a:latin typeface="Helvetica"/>
-              </a:rPr>
-              <a:t>In an acute crisis partners accept direction they would decline in business as usual, and that window closes as soon as the crisis is declared over. Week 1 uses it.</a:t>
-            </a:r>
-          </a:p>
-        </p:txBody>
-      </p:sp>
-      <p:sp>
-        <p:nvSpPr>
-          <p:cNvPr id="14" name="TextBox 13"/>
-          <p:cNvSpPr txBox="1"/>
-          <p:nvPr/>
-        </p:nvSpPr>
-        <p:spPr>
-          <a:xfrm>
-            <a:off x="585216" y="6263640"/>
-            <a:ext cx="7315200" cy="274320"/>
-          </a:xfrm>
-          <a:prstGeom prst="rect">
-            <a:avLst/>
-          </a:prstGeom>
-          <a:noFill/>
-        </p:spPr>
-        <p:txBody>
-          <a:bodyPr wrap="square">
-            <a:spAutoFit/>
-          </a:bodyPr>
-          <a:lstStyle/>
-          <a:p>
-            <a:r>
-              <a:rPr sz="900" b="0">
-                <a:solidFill>
-                  <a:srgbClr val="64748B"/>
-                </a:solidFill>
-                <a:latin typeface="Helvetica"/>
-              </a:rPr>
-              <a:t>Authority here is convening plus the diagnosis. The diagnosis does the work.</a:t>
-            </a:r>
-          </a:p>
-        </p:txBody>
-      </p:sp>
+      </p:pic>
     </p:spTree>
   </p:cSld>
   <p:clrMapOvr>
@@ -7695,501 +4308,9 @@
         <p:nvPr/>
       </p:nvGrpSpPr>
       <p:grpSpPr/>
-      <p:sp>
-        <p:nvSpPr>
-          <p:cNvPr id="2" name="TextBox 1"/>
-          <p:cNvSpPr txBox="1"/>
-          <p:nvPr/>
-        </p:nvSpPr>
-        <p:spPr>
-          <a:xfrm>
-            <a:off x="585216" y="475488"/>
-            <a:ext cx="10789920" cy="640080"/>
-          </a:xfrm>
-          <a:prstGeom prst="rect">
-            <a:avLst/>
-          </a:prstGeom>
-          <a:noFill/>
-        </p:spPr>
-        <p:txBody>
-          <a:bodyPr wrap="square">
-            <a:spAutoFit/>
-          </a:bodyPr>
-          <a:lstStyle/>
-          <a:p>
-            <a:r>
-              <a:rPr sz="3000" b="1">
-                <a:solidFill>
-                  <a:srgbClr val="1F2937"/>
-                </a:solidFill>
-                <a:latin typeface="Helvetica"/>
-              </a:rPr>
-              <a:t>The artifact, and what it does not establish</a:t>
-            </a:r>
-          </a:p>
-        </p:txBody>
-      </p:sp>
-      <p:sp>
-        <p:nvSpPr>
-          <p:cNvPr id="3" name="TextBox 2"/>
-          <p:cNvSpPr txBox="1"/>
-          <p:nvPr/>
-        </p:nvSpPr>
-        <p:spPr>
-          <a:xfrm>
-            <a:off x="585216" y="960120"/>
-            <a:ext cx="10424160" cy="731520"/>
-          </a:xfrm>
-          <a:prstGeom prst="rect">
-            <a:avLst/>
-          </a:prstGeom>
-          <a:noFill/>
-        </p:spPr>
-        <p:txBody>
-          <a:bodyPr wrap="square">
-            <a:spAutoFit/>
-          </a:bodyPr>
-          <a:lstStyle/>
-          <a:p>
-            <a:r>
-              <a:rPr sz="1700" b="0">
-                <a:solidFill>
-                  <a:srgbClr val="475569"/>
-                </a:solidFill>
-                <a:latin typeface="Helvetica"/>
-              </a:rPr>
-              <a:t>430 clause cells across 43 declarations. 35 are stated.</a:t>
-            </a:r>
-          </a:p>
-        </p:txBody>
-      </p:sp>
-      <p:sp>
-        <p:nvSpPr>
-          <p:cNvPr id="4" name="Rounded Rectangle 3"/>
-          <p:cNvSpPr/>
-          <p:nvPr/>
-        </p:nvSpPr>
-        <p:spPr>
-          <a:xfrm>
-            <a:off x="585216" y="1399032"/>
-            <a:ext cx="50292" cy="182880"/>
-          </a:xfrm>
-          <a:prstGeom prst="roundRect">
-            <a:avLst/>
-          </a:prstGeom>
-          <a:solidFill>
-            <a:srgbClr val="475569"/>
-          </a:solidFill>
-          <a:ln>
-            <a:noFill/>
-          </a:ln>
-          <a:effectLst/>
-        </p:spPr>
-        <p:style>
-          <a:lnRef idx="1">
-            <a:schemeClr val="accent1"/>
-          </a:lnRef>
-          <a:fillRef idx="3">
-            <a:schemeClr val="accent1"/>
-          </a:fillRef>
-          <a:effectRef idx="2">
-            <a:schemeClr val="accent1"/>
-          </a:effectRef>
-          <a:fontRef idx="minor">
-            <a:schemeClr val="lt1"/>
-          </a:fontRef>
-        </p:style>
-        <p:txBody>
-          <a:bodyPr rtlCol="0" anchor="ctr"/>
-          <a:lstStyle/>
-          <a:p>
-            <a:pPr algn="ctr"/>
-          </a:p>
-        </p:txBody>
-      </p:sp>
-      <p:sp>
-        <p:nvSpPr>
-          <p:cNvPr id="5" name="TextBox 4"/>
-          <p:cNvSpPr txBox="1"/>
-          <p:nvPr/>
-        </p:nvSpPr>
-        <p:spPr>
-          <a:xfrm>
-            <a:off x="786384" y="1344168"/>
-            <a:ext cx="3063239" cy="365760"/>
-          </a:xfrm>
-          <a:prstGeom prst="rect">
-            <a:avLst/>
-          </a:prstGeom>
-          <a:noFill/>
-        </p:spPr>
-        <p:txBody>
-          <a:bodyPr wrap="square">
-            <a:spAutoFit/>
-          </a:bodyPr>
-          <a:lstStyle/>
-          <a:p>
-            <a:r>
-              <a:rPr sz="1350" b="1">
-                <a:solidFill>
-                  <a:srgbClr val="1F2937"/>
-                </a:solidFill>
-                <a:latin typeface="Helvetica"/>
-              </a:rPr>
-              <a:t>Reads four declarations in four incompatible formats and applies seven general rules. None names a partner, an item or a gap.</a:t>
-            </a:r>
-          </a:p>
-        </p:txBody>
-      </p:sp>
-      <p:sp>
-        <p:nvSpPr>
-          <p:cNvPr id="6" name="Rounded Rectangle 5"/>
-          <p:cNvSpPr/>
-          <p:nvPr/>
-        </p:nvSpPr>
-        <p:spPr>
-          <a:xfrm>
-            <a:off x="585216" y="2276856"/>
-            <a:ext cx="50292" cy="182880"/>
-          </a:xfrm>
-          <a:prstGeom prst="roundRect">
-            <a:avLst/>
-          </a:prstGeom>
-          <a:solidFill>
-            <a:srgbClr val="475569"/>
-          </a:solidFill>
-          <a:ln>
-            <a:noFill/>
-          </a:ln>
-          <a:effectLst/>
-        </p:spPr>
-        <p:style>
-          <a:lnRef idx="1">
-            <a:schemeClr val="accent1"/>
-          </a:lnRef>
-          <a:fillRef idx="3">
-            <a:schemeClr val="accent1"/>
-          </a:fillRef>
-          <a:effectRef idx="2">
-            <a:schemeClr val="accent1"/>
-          </a:effectRef>
-          <a:fontRef idx="minor">
-            <a:schemeClr val="lt1"/>
-          </a:fontRef>
-        </p:style>
-        <p:txBody>
-          <a:bodyPr rtlCol="0" anchor="ctr"/>
-          <a:lstStyle/>
-          <a:p>
-            <a:pPr algn="ctr"/>
-          </a:p>
-        </p:txBody>
-      </p:sp>
-      <p:sp>
-        <p:nvSpPr>
-          <p:cNvPr id="7" name="TextBox 6"/>
-          <p:cNvSpPr txBox="1"/>
-          <p:nvPr/>
-        </p:nvSpPr>
-        <p:spPr>
-          <a:xfrm>
-            <a:off x="786384" y="2221991"/>
-            <a:ext cx="3063239" cy="365760"/>
-          </a:xfrm>
-          <a:prstGeom prst="rect">
-            <a:avLst/>
-          </a:prstGeom>
-          <a:noFill/>
-        </p:spPr>
-        <p:txBody>
-          <a:bodyPr wrap="square">
-            <a:spAutoFit/>
-          </a:bodyPr>
-          <a:lstStyle/>
-          <a:p>
-            <a:r>
-              <a:rPr sz="1350" b="1">
-                <a:solidFill>
-                  <a:srgbClr val="1F2937"/>
-                </a:solidFill>
-                <a:latin typeface="Helvetica"/>
-              </a:rPr>
-              <a:t>**Five clauses are absent in all 43 declarations**: uncertainty, spatial resolution, scenario identity, cadence, encoding. Never stated, never even inferable.</a:t>
-            </a:r>
-          </a:p>
-        </p:txBody>
-      </p:sp>
-      <p:sp>
-        <p:nvSpPr>
-          <p:cNvPr id="8" name="Rounded Rectangle 7"/>
-          <p:cNvSpPr/>
-          <p:nvPr/>
-        </p:nvSpPr>
-        <p:spPr>
-          <a:xfrm>
-            <a:off x="585216" y="3337560"/>
-            <a:ext cx="50292" cy="182880"/>
-          </a:xfrm>
-          <a:prstGeom prst="roundRect">
-            <a:avLst/>
-          </a:prstGeom>
-          <a:solidFill>
-            <a:srgbClr val="475569"/>
-          </a:solidFill>
-          <a:ln>
-            <a:noFill/>
-          </a:ln>
-          <a:effectLst/>
-        </p:spPr>
-        <p:style>
-          <a:lnRef idx="1">
-            <a:schemeClr val="accent1"/>
-          </a:lnRef>
-          <a:fillRef idx="3">
-            <a:schemeClr val="accent1"/>
-          </a:fillRef>
-          <a:effectRef idx="2">
-            <a:schemeClr val="accent1"/>
-          </a:effectRef>
-          <a:fontRef idx="minor">
-            <a:schemeClr val="lt1"/>
-          </a:fontRef>
-        </p:style>
-        <p:txBody>
-          <a:bodyPr rtlCol="0" anchor="ctr"/>
-          <a:lstStyle/>
-          <a:p>
-            <a:pPr algn="ctr"/>
-          </a:p>
-        </p:txBody>
-      </p:sp>
-      <p:sp>
-        <p:nvSpPr>
-          <p:cNvPr id="9" name="TextBox 8"/>
-          <p:cNvSpPr txBox="1"/>
-          <p:nvPr/>
-        </p:nvSpPr>
-        <p:spPr>
-          <a:xfrm>
-            <a:off x="786384" y="3282696"/>
-            <a:ext cx="3063239" cy="365760"/>
-          </a:xfrm>
-          <a:prstGeom prst="rect">
-            <a:avLst/>
-          </a:prstGeom>
-          <a:noFill/>
-        </p:spPr>
-        <p:txBody>
-          <a:bodyPr wrap="square">
-            <a:spAutoFit/>
-          </a:bodyPr>
-          <a:lstStyle/>
-          <a:p>
-            <a:r>
-              <a:rPr sz="1350" b="1">
-                <a:solidFill>
-                  <a:srgbClr val="1F2937"/>
-                </a:solidFill>
-                <a:latin typeface="Helvetica"/>
-              </a:rPr>
-              <a:t>The whole consortium yields one identifiable exchange, and that one is broken three ways at once.</a:t>
-            </a:r>
-          </a:p>
-        </p:txBody>
-      </p:sp>
-      <p:sp>
-        <p:nvSpPr>
-          <p:cNvPr id="10" name="Rounded Rectangle 9"/>
-          <p:cNvSpPr/>
-          <p:nvPr/>
-        </p:nvSpPr>
-        <p:spPr>
-          <a:xfrm>
-            <a:off x="585216" y="4215383"/>
-            <a:ext cx="50292" cy="182880"/>
-          </a:xfrm>
-          <a:prstGeom prst="roundRect">
-            <a:avLst/>
-          </a:prstGeom>
-          <a:solidFill>
-            <a:srgbClr val="475569"/>
-          </a:solidFill>
-          <a:ln>
-            <a:noFill/>
-          </a:ln>
-          <a:effectLst/>
-        </p:spPr>
-        <p:style>
-          <a:lnRef idx="1">
-            <a:schemeClr val="accent1"/>
-          </a:lnRef>
-          <a:fillRef idx="3">
-            <a:schemeClr val="accent1"/>
-          </a:fillRef>
-          <a:effectRef idx="2">
-            <a:schemeClr val="accent1"/>
-          </a:effectRef>
-          <a:fontRef idx="minor">
-            <a:schemeClr val="lt1"/>
-          </a:fontRef>
-        </p:style>
-        <p:txBody>
-          <a:bodyPr rtlCol="0" anchor="ctr"/>
-          <a:lstStyle/>
-          <a:p>
-            <a:pPr algn="ctr"/>
-          </a:p>
-        </p:txBody>
-      </p:sp>
-      <p:sp>
-        <p:nvSpPr>
-          <p:cNvPr id="11" name="TextBox 10"/>
-          <p:cNvSpPr txBox="1"/>
-          <p:nvPr/>
-        </p:nvSpPr>
-        <p:spPr>
-          <a:xfrm>
-            <a:off x="786384" y="4160520"/>
-            <a:ext cx="3063239" cy="365760"/>
-          </a:xfrm>
-          <a:prstGeom prst="rect">
-            <a:avLst/>
-          </a:prstGeom>
-          <a:noFill/>
-        </p:spPr>
-        <p:txBody>
-          <a:bodyPr wrap="square">
-            <a:spAutoFit/>
-          </a:bodyPr>
-          <a:lstStyle/>
-          <a:p>
-            <a:r>
-              <a:rPr sz="1350" b="1">
-                <a:solidFill>
-                  <a:srgbClr val="1F2937"/>
-                </a:solidFill>
-                <a:latin typeface="Helvetica"/>
-              </a:rPr>
-              <a:t>**Deterministic rule code, with no model inside it.** A finding that four disagreeing institutions have to accept must be reproducible byte for byte and legible in a function.</a:t>
-            </a:r>
-          </a:p>
-        </p:txBody>
-      </p:sp>
-      <p:sp>
-        <p:nvSpPr>
-          <p:cNvPr id="12" name="Rounded Rectangle 11"/>
-          <p:cNvSpPr/>
-          <p:nvPr/>
-        </p:nvSpPr>
-        <p:spPr>
-          <a:xfrm>
-            <a:off x="585216" y="5276088"/>
-            <a:ext cx="50292" cy="182880"/>
-          </a:xfrm>
-          <a:prstGeom prst="roundRect">
-            <a:avLst/>
-          </a:prstGeom>
-          <a:solidFill>
-            <a:srgbClr val="475569"/>
-          </a:solidFill>
-          <a:ln>
-            <a:noFill/>
-          </a:ln>
-          <a:effectLst/>
-        </p:spPr>
-        <p:style>
-          <a:lnRef idx="1">
-            <a:schemeClr val="accent1"/>
-          </a:lnRef>
-          <a:fillRef idx="3">
-            <a:schemeClr val="accent1"/>
-          </a:fillRef>
-          <a:effectRef idx="2">
-            <a:schemeClr val="accent1"/>
-          </a:effectRef>
-          <a:fontRef idx="minor">
-            <a:schemeClr val="lt1"/>
-          </a:fontRef>
-        </p:style>
-        <p:txBody>
-          <a:bodyPr rtlCol="0" anchor="ctr"/>
-          <a:lstStyle/>
-          <a:p>
-            <a:pPr algn="ctr"/>
-          </a:p>
-        </p:txBody>
-      </p:sp>
-      <p:sp>
-        <p:nvSpPr>
-          <p:cNvPr id="13" name="TextBox 12"/>
-          <p:cNvSpPr txBox="1"/>
-          <p:nvPr/>
-        </p:nvSpPr>
-        <p:spPr>
-          <a:xfrm>
-            <a:off x="786384" y="5221224"/>
-            <a:ext cx="3063239" cy="365760"/>
-          </a:xfrm>
-          <a:prstGeom prst="rect">
-            <a:avLst/>
-          </a:prstGeom>
-          <a:noFill/>
-        </p:spPr>
-        <p:txBody>
-          <a:bodyPr wrap="square">
-            <a:spAutoFit/>
-          </a:bodyPr>
-          <a:lstStyle/>
-          <a:p>
-            <a:r>
-              <a:rPr sz="1350" b="1">
-                <a:solidFill>
-                  <a:srgbClr val="1F2937"/>
-                </a:solidFill>
-                <a:latin typeface="Helvetica"/>
-              </a:rPr>
-              <a:t>**What it does not establish.** It cannot tell you which variables are actually disputed. That ARES cannot answer that in month 8 is itself the finding.</a:t>
-            </a:r>
-          </a:p>
-        </p:txBody>
-      </p:sp>
-      <p:sp>
-        <p:nvSpPr>
-          <p:cNvPr id="14" name="TextBox 13"/>
-          <p:cNvSpPr txBox="1"/>
-          <p:nvPr/>
-        </p:nvSpPr>
-        <p:spPr>
-          <a:xfrm>
-            <a:off x="585216" y="6263640"/>
-            <a:ext cx="7315200" cy="274320"/>
-          </a:xfrm>
-          <a:prstGeom prst="rect">
-            <a:avLst/>
-          </a:prstGeom>
-          <a:noFill/>
-        </p:spPr>
-        <p:txBody>
-          <a:bodyPr wrap="square">
-            <a:spAutoFit/>
-          </a:bodyPr>
-          <a:lstStyle/>
-          <a:p>
-            <a:r>
-              <a:rPr sz="900" b="0">
-                <a:solidFill>
-                  <a:srgbClr val="64748B"/>
-                </a:solidFill>
-                <a:latin typeface="Helvetica"/>
-              </a:rPr>
-              <a:t>Runs offline from one command. No network, no dependencies, no framework. AI use is disclosed in full at docs/ai_use.md.</a:t>
-            </a:r>
-          </a:p>
-        </p:txBody>
-      </p:sp>
       <p:pic>
         <p:nvPicPr>
-          <p:cNvPr id="15" name="Picture 14" descr="clause_matrix.png"/>
+          <p:cNvPr id="2" name="Picture 1" descr="07.png"/>
           <p:cNvPicPr>
             <a:picLocks noChangeAspect="1"/>
           </p:cNvPicPr>
@@ -8203,8 +4324,50 @@
         </p:blipFill>
         <p:spPr>
           <a:xfrm>
-            <a:off x="4169663" y="1344168"/>
-            <a:ext cx="7436815" cy="4779734"/>
+            <a:off x="0" y="0"/>
+            <a:ext cx="12191695" cy="6858000"/>
+          </a:xfrm>
+          <a:prstGeom prst="rect">
+            <a:avLst/>
+          </a:prstGeom>
+        </p:spPr>
+      </p:pic>
+    </p:spTree>
+  </p:cSld>
+  <p:clrMapOvr>
+    <a:masterClrMapping/>
+  </p:clrMapOvr>
+</p:sld>
+</file>
+
+<file path=ppt/slides/slide9.xml><?xml version="1.0" encoding="utf-8"?>
+<p:sld xmlns:a="http://schemas.openxmlformats.org/drawingml/2006/main" xmlns:p="http://schemas.openxmlformats.org/presentationml/2006/main" xmlns:r="http://schemas.openxmlformats.org/officeDocument/2006/relationships">
+  <p:cSld>
+    <p:spTree>
+      <p:nvGrpSpPr>
+        <p:cNvPr id="1" name=""/>
+        <p:cNvGrpSpPr/>
+        <p:nvPr/>
+      </p:nvGrpSpPr>
+      <p:grpSpPr/>
+      <p:pic>
+        <p:nvPicPr>
+          <p:cNvPr id="2" name="Picture 1" descr="08.png"/>
+          <p:cNvPicPr>
+            <a:picLocks noChangeAspect="1"/>
+          </p:cNvPicPr>
+          <p:nvPr/>
+        </p:nvPicPr>
+        <p:blipFill>
+          <a:blip r:embed="rId2"/>
+          <a:stretch>
+            <a:fillRect/>
+          </a:stretch>
+        </p:blipFill>
+        <p:spPr>
+          <a:xfrm>
+            <a:off x="0" y="0"/>
+            <a:ext cx="12191695" cy="6858000"/>
           </a:xfrm>
           <a:prstGeom prst="rect">
             <a:avLst/>

--- a/deck/ares_board_deck.pptx
+++ b/deck/ares_board_deck.pptx
@@ -653,7 +653,7 @@
           <a:p>
             <a:r>
               <a:rPr sz="1100"/>
-              <a:t>Slow down here, the language is deliberate. Counter-case: loose coupling is defensible for a planning study and indefensible for a resilience claim, and the funder is buying a resilience claim. Where the floor sits is Meridian's to state, which is why track B elicits it in weeks 1 to 3. The credibility threshold is Li et al. 2019, Applied Energy 239. Source if asked: the 2018 dust figures are Opportunity's own telemetry as reported by JPL, 645 Wh on 30 May falling to 22 Wh by 10 June, against a clear-sky baseline near 600 to 900 Wh per sol. Real published data, external to the brief, unlike everything else here.</a:t>
+              <a:t>Slow down here, the language is deliberate. Counter-case: loose coupling is defensible for a planning study and indefensible for a resilience claim, and the funder is buying a resilience claim. Where the floor sits is Meridian's to state, which is why track B elicits it in weeks 1 to 3. The credibility threshold is Li et al. 2019, Applied Energy 239. Source if asked: the 2018 dust figures are Opportunity's own telemetry as reported by JPL, 645 Wh on 30 May falling to 22 Wh by 10 June, against a clear-sky baseline near 600 to 900 Wh per sol. Real published data, external to the brief, unlike everything else here. BACKUP EXHIBIT, on the page rather than a slide: if pressed on why coupling matters in practice, pull up the storage figure. 120 sols is 2,959 hours, so every kilowatt that cannot be shed needs 2,959 kWh stored, which is 13.5 to 17.9 tonnes of battery per kW or 1.3 to 1.6 tonnes of fuel cell reactant. You do not store your way out, you generate your way out. And the multiplier is fixed while the number of kilowatts it applies to is exactly what neither partner can compute alone.</a:t>
             </a:r>
           </a:p>
         </p:txBody>

--- a/deck/ares_board_deck.pptx
+++ b/deck/ares_board_deck.pptx
@@ -13,7 +13,6 @@
     <p:sldId id="261" r:id="rId13"/>
     <p:sldId id="262" r:id="rId14"/>
     <p:sldId id="263" r:id="rId15"/>
-    <p:sldId id="264" r:id="rId16"/>
   </p:sldIdLst>
   <p:sldSz cx="12191695" cy="6858000" type="screen4x3"/>
   <p:notesSz cx="6858000" cy="9144000"/>
@@ -938,77 +937,6 @@
             <a:r>
               <a:rPr sz="1100"/>
               <a:t>A neutral checker reporting that two partners exchange something neither declares makes the gap a property of the interface rather than an accusation.</a:t>
-            </a:r>
-          </a:p>
-        </p:txBody>
-      </p:sp>
-      <p:sp>
-        <p:nvSpPr>
-          <p:cNvPr id="4" name="Slide Number Placeholder 3"/>
-          <p:cNvSpPr>
-            <a:spLocks noGrp="1"/>
-          </p:cNvSpPr>
-          <p:nvPr>
-            <p:ph type="sldNum" idx="5" sz="quarter"/>
-          </p:nvPr>
-        </p:nvSpPr>
-        <p:spPr/>
-      </p:sp>
-    </p:spTree>
-  </p:cSld>
-  <p:clrMapOvr>
-    <a:masterClrMapping/>
-  </p:clrMapOvr>
-</p:notes>
-</file>
-
-<file path=ppt/notesSlides/notesSlide8.xml><?xml version="1.0" encoding="utf-8"?>
-<p:notes xmlns:a="http://schemas.openxmlformats.org/drawingml/2006/main" xmlns:p="http://schemas.openxmlformats.org/presentationml/2006/main" xmlns:r="http://schemas.openxmlformats.org/officeDocument/2006/relationships">
-  <p:cSld>
-    <p:spTree>
-      <p:nvGrpSpPr>
-        <p:cNvPr id="1" name=""/>
-        <p:cNvGrpSpPr/>
-        <p:nvPr/>
-      </p:nvGrpSpPr>
-      <p:grpSpPr>
-        <a:xfrm>
-          <a:off x="0" y="0"/>
-          <a:ext cx="0" cy="0"/>
-          <a:chOff x="0" y="0"/>
-          <a:chExt cx="0" cy="0"/>
-        </a:xfrm>
-      </p:grpSpPr>
-      <p:sp>
-        <p:nvSpPr>
-          <p:cNvPr id="2" name="Slide Image Placeholder 1"/>
-          <p:cNvSpPr>
-            <a:spLocks noGrp="1"/>
-          </p:cNvSpPr>
-          <p:nvPr>
-            <p:ph type="sldImg" idx="2"/>
-          </p:nvPr>
-        </p:nvSpPr>
-        <p:spPr/>
-      </p:sp>
-      <p:sp>
-        <p:nvSpPr>
-          <p:cNvPr id="3" name="Notes Placeholder 2"/>
-          <p:cNvSpPr>
-            <a:spLocks noGrp="1"/>
-          </p:cNvSpPr>
-          <p:nvPr>
-            <p:ph type="body" idx="3" sz="quarter"/>
-          </p:nvPr>
-        </p:nvSpPr>
-        <p:spPr/>
-        <p:txBody>
-          <a:bodyPr/>
-          <a:lstStyle/>
-          <a:p>
-            <a:r>
-              <a:rPr sz="1100"/>
-              <a:t>Demo in three minutes: run it, show the calendar, select an orphaned item, show the finding, open the declaration and read the sentence it came from. Close on the limits. If asked how this position differs from the one that was confidently wrong and overruled mid-session: not by better reasoning, but by naming in advance the result that would overturn it and putting it in week 5.</a:t>
             </a:r>
           </a:p>
         </p:txBody>
@@ -4311,48 +4239,6 @@
       <p:pic>
         <p:nvPicPr>
           <p:cNvPr id="2" name="Picture 1" descr="07.png"/>
-          <p:cNvPicPr>
-            <a:picLocks noChangeAspect="1"/>
-          </p:cNvPicPr>
-          <p:nvPr/>
-        </p:nvPicPr>
-        <p:blipFill>
-          <a:blip r:embed="rId2"/>
-          <a:stretch>
-            <a:fillRect/>
-          </a:stretch>
-        </p:blipFill>
-        <p:spPr>
-          <a:xfrm>
-            <a:off x="0" y="0"/>
-            <a:ext cx="12191695" cy="6858000"/>
-          </a:xfrm>
-          <a:prstGeom prst="rect">
-            <a:avLst/>
-          </a:prstGeom>
-        </p:spPr>
-      </p:pic>
-    </p:spTree>
-  </p:cSld>
-  <p:clrMapOvr>
-    <a:masterClrMapping/>
-  </p:clrMapOvr>
-</p:sld>
-</file>
-
-<file path=ppt/slides/slide9.xml><?xml version="1.0" encoding="utf-8"?>
-<p:sld xmlns:a="http://schemas.openxmlformats.org/drawingml/2006/main" xmlns:p="http://schemas.openxmlformats.org/presentationml/2006/main" xmlns:r="http://schemas.openxmlformats.org/officeDocument/2006/relationships">
-  <p:cSld>
-    <p:spTree>
-      <p:nvGrpSpPr>
-        <p:cNvPr id="1" name=""/>
-        <p:cNvGrpSpPr/>
-        <p:nvPr/>
-      </p:nvGrpSpPr>
-      <p:grpSpPr/>
-      <p:pic>
-        <p:nvPicPr>
-          <p:cNvPr id="2" name="Picture 1" descr="08.png"/>
           <p:cNvPicPr>
             <a:picLocks noChangeAspect="1"/>
           </p:cNvPicPr>

--- a/deck/ares_board_deck.pptx
+++ b/deck/ares_board_deck.pptx
@@ -13,6 +13,7 @@
     <p:sldId id="261" r:id="rId13"/>
     <p:sldId id="262" r:id="rId14"/>
     <p:sldId id="263" r:id="rId15"/>
+    <p:sldId id="264" r:id="rId16"/>
   </p:sldIdLst>
   <p:sldSz cx="12191695" cy="6858000" type="screen4x3"/>
   <p:notesSz cx="6858000" cy="9144000"/>
@@ -937,6 +938,77 @@
             <a:r>
               <a:rPr sz="1100"/>
               <a:t>A neutral checker reporting that two partners exchange something neither declares makes the gap a property of the interface rather than an accusation.</a:t>
+            </a:r>
+          </a:p>
+        </p:txBody>
+      </p:sp>
+      <p:sp>
+        <p:nvSpPr>
+          <p:cNvPr id="4" name="Slide Number Placeholder 3"/>
+          <p:cNvSpPr>
+            <a:spLocks noGrp="1"/>
+          </p:cNvSpPr>
+          <p:nvPr>
+            <p:ph type="sldNum" idx="5" sz="quarter"/>
+          </p:nvPr>
+        </p:nvSpPr>
+        <p:spPr/>
+      </p:sp>
+    </p:spTree>
+  </p:cSld>
+  <p:clrMapOvr>
+    <a:masterClrMapping/>
+  </p:clrMapOvr>
+</p:notes>
+</file>
+
+<file path=ppt/notesSlides/notesSlide8.xml><?xml version="1.0" encoding="utf-8"?>
+<p:notes xmlns:a="http://schemas.openxmlformats.org/drawingml/2006/main" xmlns:p="http://schemas.openxmlformats.org/presentationml/2006/main" xmlns:r="http://schemas.openxmlformats.org/officeDocument/2006/relationships">
+  <p:cSld>
+    <p:spTree>
+      <p:nvGrpSpPr>
+        <p:cNvPr id="1" name=""/>
+        <p:cNvGrpSpPr/>
+        <p:nvPr/>
+      </p:nvGrpSpPr>
+      <p:grpSpPr>
+        <a:xfrm>
+          <a:off x="0" y="0"/>
+          <a:ext cx="0" cy="0"/>
+          <a:chOff x="0" y="0"/>
+          <a:chExt cx="0" cy="0"/>
+        </a:xfrm>
+      </p:grpSpPr>
+      <p:sp>
+        <p:nvSpPr>
+          <p:cNvPr id="2" name="Slide Image Placeholder 1"/>
+          <p:cNvSpPr>
+            <a:spLocks noGrp="1"/>
+          </p:cNvSpPr>
+          <p:nvPr>
+            <p:ph type="sldImg" idx="2"/>
+          </p:nvPr>
+        </p:nvSpPr>
+        <p:spPr/>
+      </p:sp>
+      <p:sp>
+        <p:nvSpPr>
+          <p:cNvPr id="3" name="Notes Placeholder 2"/>
+          <p:cNvSpPr>
+            <a:spLocks noGrp="1"/>
+          </p:cNvSpPr>
+          <p:nvPr>
+            <p:ph type="body" idx="3" sz="quarter"/>
+          </p:nvPr>
+        </p:nvSpPr>
+        <p:spPr/>
+        <p:txBody>
+          <a:bodyPr/>
+          <a:lstStyle/>
+          <a:p>
+            <a:r>
+              <a:rPr sz="1100"/>
+              <a:t>Close on the last two bullets. The narrow demonstration is the real ask, because it means saying no to breadth that would look better in a status report. If asked what happens without the declaration: partners keep filling the same gaps privately, the models keep disagreeing for reasons that appear in neither specification, and month 14 looks like month 8 with less money. If asked whether this is enough for year two: the demonstration is what the funder said it wanted to see, and the traceability pass is what lets anyone check that it means what it says.</a:t>
             </a:r>
           </a:p>
         </p:txBody>
@@ -4239,6 +4311,48 @@
       <p:pic>
         <p:nvPicPr>
           <p:cNvPr id="2" name="Picture 1" descr="07.png"/>
+          <p:cNvPicPr>
+            <a:picLocks noChangeAspect="1"/>
+          </p:cNvPicPr>
+          <p:nvPr/>
+        </p:nvPicPr>
+        <p:blipFill>
+          <a:blip r:embed="rId2"/>
+          <a:stretch>
+            <a:fillRect/>
+          </a:stretch>
+        </p:blipFill>
+        <p:spPr>
+          <a:xfrm>
+            <a:off x="0" y="0"/>
+            <a:ext cx="12191695" cy="6858000"/>
+          </a:xfrm>
+          <a:prstGeom prst="rect">
+            <a:avLst/>
+          </a:prstGeom>
+        </p:spPr>
+      </p:pic>
+    </p:spTree>
+  </p:cSld>
+  <p:clrMapOvr>
+    <a:masterClrMapping/>
+  </p:clrMapOvr>
+</p:sld>
+</file>
+
+<file path=ppt/slides/slide9.xml><?xml version="1.0" encoding="utf-8"?>
+<p:sld xmlns:a="http://schemas.openxmlformats.org/drawingml/2006/main" xmlns:p="http://schemas.openxmlformats.org/presentationml/2006/main" xmlns:r="http://schemas.openxmlformats.org/officeDocument/2006/relationships">
+  <p:cSld>
+    <p:spTree>
+      <p:nvGrpSpPr>
+        <p:cNvPr id="1" name=""/>
+        <p:cNvGrpSpPr/>
+        <p:nvPr/>
+      </p:nvGrpSpPr>
+      <p:grpSpPr/>
+      <p:pic>
+        <p:nvPicPr>
+          <p:cNvPr id="2" name="Picture 1" descr="08.png"/>
           <p:cNvPicPr>
             <a:picLocks noChangeAspect="1"/>
           </p:cNvPicPr>

--- a/deck/ares_board_deck.pptx
+++ b/deck/ares_board_deck.pptx
@@ -653,7 +653,7 @@
           <a:p>
             <a:r>
               <a:rPr sz="1100"/>
-              <a:t>Slow down here, the language is deliberate. Counter-case: loose coupling is defensible for a planning study and indefensible for a resilience claim, and the funder is buying a resilience claim. Where the floor sits is Meridian's to state, which is why track B elicits it in weeks 1 to 3. The credibility threshold is Li et al. 2019, Applied Energy 239. Source if asked: the 2018 dust figures are Opportunity's own telemetry as reported by JPL, 645 Wh on 30 May falling to 22 Wh by 10 June, against a clear-sky baseline near 600 to 900 Wh per sol. Real published data, external to the brief, unlike everything else here. BACKUP EXHIBIT, on the page rather than a slide: if pressed on why coupling matters in practice, pull up the storage figure. 120 sols is 2,959 hours, so every kilowatt that cannot be shed needs 2,959 kWh stored, which is 13.5 to 17.9 tonnes of battery per kW or 1.3 to 1.6 tonnes of fuel cell reactant. You do not store your way out, you generate your way out. And the multiplier is fixed while the number of kilowatts it applies to is exactly what neither partner can compute alone.</a:t>
+              <a:t>Slow down here, the language is deliberate. Counter-case: loose coupling is defensible for a planning study and indefensible for a resilience claim, and the funder is buying a resilience claim. Where the floor sits is Meridian's to state, which is why track B elicits it in weeks 1 to 3. The credibility threshold is Li et al. 2019, Applied Energy 239. Source if asked: the 2018 dust figures are Opportunity's own telemetry as reported by JPL, 645 Wh on 30 May falling to 22 Wh by 10 June, against a clear-sky baseline near 600 to 900 Wh per sol. Real published data, external to the brief, unlike everything else here. Backup exhibit, on the page rather than a slide: if pressed on why coupling matters in practice, pull up the storage figure. 120 sols is 2,959 hours, so every kilowatt that cannot be shed needs 2,959 kWh stored, which is 13.5 to 17.9 tonnes of battery per kW or 1.3 to 1.6 tonnes of fuel cell reactant. You do not store your way out, you generate your way out. And the multiplier is fixed while the number of kilowatts it applies to is exactly what neither partner can compute alone.</a:t>
             </a:r>
           </a:p>
         </p:txBody>

--- a/deck/ares_board_deck.pptx
+++ b/deck/ares_board_deck.pptx
@@ -937,7 +937,7 @@
           <a:p>
             <a:r>
               <a:rPr sz="1100"/>
-              <a:t>A neutral checker reporting that two partners exchange something neither declares makes the gap a property of the interface rather than an accusation.</a:t>
+              <a:t>A neutral checker reporting that two partners exchange something neither declares makes the gap a fact about the interface rather than an accusation against a partner.</a:t>
             </a:r>
           </a:p>
         </p:txBody>

--- a/deck/ares_board_deck.pptx
+++ b/deck/ares_board_deck.pptx
@@ -511,7 +511,7 @@
           <a:p>
             <a:r>
               <a:rPr sz="1100"/>
-              <a:t>Open here. This slide stops the room treating these as four problems with four owners.</a:t>
+              <a:t>Open here. This slide stops the room treating these as four problems with four owners. The four partners are Solis, capacity engineering, Tharsis, habitat demand simulation, Meridian, the risk laboratory, and Helix, the translation layer.</a:t>
             </a:r>
           </a:p>
         </p:txBody>
@@ -653,7 +653,7 @@
           <a:p>
             <a:r>
               <a:rPr sz="1100"/>
-              <a:t>Slow down here, the language is deliberate. Counter-case: loose coupling is defensible for a planning study and indefensible for a resilience claim, and the funder is buying a resilience claim. Where the floor sits is Meridian's to state, which is why track B elicits it in weeks 1 to 3. The credibility threshold is Li et al. 2019, Applied Energy 239. Source if asked: the 2018 dust figures are Opportunity's own telemetry as reported by JPL, 645 Wh on 30 May falling to 22 Wh by 10 June, against a clear-sky baseline near 600 to 900 Wh per sol. Real published data, external to the brief, unlike everything else here. Backup exhibit, on the page rather than a slide: if pressed on why coupling matters in practice, pull up the storage figure. 120 sols is 2,959 hours, so every kilowatt that cannot be shed needs 2,959 kWh stored, which is 13.5 to 17.9 tonnes of battery per kW or 1.3 to 1.6 tonnes of fuel cell reactant. You do not store your way out, you generate your way out. And the multiplier is fixed while the number of kilowatts it applies to is exactly what neither partner can compute alone.</a:t>
+              <a:t>Slow down here, the language is deliberate. Counter-case: loose coupling is defensible for a planning study and indefensible for a resilience claim, and the funder is buying a resilience claim. Where the floor sits is Meridian's to state, which is why track B elicits it in weeks 1 to 3. The credibility threshold is Li et al. 2019, Applied Energy 239. Source if asked: the 2018 dust figures are Opportunity's own telemetry as reported by JPL, 645 Wh on 30 May falling to 22 Wh by 10 June, against a clear-sky baseline near 600 to 900 Wh per sol. Real published data, external to the brief, unlike everything else here. Backup exhibit, on the page rather than a slide: if pressed on why coupling matters in practice, pull up the storage figure. 120 sols is 2,959 hours, so every kilowatt that cannot be shed needs 2,959 kWh stored, which is 13.5 to 17.9 tonnes of battery per kW or 1.3 to 1.6 tonnes of fuel cell reactant. You do not store your way out, you generate your way out. And the multiplier is fixed while the number of kilowatts it applies to is exactly what neither partner can compute alone. Be honest on the demand side if pressed. Crew are inside a pressurised habitat at all times, so a storm changes no sheltering behaviour. The uplift is thermal first, less insolation meaning less passive solar gain, with any daylight contribution to habitat and crop lighting replaced electrically and dust mitigation rising. Against it, extravehicular activity stops, so suit charging, airlock cycling and rover operations fall. The direction is physical, the magnitude is assumed rather than measured, and establishing it is the first thing to ask Tharsis for.</a:t>
             </a:r>
           </a:p>
         </p:txBody>
@@ -724,7 +724,7 @@
           <a:p>
             <a:r>
               <a:rPr sz="1100"/>
-              <a:t>This answers the real question, which is whether the programme survives contact with reality.</a:t>
+              <a:t>This answers the real question, which is whether the programme survives contact with reality. Week 5 is also the buffer, with nothing scheduled into it that cannot move out.</a:t>
             </a:r>
           </a:p>
         </p:txBody>
@@ -866,7 +866,7 @@
           <a:p>
             <a:r>
               <a:rPr sz="1100"/>
-              <a:t>The Helix line is the one to say out loud. It is a governance point dressed as a seating plan.</a:t>
+              <a:t>The blue underlines are where a decision is made and they all sit on the left. Weeks 1 to 3 fix the calendar, the units, the encoding and how capacity degrades. From week 4 the sessions review a thing that already runs. The expensive one is the derate session in week 2: Solis cannot state how its capacity degrades without Meridian's failure definitions, so the two rule on it together, and if it slips week 4 carries an assumption nobody owns. On Helix, the point is not that they are junior. They convert between two vocabularies, so they must be present when meaning is settled or they build against something nobody consulted them on, and converting between two vocabularies gives them no standing to rule on what either means.</a:t>
             </a:r>
           </a:p>
         </p:txBody>
@@ -1008,7 +1008,7 @@
           <a:p>
             <a:r>
               <a:rPr sz="1100"/>
-              <a:t>Close on the last two bullets. The narrow demonstration is the real ask, because it means saying no to breadth that would look better in a status report. If asked what happens without the declaration: partners keep filling the same gaps privately, the models keep disagreeing for reasons that appear in neither specification, and month 14 looks like month 8 with less money. If asked whether this is enough for year two: the demonstration is what the funder said it wanted to see, and the traceability pass is what lets anyone check that it means what it says.</a:t>
+              <a:t>Close on the last two bullets. The narrow demonstration is the real ask, because it means saying no to breadth that would look better in a status report. If asked what happens without the written contract: partners keep filling the same gaps privately, the models keep disagreeing for reasons that appear in neither specification, and month 14 looks like month 8 with less money. If asked whether this is enough for year two: the demonstration is what the funder said it wanted to see, and the traceability pass is what lets anyone check that it means what it says.</a:t>
             </a:r>
           </a:p>
         </p:txBody>

--- a/deck/ares_board_deck.pptx
+++ b/deck/ares_board_deck.pptx
@@ -653,7 +653,7 @@
           <a:p>
             <a:r>
               <a:rPr sz="1100"/>
-              <a:t>Slow down here, the language is deliberate. Counter-case: loose coupling is defensible for a planning study and indefensible for a resilience claim, and the funder is buying a resilience claim. Where the floor sits is Meridian's to state, which is why track B elicits it in weeks 1 to 3. The credibility threshold is Li et al. 2019, Applied Energy 239. Source if asked: the 2018 dust figures are Opportunity's own telemetry as reported by JPL, 645 Wh on 30 May falling to 22 Wh by 10 June, against a clear-sky baseline near 600 to 900 Wh per sol. Real published data, external to the brief, unlike everything else here. Backup exhibit, on the page rather than a slide: if pressed on why coupling matters in practice, pull up the storage figure. 120 sols is 2,959 hours, so every kilowatt that cannot be shed needs 2,959 kWh stored, which is 13.5 to 17.9 tonnes of battery per kW or 1.3 to 1.6 tonnes of fuel cell reactant. You do not store your way out, you generate your way out. And the multiplier is fixed while the number of kilowatts it applies to is exactly what neither partner can compute alone. Be honest on the demand side if pressed. Crew are inside a pressurised habitat at all times, so a storm changes no sheltering behaviour. The uplift is thermal first, less insolation meaning less passive solar gain, with any daylight contribution to habitat and crop lighting replaced electrically and dust mitigation rising. Against it, extravehicular activity stops, so suit charging, airlock cycling and rover operations fall. The direction is physical, the magnitude is assumed rather than measured, and establishing it is the first thing to ask Tharsis for.</a:t>
+              <a:t>Slow down here, the language is deliberate. Counter-case: loose coupling is defensible for a planning study and indefensible for a resilience claim, and the funder is buying a resilience claim. Where the floor sits is Meridian's to state, which is why track B elicits it in weeks 1 to 3. The credibility threshold is Li et al. 2019, Applied Energy 239. Source if asked: the 2018 dust figures are Opportunity's own telemetry as reported by JPL, 645 Wh on 30 May falling to 22 Wh by 10 June, against a clear-sky baseline near 600 to 900 Wh per sol. Real published data, external to the brief, unlike everything else here. Backup exhibit, on the page rather than a slide: if pressed on why coupling matters in practice, pull up the storage figure. 120 sols is 2,959 hours, so every kilowatt that cannot be shed needs 2,959 kWh stored, which is 13.5 to 17.9 tonnes of battery per kW or 1.3 to 1.6 tonnes of fuel cell reactant. You do not store your way out, you generate your way out. And the multiplier is fixed while the number of kilowatts it applies to is exactly what neither partner can compute alone. Be honest on the demand side if pressed. Crew are inside a pressurised habitat at all times, so a storm changes no sheltering behaviour, and there is no published uplift figure for a Mars habitat in a storm. The published direction is the other way: Cataldo 2009, NASA GRC E-18237, Table II holds habitat power flat through a storm and takes rover recharge and drilling to zero, and Rucker 2016, JSC-CN-35576, puts keep-alive near 22 kW against 35 kW normal. That does not weaken the coupling argument, it sharpens it. The storm forces a shed, and what decides survival is whether the floor that cannot be shed still fits under the derated supply. Neither partner can compute that floor alone, which is GAP-5.</a:t>
             </a:r>
           </a:p>
         </p:txBody>
@@ -937,7 +937,7 @@
           <a:p>
             <a:r>
               <a:rPr sz="1100"/>
-              <a:t>A neutral checker reporting that two partners exchange something neither declares makes the gap a fact about the interface rather than an accusation against a partner.</a:t>
+              <a:t>The order is deliberate. Helix and Meridian are the two you can point at in the month 8 record, so they carry the slide and they are the two to approach first. Solis and Tharsis are argued, not quoted, and the honest framing is that the late exchange exposes both ends of it for different reasons. If challenged on Solis: the point is not that Solis is at fault. It is that no document states what that exchange should have contained or when it was due, so nobody in this room can say whether the delivery was met, and Solis has no way to show it. That is a cost to Solis whichever way the facts fall. If challenged on Tharsis: it consumes what the other models produce, which is what makes a two month slip unrecoverable rather than merely late. On the fourth symptom, the scale mismatch: settling what has to cross is also how the consortium finds out whether a tight bidirectional coupling is needed. Two partners are currently at risk of building one that nobody has justified. What this slide deliberately does not do is state any partner's preference, position or willingness. Nobody has told us those, and a board slide that invents them is the first thing a partner will correct in the room.</a:t>
             </a:r>
           </a:p>
         </p:txBody>

--- a/deck/ares_board_deck.pptx
+++ b/deck/ares_board_deck.pptx
@@ -724,7 +724,7 @@
           <a:p>
             <a:r>
               <a:rPr sz="1100"/>
-              <a:t>This answers the real question, which is whether the programme survives contact with reality. Week 5 is also the buffer, with nothing scheduled into it that cannot move out.</a:t>
+              <a:t>The shape is the argument. From week 2 the demonstration exists and runs, and every week after that improves the same one rather than building toward a first, so each week is a superset of the week before and the worst case in week 6 is showing week 5's version. Week 2 runs end to end on deliberately crude inputs, one sol and nothing polished, because the job of that run is to make every format, encoding and calendar mismatch fail while there is still time. The consortium is at month 8 and has never run the two models end to end, so an exchange arriving late and in an unexpected format is exactly what to expect. Week 5 is buffer, with nothing scheduled into it that cannot move out, and it doubles as the test of the recommendation: Solis revises its design after seeing the stress run, and if the design barely changes then the feedback between the models is weak and tight coupling was not needed.</a:t>
             </a:r>
           </a:p>
         </p:txBody>

--- a/deck/ares_board_deck.pptx
+++ b/deck/ares_board_deck.pptx
@@ -795,7 +795,7 @@
           <a:p>
             <a:r>
               <a:rPr sz="1100"/>
-              <a:t>Review points at the end of weeks 1, 2, 3 and 5. Those four traceability questions are exactly what the funder's review asks.</a:t>
+              <a:t>The picture is the slide, so do not read it out. Take questions on it. The bottom row is the one that matters, because it is what you can hold us to at the end of each week, and week 6 is the demonstration itself. Three things worth saying if they come up. Week 5 is buffer, and nothing is scheduled into it that cannot move out, so a stress case that slips lands there and week 6 still rehearses. The traceability pass means every number in the demonstration traces back to the model, the contract, the schedule version and the threshold set that produced it, which is what lets anyone check the demonstration means what it says. And the conformance check is the only role the brief supports for Helix, since it names no input and no output for them. The riskiest hour in the plan is the derate session in week 2, because Solis cannot state how its capacity degrades without Meridian's failure definitions, and if that slips week 4 runs on an assumption nobody owns.</a:t>
             </a:r>
           </a:p>
         </p:txBody>

--- a/deck/ares_board_deck.pptx
+++ b/deck/ares_board_deck.pptx
@@ -653,7 +653,7 @@
           <a:p>
             <a:r>
               <a:rPr sz="1100"/>
-              <a:t>Slow down here, the language is deliberate. Counter-case: loose coupling is defensible for a planning study and indefensible for a resilience claim, and the funder is buying a resilience claim. Where the floor sits is Meridian's to state, which is why track B elicits it in weeks 1 to 3. The credibility threshold is Li et al. 2019, Applied Energy 239. Source if asked: the 2018 dust figures are Opportunity's own telemetry as reported by JPL, 645 Wh on 30 May falling to 22 Wh by 10 June, against a clear-sky baseline near 600 to 900 Wh per sol. Real published data, external to the brief, unlike everything else here. Backup exhibit, on the page rather than a slide: if pressed on why coupling matters in practice, pull up the storage figure. 120 sols is 2,959 hours, so every kilowatt that cannot be shed needs 2,959 kWh stored, which is 13.5 to 17.9 tonnes of battery per kW or 1.3 to 1.6 tonnes of fuel cell reactant. You do not store your way out, you generate your way out. And the multiplier is fixed while the number of kilowatts it applies to is exactly what neither partner can compute alone. Be honest on the demand side if pressed. Crew are inside a pressurised habitat at all times, so a storm changes no sheltering behaviour, and there is no published uplift figure for a Mars habitat in a storm. The published direction is the other way: Cataldo 2009, NASA GRC E-18237, Table II holds habitat power flat through a storm and takes rover recharge and drilling to zero, and Rucker 2016, JSC-CN-35576, puts keep-alive near 22 kW against 35 kW normal. That does not weaken the coupling argument, it sharpens it. The storm forces a shed, and what decides survival is whether the floor that cannot be shed still fits under the derated supply. Neither partner can compute that floor alone, which is GAP-5.</a:t>
+              <a:t>Slow down here, the language is deliberate. Counter-case: loose coupling is defensible for a planning study and indefensible for a resilience claim, and the funder is buying a resilience claim. Where the floor sits is Meridian's to state, which is why track B elicits it in weeks 1 to 3. The credibility threshold is Li et al. 2019, Applied Energy 239. Source if asked: the 2018 dust figures are Opportunity's own telemetry as reported by JPL, 645 Wh on 30 May falling to 22 Wh by 10 June, against a clear-sky baseline near 600 to 900 Wh per sol. Real published data, external to the brief, unlike everything else here. Backup exhibit, on the page rather than a slide: if pressed on why coupling matters in practice, pull up the storage figure. 120 sols is 2,959 hours, so every kilowatt that cannot be shed needs 2,959 kWh stored, which is 13.5 to 17.9 tonnes of battery per kW or 1.3 to 1.6 tonnes of fuel cell reactant. You do not store your way out, you generate your way out. And the multiplier is fixed while the number of kilowatts it applies to is exactly what neither partner can compute alone. Be honest on the demand side if pressed. Crew are inside a pressurised habitat at all times, so a storm changes no sheltering behaviour, and there is no published uplift figure for a Mars habitat in a storm. The published direction is the other way: Cataldo 2009, NASA GRC E-18237, Table II holds habitat power flat through a storm and takes rover recharge and drilling to zero, and Rucker 2016, JSC-CN-35576, puts keep-alive near 22 kW against 35 kW normal. That does not weaken the coupling argument, it sharpens it. The storm forces a shed, and what decides survival is whether the floor that cannot be shed still fits under the derated supply. Neither partner can compute that floor alone, which is the load taxonomy, gap 5 on the ownership slide.</a:t>
             </a:r>
           </a:p>
         </p:txBody>

--- a/deck/ares_board_deck.pptx
+++ b/deck/ares_board_deck.pptx
@@ -866,7 +866,7 @@
           <a:p>
             <a:r>
               <a:rPr sz="1100"/>
-              <a:t>The blue underlines are where a decision is made and they all sit on the left. Weeks 1 to 3 fix the calendar, the units, the encoding and how capacity degrades. From week 4 the sessions review a thing that already runs. The expensive one is the derate session in week 2: Solis cannot state how its capacity degrades without Meridian's failure definitions, so the two rule on it together, and if it slips week 4 carries an assumption nobody owns. On Helix, the point is not that they are junior. They convert between two vocabularies, so they must be present when meaning is settled or they build against something nobody consulted them on, and converting between two vocabularies gives them no standing to rule on what either means.</a:t>
+              <a:t>Let them read it. The calendar is the slide and it answers what a board member wants: when each session is, what it is for, what leaves the room, who is in it and who rules. Six of the ten sessions fall in weeks 1 and 2, five sessions settle something and all five are done by week 3, and from week 4 the sessions review a thing that already runs. The expensive one is the derate session in week 2. Solis cannot state how its capacity degrades without Meridian's failure definitions, so the two rule on it together, and if it slips, week 4 carries an assumption nobody owns. On Helix, the point is not that they are junior. They convert between two vocabularies, so they must be present when meaning is settled or they build against something nobody consulted them on, and converting between two vocabularies gives them no standing to rule on what either one means. That is why they are in seven rooms and underlined in none. The standup is thirty minutes a week in weeks 3 to 5, not a fourth workshop.</a:t>
             </a:r>
           </a:p>
         </p:txBody>

--- a/deck/ares_board_deck.pptx
+++ b/deck/ares_board_deck.pptx
@@ -582,7 +582,7 @@
           <a:p>
             <a:r>
               <a:rPr sz="1100"/>
-              <a:t>If asked how these were found: list what each partner consumes against what each produces. The gaps are in the text.</a:t>
+              <a:t>How these were found, if asked: list what each partner consumes against what each produces, and read off what appears on neither side. Nothing here is invented, every gap is read off the partners' own declarations. Of the six possible pairs the brief states two, Solis to Tharsis, the exchange that is two months late and not in the planned format, and Tharsis with Helix, the shared interface variables they disagree about. The return path from Tharsis to Solis is implied by the two clauses and never stated. Meridian appears in no stated exchange with anybody, which is why its thresholds reach no model. GAP-1 and GAP-2 are conversions, an aggregation operator and a derate function. Each is real work, each requires a judgement, which percentile, which window, whose failure rates, and each is assigned to nobody. GAP-4 is not a modelling output at all, it is a programme assumption about who is on Mars doing what, which is exactly why it fell between four models. GAP-5 is the one that decides the fidelity argument on the next slide, because a storm collapses supply while the life-support floor does not move. If asked what would close these: name an owner for each, which is week 1 of the plan.</a:t>
             </a:r>
           </a:p>
         </p:txBody>
